--- a/presentation/ENERGYDB_Presentation.pptx
+++ b/presentation/ENERGYDB_Presentation.pptx
@@ -5,38 +5,32 @@
     <p:sldMasterId id="2147483648" r:id="rId1"/>
   </p:sldMasterIdLst>
   <p:notesMasterIdLst>
-    <p:notesMasterId r:id="rId16"/>
+    <p:notesMasterId r:id="rId15"/>
   </p:notesMasterIdLst>
   <p:sldIdLst>
     <p:sldId id="256" r:id="rId2"/>
-    <p:sldId id="257" r:id="rId3"/>
-    <p:sldId id="272" r:id="rId4"/>
-    <p:sldId id="261" r:id="rId5"/>
-    <p:sldId id="262" r:id="rId6"/>
-    <p:sldId id="263" r:id="rId7"/>
-    <p:sldId id="264" r:id="rId8"/>
-    <p:sldId id="265" r:id="rId9"/>
-    <p:sldId id="266" r:id="rId10"/>
-    <p:sldId id="267" r:id="rId11"/>
-    <p:sldId id="268" r:id="rId12"/>
-    <p:sldId id="269" r:id="rId13"/>
-    <p:sldId id="271" r:id="rId14"/>
-    <p:sldId id="259" r:id="rId15"/>
+    <p:sldId id="272" r:id="rId3"/>
+    <p:sldId id="261" r:id="rId4"/>
+    <p:sldId id="262" r:id="rId5"/>
+    <p:sldId id="263" r:id="rId6"/>
+    <p:sldId id="264" r:id="rId7"/>
+    <p:sldId id="265" r:id="rId8"/>
+    <p:sldId id="266" r:id="rId9"/>
+    <p:sldId id="267" r:id="rId10"/>
+    <p:sldId id="268" r:id="rId11"/>
+    <p:sldId id="269" r:id="rId12"/>
+    <p:sldId id="271" r:id="rId13"/>
+    <p:sldId id="259" r:id="rId14"/>
   </p:sldIdLst>
   <p:sldSz cx="12192000" cy="6858000"/>
   <p:notesSz cx="6858000" cy="9144000"/>
   <p:embeddedFontLst>
     <p:embeddedFont>
-      <p:font typeface="Lato Black" panose="020F0502020204030203" pitchFamily="34" charset="0"/>
+      <p:font typeface="Libre Baskerville" panose="02000000000000000000" pitchFamily="2" charset="0"/>
+      <p:regular r:id="rId16"/>
       <p:bold r:id="rId17"/>
-      <p:boldItalic r:id="rId18"/>
-    </p:embeddedFont>
-    <p:embeddedFont>
-      <p:font typeface="Libre Baskerville" panose="02000000000000000000" pitchFamily="2" charset="0"/>
-      <p:regular r:id="rId19"/>
-      <p:bold r:id="rId20"/>
-      <p:italic r:id="rId21"/>
-      <p:boldItalic r:id="rId22"/>
+      <p:italic r:id="rId18"/>
+      <p:boldItalic r:id="rId19"/>
     </p:embeddedFont>
   </p:embeddedFontLst>
   <p:defaultTextStyle>
@@ -273,7 +267,7 @@
       <p15:sldGuideLst xmlns:p15="http://schemas.microsoft.com/office/powerpoint/2012/main"/>
     </p:ext>
     <p:ext uri="GoogleSlidesCustomDataVersion2">
-      <go:slidesCustomData xmlns="" xmlns:mc="http://schemas.openxmlformats.org/markup-compatibility/2006" xmlns:mv="urn:schemas-microsoft-com:mac:vml" xmlns:c="http://schemas.openxmlformats.org/drawingml/2006/chart" xmlns:dgm="http://schemas.openxmlformats.org/drawingml/2006/diagram" xmlns:o="urn:schemas-microsoft-com:office:office" xmlns:v="urn:schemas-microsoft-com:vml" xmlns:pvml="urn:schemas-microsoft-com:office:powerpoint" xmlns:com="http://schemas.openxmlformats.org/drawingml/2006/compatibility" xmlns:p14="http://schemas.microsoft.com/office/powerpoint/2010/main" xmlns:p15="http://schemas.microsoft.com/office/powerpoint/2012/main" xmlns:ahyp="http://schemas.microsoft.com/office/drawing/2018/hyperlinkcolor" xmlns:go="http://customooxmlschemas.google.com/" r:id="rId23" roundtripDataSignature="AMtx7mi4HmEECUlll0m8HTY06QsqsmZGGQ=="/>
+      <go:slidesCustomData xmlns:go="http://customooxmlschemas.google.com/" xmlns:ahyp="http://schemas.microsoft.com/office/drawing/2018/hyperlinkcolor" xmlns:p15="http://schemas.microsoft.com/office/powerpoint/2012/main" xmlns:p14="http://schemas.microsoft.com/office/powerpoint/2010/main" xmlns:com="http://schemas.openxmlformats.org/drawingml/2006/compatibility" xmlns:pvml="urn:schemas-microsoft-com:office:powerpoint" xmlns:v="urn:schemas-microsoft-com:vml" xmlns:o="urn:schemas-microsoft-com:office:office" xmlns:dgm="http://schemas.openxmlformats.org/drawingml/2006/diagram" xmlns:c="http://schemas.openxmlformats.org/drawingml/2006/chart" xmlns:mv="urn:schemas-microsoft-com:mac:vml" xmlns:mc="http://schemas.openxmlformats.org/markup-compatibility/2006" xmlns="" r:id="rId23" roundtripDataSignature="AMtx7mi4HmEECUlll0m8HTY06QsqsmZGGQ=="/>
     </p:ext>
   </p:extLst>
 </p:presentation>
@@ -3175,7 +3169,7 @@
         <p:cNvPr id="1" name="Shape 106">
           <a:extLst>
             <a:ext uri="{FF2B5EF4-FFF2-40B4-BE49-F238E27FC236}">
-              <a16:creationId xmlns:a16="http://schemas.microsoft.com/office/drawing/2014/main" id="{F4AA39E6-9BCB-E020-3643-BAFC871AE643}"/>
+              <a16:creationId xmlns:a16="http://schemas.microsoft.com/office/drawing/2014/main" id="{56D52D4C-9508-FA8F-43AC-0DC8A05B7E51}"/>
             </a:ext>
           </a:extLst>
         </p:cNvPr>
@@ -3195,7 +3189,7 @@
           <p:cNvPr id="107" name="Google Shape;107;p4:notes">
             <a:extLst>
               <a:ext uri="{FF2B5EF4-FFF2-40B4-BE49-F238E27FC236}">
-                <a16:creationId xmlns:a16="http://schemas.microsoft.com/office/drawing/2014/main" id="{5BE105F2-DA8F-E43C-BBFC-887B69CD8F18}"/>
+                <a16:creationId xmlns:a16="http://schemas.microsoft.com/office/drawing/2014/main" id="{5CF04EAD-92CC-09A6-4C7A-02129B46128F}"/>
               </a:ext>
             </a:extLst>
           </p:cNvPr>
@@ -3247,7 +3241,7 @@
           <p:cNvPr id="108" name="Google Shape;108;p4:notes">
             <a:extLst>
               <a:ext uri="{FF2B5EF4-FFF2-40B4-BE49-F238E27FC236}">
-                <a16:creationId xmlns:a16="http://schemas.microsoft.com/office/drawing/2014/main" id="{00B7E34E-FC9E-CA81-35CD-E48FCD9D2FB6}"/>
+                <a16:creationId xmlns:a16="http://schemas.microsoft.com/office/drawing/2014/main" id="{DB70C974-D6FA-AEDC-940B-90FCAC18C4D8}"/>
               </a:ext>
             </a:extLst>
           </p:cNvPr>
@@ -3302,7 +3296,7 @@
     </p:spTree>
     <p:extLst>
       <p:ext uri="{BB962C8B-B14F-4D97-AF65-F5344CB8AC3E}">
-        <p14:creationId xmlns:p14="http://schemas.microsoft.com/office/powerpoint/2010/main" val="2576505978"/>
+        <p14:creationId xmlns:p14="http://schemas.microsoft.com/office/powerpoint/2010/main" val="3403362445"/>
       </p:ext>
     </p:extLst>
   </p:cSld>
@@ -3320,7 +3314,7 @@
         <p:cNvPr id="1" name="Shape 106">
           <a:extLst>
             <a:ext uri="{FF2B5EF4-FFF2-40B4-BE49-F238E27FC236}">
-              <a16:creationId xmlns:a16="http://schemas.microsoft.com/office/drawing/2014/main" id="{56D52D4C-9508-FA8F-43AC-0DC8A05B7E51}"/>
+              <a16:creationId xmlns:a16="http://schemas.microsoft.com/office/drawing/2014/main" id="{B4BB3741-A3FE-BF40-4E63-32356337C69E}"/>
             </a:ext>
           </a:extLst>
         </p:cNvPr>
@@ -3340,7 +3334,7 @@
           <p:cNvPr id="107" name="Google Shape;107;p4:notes">
             <a:extLst>
               <a:ext uri="{FF2B5EF4-FFF2-40B4-BE49-F238E27FC236}">
-                <a16:creationId xmlns:a16="http://schemas.microsoft.com/office/drawing/2014/main" id="{5CF04EAD-92CC-09A6-4C7A-02129B46128F}"/>
+                <a16:creationId xmlns:a16="http://schemas.microsoft.com/office/drawing/2014/main" id="{A1C13311-97CE-BEC8-CA4E-2D198F30C3A8}"/>
               </a:ext>
             </a:extLst>
           </p:cNvPr>
@@ -3392,7 +3386,7 @@
           <p:cNvPr id="108" name="Google Shape;108;p4:notes">
             <a:extLst>
               <a:ext uri="{FF2B5EF4-FFF2-40B4-BE49-F238E27FC236}">
-                <a16:creationId xmlns:a16="http://schemas.microsoft.com/office/drawing/2014/main" id="{DB70C974-D6FA-AEDC-940B-90FCAC18C4D8}"/>
+                <a16:creationId xmlns:a16="http://schemas.microsoft.com/office/drawing/2014/main" id="{3EE845AA-859C-2653-743F-701CFFA13442}"/>
               </a:ext>
             </a:extLst>
           </p:cNvPr>
@@ -3447,7 +3441,7 @@
     </p:spTree>
     <p:extLst>
       <p:ext uri="{BB962C8B-B14F-4D97-AF65-F5344CB8AC3E}">
-        <p14:creationId xmlns:p14="http://schemas.microsoft.com/office/powerpoint/2010/main" val="3403362445"/>
+        <p14:creationId xmlns:p14="http://schemas.microsoft.com/office/powerpoint/2010/main" val="3848361092"/>
       </p:ext>
     </p:extLst>
   </p:cSld>
@@ -3465,7 +3459,7 @@
         <p:cNvPr id="1" name="Shape 106">
           <a:extLst>
             <a:ext uri="{FF2B5EF4-FFF2-40B4-BE49-F238E27FC236}">
-              <a16:creationId xmlns:a16="http://schemas.microsoft.com/office/drawing/2014/main" id="{B4BB3741-A3FE-BF40-4E63-32356337C69E}"/>
+              <a16:creationId xmlns:a16="http://schemas.microsoft.com/office/drawing/2014/main" id="{5DA1229D-8C3A-8993-187E-853AF6CDCD8C}"/>
             </a:ext>
           </a:extLst>
         </p:cNvPr>
@@ -3485,7 +3479,7 @@
           <p:cNvPr id="107" name="Google Shape;107;p4:notes">
             <a:extLst>
               <a:ext uri="{FF2B5EF4-FFF2-40B4-BE49-F238E27FC236}">
-                <a16:creationId xmlns:a16="http://schemas.microsoft.com/office/drawing/2014/main" id="{A1C13311-97CE-BEC8-CA4E-2D198F30C3A8}"/>
+                <a16:creationId xmlns:a16="http://schemas.microsoft.com/office/drawing/2014/main" id="{2C86F28A-F866-1E79-0A3D-7221D64E1D90}"/>
               </a:ext>
             </a:extLst>
           </p:cNvPr>
@@ -3537,7 +3531,7 @@
           <p:cNvPr id="108" name="Google Shape;108;p4:notes">
             <a:extLst>
               <a:ext uri="{FF2B5EF4-FFF2-40B4-BE49-F238E27FC236}">
-                <a16:creationId xmlns:a16="http://schemas.microsoft.com/office/drawing/2014/main" id="{3EE845AA-859C-2653-743F-701CFFA13442}"/>
+                <a16:creationId xmlns:a16="http://schemas.microsoft.com/office/drawing/2014/main" id="{790465E8-D34F-2766-BA67-6FAA634F65F7}"/>
               </a:ext>
             </a:extLst>
           </p:cNvPr>
@@ -3592,7 +3586,7 @@
     </p:spTree>
     <p:extLst>
       <p:ext uri="{BB962C8B-B14F-4D97-AF65-F5344CB8AC3E}">
-        <p14:creationId xmlns:p14="http://schemas.microsoft.com/office/powerpoint/2010/main" val="3848361092"/>
+        <p14:creationId xmlns:p14="http://schemas.microsoft.com/office/powerpoint/2010/main" val="72051715"/>
       </p:ext>
     </p:extLst>
   </p:cSld>
@@ -3607,13 +3601,7 @@
   <p:cSld>
     <p:spTree>
       <p:nvGrpSpPr>
-        <p:cNvPr id="1" name="Shape 106">
-          <a:extLst>
-            <a:ext uri="{FF2B5EF4-FFF2-40B4-BE49-F238E27FC236}">
-              <a16:creationId xmlns:a16="http://schemas.microsoft.com/office/drawing/2014/main" id="{5DA1229D-8C3A-8993-187E-853AF6CDCD8C}"/>
-            </a:ext>
-          </a:extLst>
-        </p:cNvPr>
+        <p:cNvPr id="1" name="Shape 112"/>
         <p:cNvGrpSpPr/>
         <p:nvPr/>
       </p:nvGrpSpPr>
@@ -3627,13 +3615,7 @@
       </p:grpSpPr>
       <p:sp>
         <p:nvSpPr>
-          <p:cNvPr id="107" name="Google Shape;107;p4:notes">
-            <a:extLst>
-              <a:ext uri="{FF2B5EF4-FFF2-40B4-BE49-F238E27FC236}">
-                <a16:creationId xmlns:a16="http://schemas.microsoft.com/office/drawing/2014/main" id="{2C86F28A-F866-1E79-0A3D-7221D64E1D90}"/>
-              </a:ext>
-            </a:extLst>
-          </p:cNvPr>
+          <p:cNvPr id="113" name="Google Shape;113;p5:notes"/>
           <p:cNvSpPr txBox="1">
             <a:spLocks noGrp="1"/>
           </p:cNvSpPr>
@@ -3670,7 +3652,11 @@
               <a:spcAft>
                 <a:spcPts val="0"/>
               </a:spcAft>
-              <a:buSzPts val="1400"/>
+              <a:buClr>
+                <a:schemeClr val="dk1"/>
+              </a:buClr>
+              <a:buSzPts val="1200"/>
+              <a:buFont typeface="Calibri"/>
               <a:buNone/>
             </a:pPr>
             <a:endParaRPr/>
@@ -3679,13 +3665,7 @@
       </p:sp>
       <p:sp>
         <p:nvSpPr>
-          <p:cNvPr id="108" name="Google Shape;108;p4:notes">
-            <a:extLst>
-              <a:ext uri="{FF2B5EF4-FFF2-40B4-BE49-F238E27FC236}">
-                <a16:creationId xmlns:a16="http://schemas.microsoft.com/office/drawing/2014/main" id="{790465E8-D34F-2766-BA67-6FAA634F65F7}"/>
-              </a:ext>
-            </a:extLst>
-          </p:cNvPr>
+          <p:cNvPr id="114" name="Google Shape;114;p5:notes"/>
           <p:cNvSpPr>
             <a:spLocks noGrp="1" noRot="1" noChangeAspect="1"/>
           </p:cNvSpPr>
@@ -3735,11 +3715,6 @@
         </p:spPr>
       </p:sp>
     </p:spTree>
-    <p:extLst>
-      <p:ext uri="{BB962C8B-B14F-4D97-AF65-F5344CB8AC3E}">
-        <p14:creationId xmlns:p14="http://schemas.microsoft.com/office/powerpoint/2010/main" val="72051715"/>
-      </p:ext>
-    </p:extLst>
   </p:cSld>
   <p:clrMapOvr>
     <a:masterClrMapping/>
@@ -3747,12 +3722,18 @@
 </p:notes>
 </file>
 
-<file path=ppt/notesSlides/notesSlide14.xml><?xml version="1.0" encoding="utf-8"?>
+<file path=ppt/notesSlides/notesSlide2.xml><?xml version="1.0" encoding="utf-8"?>
 <p:notes xmlns:a="http://schemas.openxmlformats.org/drawingml/2006/main" xmlns:r="http://schemas.openxmlformats.org/officeDocument/2006/relationships" xmlns:p="http://schemas.openxmlformats.org/presentationml/2006/main" showMasterSp="0" showMasterPhAnim="0">
   <p:cSld>
     <p:spTree>
       <p:nvGrpSpPr>
-        <p:cNvPr id="1" name="Shape 112"/>
+        <p:cNvPr id="1" name="Shape 106">
+          <a:extLst>
+            <a:ext uri="{FF2B5EF4-FFF2-40B4-BE49-F238E27FC236}">
+              <a16:creationId xmlns:a16="http://schemas.microsoft.com/office/drawing/2014/main" id="{E6889B04-F7DC-B15E-36FE-C30B43F52086}"/>
+            </a:ext>
+          </a:extLst>
+        </p:cNvPr>
         <p:cNvGrpSpPr/>
         <p:nvPr/>
       </p:nvGrpSpPr>
@@ -3766,7 +3747,13 @@
       </p:grpSpPr>
       <p:sp>
         <p:nvSpPr>
-          <p:cNvPr id="113" name="Google Shape;113;p5:notes"/>
+          <p:cNvPr id="107" name="Google Shape;107;p4:notes">
+            <a:extLst>
+              <a:ext uri="{FF2B5EF4-FFF2-40B4-BE49-F238E27FC236}">
+                <a16:creationId xmlns:a16="http://schemas.microsoft.com/office/drawing/2014/main" id="{4BBD8A58-213B-C0A4-8F7D-9ED8C6BC991D}"/>
+              </a:ext>
+            </a:extLst>
+          </p:cNvPr>
           <p:cNvSpPr txBox="1">
             <a:spLocks noGrp="1"/>
           </p:cNvSpPr>
@@ -3803,11 +3790,7 @@
               <a:spcAft>
                 <a:spcPts val="0"/>
               </a:spcAft>
-              <a:buClr>
-                <a:schemeClr val="dk1"/>
-              </a:buClr>
-              <a:buSzPts val="1200"/>
-              <a:buFont typeface="Calibri"/>
+              <a:buSzPts val="1400"/>
               <a:buNone/>
             </a:pPr>
             <a:endParaRPr/>
@@ -3816,7 +3799,13 @@
       </p:sp>
       <p:sp>
         <p:nvSpPr>
-          <p:cNvPr id="114" name="Google Shape;114;p5:notes"/>
+          <p:cNvPr id="108" name="Google Shape;108;p4:notes">
+            <a:extLst>
+              <a:ext uri="{FF2B5EF4-FFF2-40B4-BE49-F238E27FC236}">
+                <a16:creationId xmlns:a16="http://schemas.microsoft.com/office/drawing/2014/main" id="{F1F53E23-447A-C7C1-EE8E-DD1DB2E95215}"/>
+              </a:ext>
+            </a:extLst>
+          </p:cNvPr>
           <p:cNvSpPr>
             <a:spLocks noGrp="1" noRot="1" noChangeAspect="1"/>
           </p:cNvSpPr>
@@ -3866,6 +3855,11 @@
         </p:spPr>
       </p:sp>
     </p:spTree>
+    <p:extLst>
+      <p:ext uri="{BB962C8B-B14F-4D97-AF65-F5344CB8AC3E}">
+        <p14:creationId xmlns:p14="http://schemas.microsoft.com/office/powerpoint/2010/main" val="4212438063"/>
+      </p:ext>
+    </p:extLst>
   </p:cSld>
   <p:clrMapOvr>
     <a:masterClrMapping/>
@@ -3873,12 +3867,18 @@
 </p:notes>
 </file>
 
-<file path=ppt/notesSlides/notesSlide2.xml><?xml version="1.0" encoding="utf-8"?>
+<file path=ppt/notesSlides/notesSlide3.xml><?xml version="1.0" encoding="utf-8"?>
 <p:notes xmlns:a="http://schemas.openxmlformats.org/drawingml/2006/main" xmlns:r="http://schemas.openxmlformats.org/officeDocument/2006/relationships" xmlns:p="http://schemas.openxmlformats.org/presentationml/2006/main" showMasterSp="0" showMasterPhAnim="0">
   <p:cSld>
     <p:spTree>
       <p:nvGrpSpPr>
-        <p:cNvPr id="1" name="Shape 100"/>
+        <p:cNvPr id="1" name="Shape 106">
+          <a:extLst>
+            <a:ext uri="{FF2B5EF4-FFF2-40B4-BE49-F238E27FC236}">
+              <a16:creationId xmlns:a16="http://schemas.microsoft.com/office/drawing/2014/main" id="{9DA79502-90DC-238A-52D1-27D4546AB444}"/>
+            </a:ext>
+          </a:extLst>
+        </p:cNvPr>
         <p:cNvGrpSpPr/>
         <p:nvPr/>
       </p:nvGrpSpPr>
@@ -3892,7 +3892,13 @@
       </p:grpSpPr>
       <p:sp>
         <p:nvSpPr>
-          <p:cNvPr id="101" name="Google Shape;101;p3:notes"/>
+          <p:cNvPr id="107" name="Google Shape;107;p4:notes">
+            <a:extLst>
+              <a:ext uri="{FF2B5EF4-FFF2-40B4-BE49-F238E27FC236}">
+                <a16:creationId xmlns:a16="http://schemas.microsoft.com/office/drawing/2014/main" id="{95425346-094E-995D-E6DD-1B60BEAB66F6}"/>
+              </a:ext>
+            </a:extLst>
+          </p:cNvPr>
           <p:cNvSpPr txBox="1">
             <a:spLocks noGrp="1"/>
           </p:cNvSpPr>
@@ -3938,7 +3944,13 @@
       </p:sp>
       <p:sp>
         <p:nvSpPr>
-          <p:cNvPr id="102" name="Google Shape;102;p3:notes"/>
+          <p:cNvPr id="108" name="Google Shape;108;p4:notes">
+            <a:extLst>
+              <a:ext uri="{FF2B5EF4-FFF2-40B4-BE49-F238E27FC236}">
+                <a16:creationId xmlns:a16="http://schemas.microsoft.com/office/drawing/2014/main" id="{BF39F53D-2016-EDBA-C4C2-0C1D801BE2BE}"/>
+              </a:ext>
+            </a:extLst>
+          </p:cNvPr>
           <p:cNvSpPr>
             <a:spLocks noGrp="1" noRot="1" noChangeAspect="1"/>
           </p:cNvSpPr>
@@ -3988,6 +4000,11 @@
         </p:spPr>
       </p:sp>
     </p:spTree>
+    <p:extLst>
+      <p:ext uri="{BB962C8B-B14F-4D97-AF65-F5344CB8AC3E}">
+        <p14:creationId xmlns:p14="http://schemas.microsoft.com/office/powerpoint/2010/main" val="2073267714"/>
+      </p:ext>
+    </p:extLst>
   </p:cSld>
   <p:clrMapOvr>
     <a:masterClrMapping/>
@@ -3995,7 +4012,7 @@
 </p:notes>
 </file>
 
-<file path=ppt/notesSlides/notesSlide3.xml><?xml version="1.0" encoding="utf-8"?>
+<file path=ppt/notesSlides/notesSlide4.xml><?xml version="1.0" encoding="utf-8"?>
 <p:notes xmlns:a="http://schemas.openxmlformats.org/drawingml/2006/main" xmlns:r="http://schemas.openxmlformats.org/officeDocument/2006/relationships" xmlns:p="http://schemas.openxmlformats.org/presentationml/2006/main" showMasterSp="0" showMasterPhAnim="0">
   <p:cSld>
     <p:spTree>
@@ -4003,7 +4020,7 @@
         <p:cNvPr id="1" name="Shape 106">
           <a:extLst>
             <a:ext uri="{FF2B5EF4-FFF2-40B4-BE49-F238E27FC236}">
-              <a16:creationId xmlns:a16="http://schemas.microsoft.com/office/drawing/2014/main" id="{E6889B04-F7DC-B15E-36FE-C30B43F52086}"/>
+              <a16:creationId xmlns:a16="http://schemas.microsoft.com/office/drawing/2014/main" id="{7F9F8209-5F22-639D-B46D-DA56E25731A3}"/>
             </a:ext>
           </a:extLst>
         </p:cNvPr>
@@ -4023,7 +4040,7 @@
           <p:cNvPr id="107" name="Google Shape;107;p4:notes">
             <a:extLst>
               <a:ext uri="{FF2B5EF4-FFF2-40B4-BE49-F238E27FC236}">
-                <a16:creationId xmlns:a16="http://schemas.microsoft.com/office/drawing/2014/main" id="{4BBD8A58-213B-C0A4-8F7D-9ED8C6BC991D}"/>
+                <a16:creationId xmlns:a16="http://schemas.microsoft.com/office/drawing/2014/main" id="{DCC68FF1-EEDD-98F9-BF0F-5582DFA580CE}"/>
               </a:ext>
             </a:extLst>
           </p:cNvPr>
@@ -4075,7 +4092,7 @@
           <p:cNvPr id="108" name="Google Shape;108;p4:notes">
             <a:extLst>
               <a:ext uri="{FF2B5EF4-FFF2-40B4-BE49-F238E27FC236}">
-                <a16:creationId xmlns:a16="http://schemas.microsoft.com/office/drawing/2014/main" id="{F1F53E23-447A-C7C1-EE8E-DD1DB2E95215}"/>
+                <a16:creationId xmlns:a16="http://schemas.microsoft.com/office/drawing/2014/main" id="{56A0B601-8B52-923E-7BB2-F11765A797BD}"/>
               </a:ext>
             </a:extLst>
           </p:cNvPr>
@@ -4130,7 +4147,7 @@
     </p:spTree>
     <p:extLst>
       <p:ext uri="{BB962C8B-B14F-4D97-AF65-F5344CB8AC3E}">
-        <p14:creationId xmlns:p14="http://schemas.microsoft.com/office/powerpoint/2010/main" val="4212438063"/>
+        <p14:creationId xmlns:p14="http://schemas.microsoft.com/office/powerpoint/2010/main" val="1192576516"/>
       </p:ext>
     </p:extLst>
   </p:cSld>
@@ -4140,7 +4157,7 @@
 </p:notes>
 </file>
 
-<file path=ppt/notesSlides/notesSlide4.xml><?xml version="1.0" encoding="utf-8"?>
+<file path=ppt/notesSlides/notesSlide5.xml><?xml version="1.0" encoding="utf-8"?>
 <p:notes xmlns:a="http://schemas.openxmlformats.org/drawingml/2006/main" xmlns:r="http://schemas.openxmlformats.org/officeDocument/2006/relationships" xmlns:p="http://schemas.openxmlformats.org/presentationml/2006/main" showMasterSp="0" showMasterPhAnim="0">
   <p:cSld>
     <p:spTree>
@@ -4148,7 +4165,7 @@
         <p:cNvPr id="1" name="Shape 106">
           <a:extLst>
             <a:ext uri="{FF2B5EF4-FFF2-40B4-BE49-F238E27FC236}">
-              <a16:creationId xmlns:a16="http://schemas.microsoft.com/office/drawing/2014/main" id="{9DA79502-90DC-238A-52D1-27D4546AB444}"/>
+              <a16:creationId xmlns:a16="http://schemas.microsoft.com/office/drawing/2014/main" id="{D3862E56-5FB8-D21F-363E-51BDDAA2DB00}"/>
             </a:ext>
           </a:extLst>
         </p:cNvPr>
@@ -4168,7 +4185,7 @@
           <p:cNvPr id="107" name="Google Shape;107;p4:notes">
             <a:extLst>
               <a:ext uri="{FF2B5EF4-FFF2-40B4-BE49-F238E27FC236}">
-                <a16:creationId xmlns:a16="http://schemas.microsoft.com/office/drawing/2014/main" id="{95425346-094E-995D-E6DD-1B60BEAB66F6}"/>
+                <a16:creationId xmlns:a16="http://schemas.microsoft.com/office/drawing/2014/main" id="{06D786F1-A047-4FBA-1DE9-501E53C4C112}"/>
               </a:ext>
             </a:extLst>
           </p:cNvPr>
@@ -4220,7 +4237,7 @@
           <p:cNvPr id="108" name="Google Shape;108;p4:notes">
             <a:extLst>
               <a:ext uri="{FF2B5EF4-FFF2-40B4-BE49-F238E27FC236}">
-                <a16:creationId xmlns:a16="http://schemas.microsoft.com/office/drawing/2014/main" id="{BF39F53D-2016-EDBA-C4C2-0C1D801BE2BE}"/>
+                <a16:creationId xmlns:a16="http://schemas.microsoft.com/office/drawing/2014/main" id="{D64F076B-3609-8FFA-1657-4CD53D85E0A1}"/>
               </a:ext>
             </a:extLst>
           </p:cNvPr>
@@ -4275,7 +4292,7 @@
     </p:spTree>
     <p:extLst>
       <p:ext uri="{BB962C8B-B14F-4D97-AF65-F5344CB8AC3E}">
-        <p14:creationId xmlns:p14="http://schemas.microsoft.com/office/powerpoint/2010/main" val="2073267714"/>
+        <p14:creationId xmlns:p14="http://schemas.microsoft.com/office/powerpoint/2010/main" val="1983307871"/>
       </p:ext>
     </p:extLst>
   </p:cSld>
@@ -4285,7 +4302,7 @@
 </p:notes>
 </file>
 
-<file path=ppt/notesSlides/notesSlide5.xml><?xml version="1.0" encoding="utf-8"?>
+<file path=ppt/notesSlides/notesSlide6.xml><?xml version="1.0" encoding="utf-8"?>
 <p:notes xmlns:a="http://schemas.openxmlformats.org/drawingml/2006/main" xmlns:r="http://schemas.openxmlformats.org/officeDocument/2006/relationships" xmlns:p="http://schemas.openxmlformats.org/presentationml/2006/main" showMasterSp="0" showMasterPhAnim="0">
   <p:cSld>
     <p:spTree>
@@ -4293,7 +4310,7 @@
         <p:cNvPr id="1" name="Shape 106">
           <a:extLst>
             <a:ext uri="{FF2B5EF4-FFF2-40B4-BE49-F238E27FC236}">
-              <a16:creationId xmlns:a16="http://schemas.microsoft.com/office/drawing/2014/main" id="{7F9F8209-5F22-639D-B46D-DA56E25731A3}"/>
+              <a16:creationId xmlns:a16="http://schemas.microsoft.com/office/drawing/2014/main" id="{918FB55B-8197-DC8A-3B5B-69696BBB5ADB}"/>
             </a:ext>
           </a:extLst>
         </p:cNvPr>
@@ -4313,7 +4330,7 @@
           <p:cNvPr id="107" name="Google Shape;107;p4:notes">
             <a:extLst>
               <a:ext uri="{FF2B5EF4-FFF2-40B4-BE49-F238E27FC236}">
-                <a16:creationId xmlns:a16="http://schemas.microsoft.com/office/drawing/2014/main" id="{DCC68FF1-EEDD-98F9-BF0F-5582DFA580CE}"/>
+                <a16:creationId xmlns:a16="http://schemas.microsoft.com/office/drawing/2014/main" id="{02653168-0C42-03ED-3519-DA7AA5CC7DF8}"/>
               </a:ext>
             </a:extLst>
           </p:cNvPr>
@@ -4365,7 +4382,7 @@
           <p:cNvPr id="108" name="Google Shape;108;p4:notes">
             <a:extLst>
               <a:ext uri="{FF2B5EF4-FFF2-40B4-BE49-F238E27FC236}">
-                <a16:creationId xmlns:a16="http://schemas.microsoft.com/office/drawing/2014/main" id="{56A0B601-8B52-923E-7BB2-F11765A797BD}"/>
+                <a16:creationId xmlns:a16="http://schemas.microsoft.com/office/drawing/2014/main" id="{0E03EECE-27D8-E8DD-4053-4C69E74AB0FC}"/>
               </a:ext>
             </a:extLst>
           </p:cNvPr>
@@ -4420,7 +4437,7 @@
     </p:spTree>
     <p:extLst>
       <p:ext uri="{BB962C8B-B14F-4D97-AF65-F5344CB8AC3E}">
-        <p14:creationId xmlns:p14="http://schemas.microsoft.com/office/powerpoint/2010/main" val="1192576516"/>
+        <p14:creationId xmlns:p14="http://schemas.microsoft.com/office/powerpoint/2010/main" val="1509382799"/>
       </p:ext>
     </p:extLst>
   </p:cSld>
@@ -4430,7 +4447,7 @@
 </p:notes>
 </file>
 
-<file path=ppt/notesSlides/notesSlide6.xml><?xml version="1.0" encoding="utf-8"?>
+<file path=ppt/notesSlides/notesSlide7.xml><?xml version="1.0" encoding="utf-8"?>
 <p:notes xmlns:a="http://schemas.openxmlformats.org/drawingml/2006/main" xmlns:r="http://schemas.openxmlformats.org/officeDocument/2006/relationships" xmlns:p="http://schemas.openxmlformats.org/presentationml/2006/main" showMasterSp="0" showMasterPhAnim="0">
   <p:cSld>
     <p:spTree>
@@ -4438,7 +4455,7 @@
         <p:cNvPr id="1" name="Shape 106">
           <a:extLst>
             <a:ext uri="{FF2B5EF4-FFF2-40B4-BE49-F238E27FC236}">
-              <a16:creationId xmlns:a16="http://schemas.microsoft.com/office/drawing/2014/main" id="{D3862E56-5FB8-D21F-363E-51BDDAA2DB00}"/>
+              <a16:creationId xmlns:a16="http://schemas.microsoft.com/office/drawing/2014/main" id="{ACD47242-5126-2E6F-575B-001E72BC30A7}"/>
             </a:ext>
           </a:extLst>
         </p:cNvPr>
@@ -4458,7 +4475,7 @@
           <p:cNvPr id="107" name="Google Shape;107;p4:notes">
             <a:extLst>
               <a:ext uri="{FF2B5EF4-FFF2-40B4-BE49-F238E27FC236}">
-                <a16:creationId xmlns:a16="http://schemas.microsoft.com/office/drawing/2014/main" id="{06D786F1-A047-4FBA-1DE9-501E53C4C112}"/>
+                <a16:creationId xmlns:a16="http://schemas.microsoft.com/office/drawing/2014/main" id="{2058750D-32C5-CB33-5343-8D2B6893E431}"/>
               </a:ext>
             </a:extLst>
           </p:cNvPr>
@@ -4510,7 +4527,7 @@
           <p:cNvPr id="108" name="Google Shape;108;p4:notes">
             <a:extLst>
               <a:ext uri="{FF2B5EF4-FFF2-40B4-BE49-F238E27FC236}">
-                <a16:creationId xmlns:a16="http://schemas.microsoft.com/office/drawing/2014/main" id="{D64F076B-3609-8FFA-1657-4CD53D85E0A1}"/>
+                <a16:creationId xmlns:a16="http://schemas.microsoft.com/office/drawing/2014/main" id="{9A387EC2-1566-18D6-A3B5-B58138179BC8}"/>
               </a:ext>
             </a:extLst>
           </p:cNvPr>
@@ -4565,7 +4582,7 @@
     </p:spTree>
     <p:extLst>
       <p:ext uri="{BB962C8B-B14F-4D97-AF65-F5344CB8AC3E}">
-        <p14:creationId xmlns:p14="http://schemas.microsoft.com/office/powerpoint/2010/main" val="1983307871"/>
+        <p14:creationId xmlns:p14="http://schemas.microsoft.com/office/powerpoint/2010/main" val="4287196566"/>
       </p:ext>
     </p:extLst>
   </p:cSld>
@@ -4575,7 +4592,7 @@
 </p:notes>
 </file>
 
-<file path=ppt/notesSlides/notesSlide7.xml><?xml version="1.0" encoding="utf-8"?>
+<file path=ppt/notesSlides/notesSlide8.xml><?xml version="1.0" encoding="utf-8"?>
 <p:notes xmlns:a="http://schemas.openxmlformats.org/drawingml/2006/main" xmlns:r="http://schemas.openxmlformats.org/officeDocument/2006/relationships" xmlns:p="http://schemas.openxmlformats.org/presentationml/2006/main" showMasterSp="0" showMasterPhAnim="0">
   <p:cSld>
     <p:spTree>
@@ -4583,7 +4600,7 @@
         <p:cNvPr id="1" name="Shape 106">
           <a:extLst>
             <a:ext uri="{FF2B5EF4-FFF2-40B4-BE49-F238E27FC236}">
-              <a16:creationId xmlns:a16="http://schemas.microsoft.com/office/drawing/2014/main" id="{918FB55B-8197-DC8A-3B5B-69696BBB5ADB}"/>
+              <a16:creationId xmlns:a16="http://schemas.microsoft.com/office/drawing/2014/main" id="{0CE02A39-3825-F3BA-9670-6CD99B6CA417}"/>
             </a:ext>
           </a:extLst>
         </p:cNvPr>
@@ -4603,7 +4620,7 @@
           <p:cNvPr id="107" name="Google Shape;107;p4:notes">
             <a:extLst>
               <a:ext uri="{FF2B5EF4-FFF2-40B4-BE49-F238E27FC236}">
-                <a16:creationId xmlns:a16="http://schemas.microsoft.com/office/drawing/2014/main" id="{02653168-0C42-03ED-3519-DA7AA5CC7DF8}"/>
+                <a16:creationId xmlns:a16="http://schemas.microsoft.com/office/drawing/2014/main" id="{88948484-10FA-0E45-C604-56552A66E72C}"/>
               </a:ext>
             </a:extLst>
           </p:cNvPr>
@@ -4655,7 +4672,7 @@
           <p:cNvPr id="108" name="Google Shape;108;p4:notes">
             <a:extLst>
               <a:ext uri="{FF2B5EF4-FFF2-40B4-BE49-F238E27FC236}">
-                <a16:creationId xmlns:a16="http://schemas.microsoft.com/office/drawing/2014/main" id="{0E03EECE-27D8-E8DD-4053-4C69E74AB0FC}"/>
+                <a16:creationId xmlns:a16="http://schemas.microsoft.com/office/drawing/2014/main" id="{DA436BC7-906F-22F6-8842-A8312A25DBD7}"/>
               </a:ext>
             </a:extLst>
           </p:cNvPr>
@@ -4710,7 +4727,7 @@
     </p:spTree>
     <p:extLst>
       <p:ext uri="{BB962C8B-B14F-4D97-AF65-F5344CB8AC3E}">
-        <p14:creationId xmlns:p14="http://schemas.microsoft.com/office/powerpoint/2010/main" val="1509382799"/>
+        <p14:creationId xmlns:p14="http://schemas.microsoft.com/office/powerpoint/2010/main" val="358429786"/>
       </p:ext>
     </p:extLst>
   </p:cSld>
@@ -4720,7 +4737,7 @@
 </p:notes>
 </file>
 
-<file path=ppt/notesSlides/notesSlide8.xml><?xml version="1.0" encoding="utf-8"?>
+<file path=ppt/notesSlides/notesSlide9.xml><?xml version="1.0" encoding="utf-8"?>
 <p:notes xmlns:a="http://schemas.openxmlformats.org/drawingml/2006/main" xmlns:r="http://schemas.openxmlformats.org/officeDocument/2006/relationships" xmlns:p="http://schemas.openxmlformats.org/presentationml/2006/main" showMasterSp="0" showMasterPhAnim="0">
   <p:cSld>
     <p:spTree>
@@ -4728,7 +4745,7 @@
         <p:cNvPr id="1" name="Shape 106">
           <a:extLst>
             <a:ext uri="{FF2B5EF4-FFF2-40B4-BE49-F238E27FC236}">
-              <a16:creationId xmlns:a16="http://schemas.microsoft.com/office/drawing/2014/main" id="{ACD47242-5126-2E6F-575B-001E72BC30A7}"/>
+              <a16:creationId xmlns:a16="http://schemas.microsoft.com/office/drawing/2014/main" id="{F4AA39E6-9BCB-E020-3643-BAFC871AE643}"/>
             </a:ext>
           </a:extLst>
         </p:cNvPr>
@@ -4748,7 +4765,7 @@
           <p:cNvPr id="107" name="Google Shape;107;p4:notes">
             <a:extLst>
               <a:ext uri="{FF2B5EF4-FFF2-40B4-BE49-F238E27FC236}">
-                <a16:creationId xmlns:a16="http://schemas.microsoft.com/office/drawing/2014/main" id="{2058750D-32C5-CB33-5343-8D2B6893E431}"/>
+                <a16:creationId xmlns:a16="http://schemas.microsoft.com/office/drawing/2014/main" id="{5BE105F2-DA8F-E43C-BBFC-887B69CD8F18}"/>
               </a:ext>
             </a:extLst>
           </p:cNvPr>
@@ -4800,7 +4817,7 @@
           <p:cNvPr id="108" name="Google Shape;108;p4:notes">
             <a:extLst>
               <a:ext uri="{FF2B5EF4-FFF2-40B4-BE49-F238E27FC236}">
-                <a16:creationId xmlns:a16="http://schemas.microsoft.com/office/drawing/2014/main" id="{9A387EC2-1566-18D6-A3B5-B58138179BC8}"/>
+                <a16:creationId xmlns:a16="http://schemas.microsoft.com/office/drawing/2014/main" id="{00B7E34E-FC9E-CA81-35CD-E48FCD9D2FB6}"/>
               </a:ext>
             </a:extLst>
           </p:cNvPr>
@@ -4855,152 +4872,7 @@
     </p:spTree>
     <p:extLst>
       <p:ext uri="{BB962C8B-B14F-4D97-AF65-F5344CB8AC3E}">
-        <p14:creationId xmlns:p14="http://schemas.microsoft.com/office/powerpoint/2010/main" val="4287196566"/>
-      </p:ext>
-    </p:extLst>
-  </p:cSld>
-  <p:clrMapOvr>
-    <a:masterClrMapping/>
-  </p:clrMapOvr>
-</p:notes>
-</file>
-
-<file path=ppt/notesSlides/notesSlide9.xml><?xml version="1.0" encoding="utf-8"?>
-<p:notes xmlns:a="http://schemas.openxmlformats.org/drawingml/2006/main" xmlns:r="http://schemas.openxmlformats.org/officeDocument/2006/relationships" xmlns:p="http://schemas.openxmlformats.org/presentationml/2006/main" showMasterSp="0" showMasterPhAnim="0">
-  <p:cSld>
-    <p:spTree>
-      <p:nvGrpSpPr>
-        <p:cNvPr id="1" name="Shape 106">
-          <a:extLst>
-            <a:ext uri="{FF2B5EF4-FFF2-40B4-BE49-F238E27FC236}">
-              <a16:creationId xmlns:a16="http://schemas.microsoft.com/office/drawing/2014/main" id="{0CE02A39-3825-F3BA-9670-6CD99B6CA417}"/>
-            </a:ext>
-          </a:extLst>
-        </p:cNvPr>
-        <p:cNvGrpSpPr/>
-        <p:nvPr/>
-      </p:nvGrpSpPr>
-      <p:grpSpPr>
-        <a:xfrm>
-          <a:off x="0" y="0"/>
-          <a:ext cx="0" cy="0"/>
-          <a:chOff x="0" y="0"/>
-          <a:chExt cx="0" cy="0"/>
-        </a:xfrm>
-      </p:grpSpPr>
-      <p:sp>
-        <p:nvSpPr>
-          <p:cNvPr id="107" name="Google Shape;107;p4:notes">
-            <a:extLst>
-              <a:ext uri="{FF2B5EF4-FFF2-40B4-BE49-F238E27FC236}">
-                <a16:creationId xmlns:a16="http://schemas.microsoft.com/office/drawing/2014/main" id="{88948484-10FA-0E45-C604-56552A66E72C}"/>
-              </a:ext>
-            </a:extLst>
-          </p:cNvPr>
-          <p:cNvSpPr txBox="1">
-            <a:spLocks noGrp="1"/>
-          </p:cNvSpPr>
-          <p:nvPr>
-            <p:ph type="body" idx="1"/>
-          </p:nvPr>
-        </p:nvSpPr>
-        <p:spPr>
-          <a:xfrm>
-            <a:off x="685800" y="4400550"/>
-            <a:ext cx="5486400" cy="3600450"/>
-          </a:xfrm>
-          <a:prstGeom prst="rect">
-            <a:avLst/>
-          </a:prstGeom>
-          <a:noFill/>
-          <a:ln>
-            <a:noFill/>
-          </a:ln>
-        </p:spPr>
-        <p:txBody>
-          <a:bodyPr spcFirstLastPara="1" wrap="square" lIns="91425" tIns="45700" rIns="91425" bIns="45700" anchor="t" anchorCtr="0">
-            <a:noAutofit/>
-          </a:bodyPr>
-          <a:lstStyle/>
-          <a:p>
-            <a:pPr marL="0" lvl="0" indent="0" algn="l" rtl="0">
-              <a:lnSpc>
-                <a:spcPct val="100000"/>
-              </a:lnSpc>
-              <a:spcBef>
-                <a:spcPts val="0"/>
-              </a:spcBef>
-              <a:spcAft>
-                <a:spcPts val="0"/>
-              </a:spcAft>
-              <a:buSzPts val="1400"/>
-              <a:buNone/>
-            </a:pPr>
-            <a:endParaRPr/>
-          </a:p>
-        </p:txBody>
-      </p:sp>
-      <p:sp>
-        <p:nvSpPr>
-          <p:cNvPr id="108" name="Google Shape;108;p4:notes">
-            <a:extLst>
-              <a:ext uri="{FF2B5EF4-FFF2-40B4-BE49-F238E27FC236}">
-                <a16:creationId xmlns:a16="http://schemas.microsoft.com/office/drawing/2014/main" id="{DA436BC7-906F-22F6-8842-A8312A25DBD7}"/>
-              </a:ext>
-            </a:extLst>
-          </p:cNvPr>
-          <p:cNvSpPr>
-            <a:spLocks noGrp="1" noRot="1" noChangeAspect="1"/>
-          </p:cNvSpPr>
-          <p:nvPr>
-            <p:ph type="sldImg" idx="2"/>
-          </p:nvPr>
-        </p:nvSpPr>
-        <p:spPr>
-          <a:xfrm>
-            <a:off x="685800" y="1143000"/>
-            <a:ext cx="5486400" cy="3086100"/>
-          </a:xfrm>
-          <a:custGeom>
-            <a:avLst/>
-            <a:gdLst/>
-            <a:ahLst/>
-            <a:cxnLst/>
-            <a:rect l="l" t="t" r="r" b="b"/>
-            <a:pathLst>
-              <a:path w="120000" h="120000" extrusionOk="0">
-                <a:moveTo>
-                  <a:pt x="0" y="0"/>
-                </a:moveTo>
-                <a:lnTo>
-                  <a:pt x="120000" y="0"/>
-                </a:lnTo>
-                <a:lnTo>
-                  <a:pt x="120000" y="120000"/>
-                </a:lnTo>
-                <a:lnTo>
-                  <a:pt x="0" y="120000"/>
-                </a:lnTo>
-                <a:close/>
-              </a:path>
-            </a:pathLst>
-          </a:custGeom>
-          <a:noFill/>
-          <a:ln w="12700" cap="flat" cmpd="sng">
-            <a:solidFill>
-              <a:srgbClr val="000000"/>
-            </a:solidFill>
-            <a:prstDash val="solid"/>
-            <a:round/>
-            <a:headEnd type="none" w="sm" len="sm"/>
-            <a:tailEnd type="none" w="sm" len="sm"/>
-          </a:ln>
-        </p:spPr>
-      </p:sp>
-    </p:spTree>
-    <p:extLst>
-      <p:ext uri="{BB962C8B-B14F-4D97-AF65-F5344CB8AC3E}">
-        <p14:creationId xmlns:p14="http://schemas.microsoft.com/office/powerpoint/2010/main" val="358429786"/>
+        <p14:creationId xmlns:p14="http://schemas.microsoft.com/office/powerpoint/2010/main" val="2576505978"/>
       </p:ext>
     </p:extLst>
   </p:cSld>
@@ -5823,13 +5695,13 @@
   <p:clrMapOvr>
     <a:masterClrMapping/>
   </p:clrMapOvr>
-  <mc:AlternateContent xmlns:mc="http://schemas.openxmlformats.org/markup-compatibility/2006">
-    <mc:Choice xmlns:p159="http://schemas.microsoft.com/office/powerpoint/2015/09/main" Requires="p159">
+  <mc:AlternateContent xmlns:mc="http://schemas.openxmlformats.org/markup-compatibility/2006" xmlns:p159="http://schemas.microsoft.com/office/powerpoint/2015/09/main">
+    <mc:Choice Requires="p159">
       <p:transition>
         <p159:morph option="byObject"/>
       </p:transition>
     </mc:Choice>
-    <mc:Fallback>
+    <mc:Fallback xmlns="">
       <p:transition>
         <p:fade/>
       </p:transition>
@@ -6838,13 +6710,13 @@
   <p:clrMapOvr>
     <a:masterClrMapping/>
   </p:clrMapOvr>
-  <mc:AlternateContent xmlns:mc="http://schemas.openxmlformats.org/markup-compatibility/2006">
-    <mc:Choice xmlns:p159="http://schemas.microsoft.com/office/powerpoint/2015/09/main" Requires="p159">
+  <mc:AlternateContent xmlns:mc="http://schemas.openxmlformats.org/markup-compatibility/2006" xmlns:p159="http://schemas.microsoft.com/office/powerpoint/2015/09/main">
+    <mc:Choice Requires="p159">
       <p:transition>
         <p159:morph option="byObject"/>
       </p:transition>
     </mc:Choice>
-    <mc:Fallback>
+    <mc:Fallback xmlns="">
       <p:transition>
         <p:fade/>
       </p:transition>
@@ -7826,13 +7698,13 @@
   <p:clrMapOvr>
     <a:masterClrMapping/>
   </p:clrMapOvr>
-  <mc:AlternateContent xmlns:mc="http://schemas.openxmlformats.org/markup-compatibility/2006">
-    <mc:Choice xmlns:p159="http://schemas.microsoft.com/office/powerpoint/2015/09/main" Requires="p159">
+  <mc:AlternateContent xmlns:mc="http://schemas.openxmlformats.org/markup-compatibility/2006" xmlns:p159="http://schemas.microsoft.com/office/powerpoint/2015/09/main">
+    <mc:Choice Requires="p159">
       <p:transition>
         <p159:morph option="byObject"/>
       </p:transition>
     </mc:Choice>
-    <mc:Fallback>
+    <mc:Fallback xmlns="">
       <p:transition>
         <p:fade/>
       </p:transition>
@@ -8491,13 +8363,13 @@
   <p:clrMapOvr>
     <a:masterClrMapping/>
   </p:clrMapOvr>
-  <mc:AlternateContent xmlns:mc="http://schemas.openxmlformats.org/markup-compatibility/2006">
-    <mc:Choice xmlns:p159="http://schemas.microsoft.com/office/powerpoint/2015/09/main" Requires="p159">
+  <mc:AlternateContent xmlns:mc="http://schemas.openxmlformats.org/markup-compatibility/2006" xmlns:p159="http://schemas.microsoft.com/office/powerpoint/2015/09/main">
+    <mc:Choice Requires="p159">
       <p:transition>
         <p159:morph option="byObject"/>
       </p:transition>
     </mc:Choice>
-    <mc:Fallback>
+    <mc:Fallback xmlns="">
       <p:transition>
         <p:fade/>
       </p:transition>
@@ -9506,13 +9378,13 @@
   <p:clrMapOvr>
     <a:masterClrMapping/>
   </p:clrMapOvr>
-  <mc:AlternateContent xmlns:mc="http://schemas.openxmlformats.org/markup-compatibility/2006">
-    <mc:Choice xmlns:p159="http://schemas.microsoft.com/office/powerpoint/2015/09/main" Requires="p159">
+  <mc:AlternateContent xmlns:mc="http://schemas.openxmlformats.org/markup-compatibility/2006" xmlns:p159="http://schemas.microsoft.com/office/powerpoint/2015/09/main">
+    <mc:Choice Requires="p159">
       <p:transition>
         <p159:morph option="byObject"/>
       </p:transition>
     </mc:Choice>
-    <mc:Fallback>
+    <mc:Fallback xmlns="">
       <p:transition>
         <p:fade/>
       </p:transition>
@@ -10522,13 +10394,13 @@
   <p:clrMapOvr>
     <a:masterClrMapping/>
   </p:clrMapOvr>
-  <mc:AlternateContent xmlns:mc="http://schemas.openxmlformats.org/markup-compatibility/2006">
-    <mc:Choice xmlns:p159="http://schemas.microsoft.com/office/powerpoint/2015/09/main" Requires="p159">
+  <mc:AlternateContent xmlns:mc="http://schemas.openxmlformats.org/markup-compatibility/2006" xmlns:p159="http://schemas.microsoft.com/office/powerpoint/2015/09/main">
+    <mc:Choice Requires="p159">
       <p:transition>
         <p159:morph option="byObject"/>
       </p:transition>
     </mc:Choice>
-    <mc:Fallback>
+    <mc:Fallback xmlns="">
       <p:transition>
         <p:fade/>
       </p:transition>
@@ -11574,13 +11446,13 @@
   <p:clrMapOvr>
     <a:masterClrMapping/>
   </p:clrMapOvr>
-  <mc:AlternateContent xmlns:mc="http://schemas.openxmlformats.org/markup-compatibility/2006">
-    <mc:Choice xmlns:p159="http://schemas.microsoft.com/office/powerpoint/2015/09/main" Requires="p159">
+  <mc:AlternateContent xmlns:mc="http://schemas.openxmlformats.org/markup-compatibility/2006" xmlns:p159="http://schemas.microsoft.com/office/powerpoint/2015/09/main">
+    <mc:Choice Requires="p159">
       <p:transition>
         <p159:morph option="byObject"/>
       </p:transition>
     </mc:Choice>
-    <mc:Fallback>
+    <mc:Fallback xmlns="">
       <p:transition>
         <p:fade/>
       </p:transition>
@@ -12776,13 +12648,13 @@
   <p:clrMapOvr>
     <a:masterClrMapping/>
   </p:clrMapOvr>
-  <mc:AlternateContent xmlns:mc="http://schemas.openxmlformats.org/markup-compatibility/2006">
-    <mc:Choice xmlns:p159="http://schemas.microsoft.com/office/powerpoint/2015/09/main" Requires="p159">
+  <mc:AlternateContent xmlns:mc="http://schemas.openxmlformats.org/markup-compatibility/2006" xmlns:p159="http://schemas.microsoft.com/office/powerpoint/2015/09/main">
+    <mc:Choice Requires="p159">
       <p:transition>
         <p159:morph option="byObject"/>
       </p:transition>
     </mc:Choice>
-    <mc:Fallback>
+    <mc:Fallback xmlns="">
       <p:transition>
         <p:fade/>
       </p:transition>
@@ -14352,13 +14224,13 @@
   <p:clrMapOvr>
     <a:masterClrMapping/>
   </p:clrMapOvr>
-  <mc:AlternateContent xmlns:mc="http://schemas.openxmlformats.org/markup-compatibility/2006">
-    <mc:Choice xmlns:p159="http://schemas.microsoft.com/office/powerpoint/2015/09/main" Requires="p159">
+  <mc:AlternateContent xmlns:mc="http://schemas.openxmlformats.org/markup-compatibility/2006" xmlns:p159="http://schemas.microsoft.com/office/powerpoint/2015/09/main">
+    <mc:Choice Requires="p159">
       <p:transition>
         <p159:morph option="byObject"/>
       </p:transition>
     </mc:Choice>
-    <mc:Fallback>
+    <mc:Fallback xmlns="">
       <p:transition>
         <p:fade/>
       </p:transition>
@@ -15555,13 +15427,13 @@
   <p:clrMapOvr>
     <a:masterClrMapping/>
   </p:clrMapOvr>
-  <mc:AlternateContent xmlns:mc="http://schemas.openxmlformats.org/markup-compatibility/2006">
-    <mc:Choice xmlns:p159="http://schemas.microsoft.com/office/powerpoint/2015/09/main" Requires="p159">
+  <mc:AlternateContent xmlns:mc="http://schemas.openxmlformats.org/markup-compatibility/2006" xmlns:p159="http://schemas.microsoft.com/office/powerpoint/2015/09/main">
+    <mc:Choice Requires="p159">
       <p:transition>
         <p159:morph option="byObject"/>
       </p:transition>
     </mc:Choice>
-    <mc:Fallback>
+    <mc:Fallback xmlns="">
       <p:transition>
         <p:fade/>
       </p:transition>
@@ -16595,13 +16467,13 @@
   <p:clrMapOvr>
     <a:masterClrMapping/>
   </p:clrMapOvr>
-  <mc:AlternateContent xmlns:mc="http://schemas.openxmlformats.org/markup-compatibility/2006">
-    <mc:Choice xmlns:p159="http://schemas.microsoft.com/office/powerpoint/2015/09/main" Requires="p159">
+  <mc:AlternateContent xmlns:mc="http://schemas.openxmlformats.org/markup-compatibility/2006" xmlns:p159="http://schemas.microsoft.com/office/powerpoint/2015/09/main">
+    <mc:Choice Requires="p159">
       <p:transition>
         <p159:morph option="byObject"/>
       </p:transition>
     </mc:Choice>
-    <mc:Fallback>
+    <mc:Fallback xmlns="">
       <p:transition>
         <p:fade/>
       </p:transition>
@@ -18004,13 +17876,13 @@
     <p:sldLayoutId id="2147483658" r:id="rId10"/>
     <p:sldLayoutId id="2147483659" r:id="rId11"/>
   </p:sldLayoutIdLst>
-  <mc:AlternateContent xmlns:mc="http://schemas.openxmlformats.org/markup-compatibility/2006">
-    <mc:Choice xmlns:p159="http://schemas.microsoft.com/office/powerpoint/2015/09/main" Requires="p159">
+  <mc:AlternateContent xmlns:mc="http://schemas.openxmlformats.org/markup-compatibility/2006" xmlns:p159="http://schemas.microsoft.com/office/powerpoint/2015/09/main">
+    <mc:Choice Requires="p159">
       <p:transition>
         <p159:morph option="byObject"/>
       </p:transition>
     </mc:Choice>
-    <mc:Fallback>
+    <mc:Fallback xmlns="">
       <p:transition>
         <p:fade/>
       </p:transition>
@@ -19417,13 +19289,13 @@
   <p:clrMapOvr>
     <a:masterClrMapping/>
   </p:clrMapOvr>
-  <mc:AlternateContent xmlns:mc="http://schemas.openxmlformats.org/markup-compatibility/2006">
-    <mc:Choice xmlns:p159="http://schemas.microsoft.com/office/powerpoint/2015/09/main" Requires="p159">
+  <mc:AlternateContent xmlns:mc="http://schemas.openxmlformats.org/markup-compatibility/2006" xmlns:p159="http://schemas.microsoft.com/office/powerpoint/2015/09/main">
+    <mc:Choice Requires="p159">
       <p:transition>
         <p159:morph option="byObject"/>
       </p:transition>
     </mc:Choice>
-    <mc:Fallback>
+    <mc:Fallback xmlns="">
       <p:transition>
         <p:fade/>
       </p:transition>
@@ -19433,1499 +19305,6 @@
 </file>
 
 <file path=ppt/slides/slide10.xml><?xml version="1.0" encoding="utf-8"?>
-<p:sld xmlns:a="http://schemas.openxmlformats.org/drawingml/2006/main" xmlns:r="http://schemas.openxmlformats.org/officeDocument/2006/relationships" xmlns:p="http://schemas.openxmlformats.org/presentationml/2006/main">
-  <p:cSld>
-    <p:spTree>
-      <p:nvGrpSpPr>
-        <p:cNvPr id="1" name="Shape 109">
-          <a:extLst>
-            <a:ext uri="{FF2B5EF4-FFF2-40B4-BE49-F238E27FC236}">
-              <a16:creationId xmlns:a16="http://schemas.microsoft.com/office/drawing/2014/main" id="{EF99A866-5246-68D6-ED81-EF856D114F73}"/>
-            </a:ext>
-          </a:extLst>
-        </p:cNvPr>
-        <p:cNvGrpSpPr/>
-        <p:nvPr/>
-      </p:nvGrpSpPr>
-      <p:grpSpPr>
-        <a:xfrm>
-          <a:off x="0" y="0"/>
-          <a:ext cx="0" cy="0"/>
-          <a:chOff x="0" y="0"/>
-          <a:chExt cx="0" cy="0"/>
-        </a:xfrm>
-      </p:grpSpPr>
-      <p:sp>
-        <p:nvSpPr>
-          <p:cNvPr id="9" name="Text 3">
-            <a:extLst>
-              <a:ext uri="{FF2B5EF4-FFF2-40B4-BE49-F238E27FC236}">
-                <a16:creationId xmlns:a16="http://schemas.microsoft.com/office/drawing/2014/main" id="{7965ECD2-1EC4-BAFF-AFB2-346F6C2B5FA5}"/>
-              </a:ext>
-            </a:extLst>
-          </p:cNvPr>
-          <p:cNvSpPr/>
-          <p:nvPr/>
-        </p:nvSpPr>
-        <p:spPr>
-          <a:xfrm>
-            <a:off x="1422400" y="502920"/>
-            <a:ext cx="9347200" cy="752856"/>
-          </a:xfrm>
-          <a:prstGeom prst="rect">
-            <a:avLst/>
-          </a:prstGeom>
-          <a:noFill/>
-          <a:ln/>
-        </p:spPr>
-        <p:txBody>
-          <a:bodyPr wrap="square" lIns="0" tIns="0" rIns="0" bIns="0" rtlCol="0" anchor="ctr"/>
-          <a:lstStyle/>
-          <a:p>
-            <a:pPr marL="0" indent="0">
-              <a:buNone/>
-            </a:pPr>
-            <a:r>
-              <a:rPr lang="en-US" sz="4400" b="1" dirty="0">
-                <a:solidFill>
-                  <a:schemeClr val="tx1"/>
-                </a:solidFill>
-                <a:latin typeface="Aptos Display" panose="020B0004020202020204" pitchFamily="34" charset="0"/>
-                <a:ea typeface="DejaVu Sans" pitchFamily="34" charset="-122"/>
-                <a:cs typeface="DejaVu Sans" pitchFamily="34" charset="-120"/>
-              </a:rPr>
-              <a:t>Global Comparisons</a:t>
-            </a:r>
-            <a:endParaRPr lang="en-US" sz="4400" dirty="0">
-              <a:solidFill>
-                <a:schemeClr val="tx1"/>
-              </a:solidFill>
-              <a:latin typeface="Aptos Display" panose="020B0004020202020204" pitchFamily="34" charset="0"/>
-            </a:endParaRPr>
-          </a:p>
-        </p:txBody>
-      </p:sp>
-      <p:sp>
-        <p:nvSpPr>
-          <p:cNvPr id="10" name="Shape 4">
-            <a:extLst>
-              <a:ext uri="{FF2B5EF4-FFF2-40B4-BE49-F238E27FC236}">
-                <a16:creationId xmlns:a16="http://schemas.microsoft.com/office/drawing/2014/main" id="{6CF6F44F-6252-800D-DD7C-8286EA79995C}"/>
-              </a:ext>
-            </a:extLst>
-          </p:cNvPr>
-          <p:cNvSpPr/>
-          <p:nvPr/>
-        </p:nvSpPr>
-        <p:spPr>
-          <a:xfrm>
-            <a:off x="1450848" y="1503680"/>
-            <a:ext cx="4328160" cy="2302256"/>
-          </a:xfrm>
-          <a:prstGeom prst="rect">
-            <a:avLst/>
-          </a:prstGeom>
-          <a:solidFill>
-            <a:srgbClr val="223045"/>
-          </a:solidFill>
-          <a:ln w="15240">
-            <a:solidFill>
-              <a:srgbClr val="2D8B8B"/>
-            </a:solidFill>
-            <a:prstDash val="solid"/>
-          </a:ln>
-          <a:effectLst>
-            <a:outerShdw blurRad="101600" dist="38100" dir="8100000" algn="bl" rotWithShape="0">
-              <a:srgbClr val="000000">
-                <a:alpha val="22000"/>
-              </a:srgbClr>
-            </a:outerShdw>
-          </a:effectLst>
-        </p:spPr>
-      </p:sp>
-      <p:sp>
-        <p:nvSpPr>
-          <p:cNvPr id="11" name="Text 5">
-            <a:extLst>
-              <a:ext uri="{FF2B5EF4-FFF2-40B4-BE49-F238E27FC236}">
-                <a16:creationId xmlns:a16="http://schemas.microsoft.com/office/drawing/2014/main" id="{37E2F747-5C58-10C9-B92A-1EDCD198BCEC}"/>
-              </a:ext>
-            </a:extLst>
-          </p:cNvPr>
-          <p:cNvSpPr/>
-          <p:nvPr/>
-        </p:nvSpPr>
-        <p:spPr>
-          <a:xfrm>
-            <a:off x="1563401" y="1503680"/>
-            <a:ext cx="4114079" cy="441842"/>
-          </a:xfrm>
-          <a:prstGeom prst="rect">
-            <a:avLst/>
-          </a:prstGeom>
-          <a:noFill/>
-          <a:ln/>
-        </p:spPr>
-        <p:txBody>
-          <a:bodyPr wrap="square" rtlCol="0" anchor="ctr"/>
-          <a:lstStyle/>
-          <a:p>
-            <a:pPr marL="0" indent="0">
-              <a:lnSpc>
-                <a:spcPct val="110000"/>
-              </a:lnSpc>
-              <a:buNone/>
-            </a:pPr>
-            <a:r>
-              <a:rPr lang="en-US" sz="1200" b="1" dirty="0">
-                <a:solidFill>
-                  <a:srgbClr val="A8DADC"/>
-                </a:solidFill>
-                <a:latin typeface="Aptos Display" panose="020B0004020202020204" pitchFamily="34" charset="0"/>
-                <a:ea typeface="DejaVu Sans" pitchFamily="34" charset="-122"/>
-                <a:cs typeface="DejaVu Sans" pitchFamily="34" charset="-120"/>
-              </a:rPr>
-              <a:t>Top 10 by Population &amp; Emissions</a:t>
-            </a:r>
-            <a:endParaRPr lang="en-US" sz="1200" dirty="0">
-              <a:latin typeface="Aptos Display" panose="020B0004020202020204" pitchFamily="34" charset="0"/>
-            </a:endParaRPr>
-          </a:p>
-        </p:txBody>
-      </p:sp>
-      <p:sp>
-        <p:nvSpPr>
-          <p:cNvPr id="12" name="Shape 6">
-            <a:extLst>
-              <a:ext uri="{FF2B5EF4-FFF2-40B4-BE49-F238E27FC236}">
-                <a16:creationId xmlns:a16="http://schemas.microsoft.com/office/drawing/2014/main" id="{71A95515-1237-2501-F78D-CFA846CED006}"/>
-              </a:ext>
-            </a:extLst>
-          </p:cNvPr>
-          <p:cNvSpPr/>
-          <p:nvPr/>
-        </p:nvSpPr>
-        <p:spPr>
-          <a:xfrm>
-            <a:off x="1560575" y="1936821"/>
-            <a:ext cx="4114079" cy="1783218"/>
-          </a:xfrm>
-          <a:prstGeom prst="rect">
-            <a:avLst/>
-          </a:prstGeom>
-          <a:solidFill>
-            <a:srgbClr val="172030"/>
-          </a:solidFill>
-          <a:ln w="6350">
-            <a:solidFill>
-              <a:srgbClr val="7AA5B0"/>
-            </a:solidFill>
-            <a:prstDash val="solid"/>
-          </a:ln>
-        </p:spPr>
-      </p:sp>
-      <p:sp>
-        <p:nvSpPr>
-          <p:cNvPr id="13" name="Text 7">
-            <a:extLst>
-              <a:ext uri="{FF2B5EF4-FFF2-40B4-BE49-F238E27FC236}">
-                <a16:creationId xmlns:a16="http://schemas.microsoft.com/office/drawing/2014/main" id="{938C6960-17F6-90EC-E3FF-056B64719139}"/>
-              </a:ext>
-            </a:extLst>
-          </p:cNvPr>
-          <p:cNvSpPr/>
-          <p:nvPr/>
-        </p:nvSpPr>
-        <p:spPr>
-          <a:xfrm>
-            <a:off x="1564345" y="1936820"/>
-            <a:ext cx="4104657" cy="1783217"/>
-          </a:xfrm>
-          <a:prstGeom prst="rect">
-            <a:avLst/>
-          </a:prstGeom>
-          <a:solidFill>
-            <a:srgbClr val="172030"/>
-          </a:solidFill>
-          <a:ln>
-            <a:solidFill>
-              <a:srgbClr val="8BB4BA"/>
-            </a:solidFill>
-          </a:ln>
-        </p:spPr>
-        <p:txBody>
-          <a:bodyPr wrap="square" rtlCol="0" anchor="ctr"/>
-          <a:lstStyle/>
-          <a:p>
-            <a:pPr marL="0" indent="0">
-              <a:lnSpc>
-                <a:spcPct val="125000"/>
-              </a:lnSpc>
-              <a:buNone/>
-            </a:pPr>
-            <a:r>
-              <a:rPr lang="en-US" sz="1100" dirty="0">
-                <a:solidFill>
-                  <a:srgbClr val="A8DADC"/>
-                </a:solidFill>
-                <a:latin typeface="Aptos Display" panose="020B0004020202020204" pitchFamily="34" charset="0"/>
-                <a:ea typeface="Courier New" pitchFamily="34" charset="-122"/>
-                <a:cs typeface="Courier New" pitchFamily="34" charset="-120"/>
-              </a:rPr>
-              <a:t>SELECT p.countries, p.Value AS pop,</a:t>
-            </a:r>
-            <a:endParaRPr lang="en-US" sz="1100" dirty="0">
-              <a:solidFill>
-                <a:srgbClr val="A8DADC"/>
-              </a:solidFill>
-              <a:latin typeface="Aptos Display" panose="020B0004020202020204" pitchFamily="34" charset="0"/>
-            </a:endParaRPr>
-          </a:p>
-          <a:p>
-            <a:pPr marL="0" indent="0">
-              <a:lnSpc>
-                <a:spcPct val="125000"/>
-              </a:lnSpc>
-              <a:buNone/>
-            </a:pPr>
-            <a:r>
-              <a:rPr lang="en-US" sz="1100" dirty="0">
-                <a:solidFill>
-                  <a:srgbClr val="A8DADC"/>
-                </a:solidFill>
-                <a:latin typeface="Aptos Display" panose="020B0004020202020204" pitchFamily="34" charset="0"/>
-                <a:ea typeface="Courier New" pitchFamily="34" charset="-122"/>
-                <a:cs typeface="Courier New" pitchFamily="34" charset="-120"/>
-              </a:rPr>
-              <a:t>  SUM(e.emission) AS total_emission</a:t>
-            </a:r>
-            <a:endParaRPr lang="en-US" sz="1100" dirty="0">
-              <a:solidFill>
-                <a:srgbClr val="A8DADC"/>
-              </a:solidFill>
-              <a:latin typeface="Aptos Display" panose="020B0004020202020204" pitchFamily="34" charset="0"/>
-            </a:endParaRPr>
-          </a:p>
-          <a:p>
-            <a:pPr marL="0" indent="0">
-              <a:lnSpc>
-                <a:spcPct val="125000"/>
-              </a:lnSpc>
-              <a:buNone/>
-            </a:pPr>
-            <a:r>
-              <a:rPr lang="en-US" sz="1100" dirty="0">
-                <a:solidFill>
-                  <a:srgbClr val="A8DADC"/>
-                </a:solidFill>
-                <a:latin typeface="Aptos Display" panose="020B0004020202020204" pitchFamily="34" charset="0"/>
-                <a:ea typeface="Courier New" pitchFamily="34" charset="-122"/>
-                <a:cs typeface="Courier New" pitchFamily="34" charset="-120"/>
-              </a:rPr>
-              <a:t>FROM population p</a:t>
-            </a:r>
-            <a:endParaRPr lang="en-US" sz="1100" dirty="0">
-              <a:solidFill>
-                <a:srgbClr val="A8DADC"/>
-              </a:solidFill>
-              <a:latin typeface="Aptos Display" panose="020B0004020202020204" pitchFamily="34" charset="0"/>
-            </a:endParaRPr>
-          </a:p>
-          <a:p>
-            <a:pPr marL="0" indent="0">
-              <a:lnSpc>
-                <a:spcPct val="125000"/>
-              </a:lnSpc>
-              <a:buNone/>
-            </a:pPr>
-            <a:r>
-              <a:rPr lang="en-US" sz="1100" dirty="0">
-                <a:solidFill>
-                  <a:srgbClr val="A8DADC"/>
-                </a:solidFill>
-                <a:latin typeface="Aptos Display" panose="020B0004020202020204" pitchFamily="34" charset="0"/>
-                <a:ea typeface="Courier New" pitchFamily="34" charset="-122"/>
-                <a:cs typeface="Courier New" pitchFamily="34" charset="-120"/>
-              </a:rPr>
-              <a:t>JOIN emission_3 e ON p.countries=e.country</a:t>
-            </a:r>
-            <a:endParaRPr lang="en-US" sz="1100" dirty="0">
-              <a:solidFill>
-                <a:srgbClr val="A8DADC"/>
-              </a:solidFill>
-              <a:latin typeface="Aptos Display" panose="020B0004020202020204" pitchFamily="34" charset="0"/>
-            </a:endParaRPr>
-          </a:p>
-          <a:p>
-            <a:pPr marL="0" indent="0">
-              <a:lnSpc>
-                <a:spcPct val="125000"/>
-              </a:lnSpc>
-              <a:buNone/>
-            </a:pPr>
-            <a:r>
-              <a:rPr lang="en-US" sz="1100" dirty="0">
-                <a:solidFill>
-                  <a:srgbClr val="A8DADC"/>
-                </a:solidFill>
-                <a:latin typeface="Aptos Display" panose="020B0004020202020204" pitchFamily="34" charset="0"/>
-                <a:ea typeface="Courier New" pitchFamily="34" charset="-122"/>
-                <a:cs typeface="Courier New" pitchFamily="34" charset="-120"/>
-              </a:rPr>
-              <a:t>  AND p.year=e.year</a:t>
-            </a:r>
-            <a:endParaRPr lang="en-US" sz="1100" dirty="0">
-              <a:solidFill>
-                <a:srgbClr val="A8DADC"/>
-              </a:solidFill>
-              <a:latin typeface="Aptos Display" panose="020B0004020202020204" pitchFamily="34" charset="0"/>
-            </a:endParaRPr>
-          </a:p>
-          <a:p>
-            <a:pPr marL="0" indent="0">
-              <a:lnSpc>
-                <a:spcPct val="125000"/>
-              </a:lnSpc>
-              <a:buNone/>
-            </a:pPr>
-            <a:r>
-              <a:rPr lang="en-US" sz="1100" dirty="0">
-                <a:solidFill>
-                  <a:srgbClr val="A8DADC"/>
-                </a:solidFill>
-                <a:latin typeface="Aptos Display" panose="020B0004020202020204" pitchFamily="34" charset="0"/>
-                <a:ea typeface="Courier New" pitchFamily="34" charset="-122"/>
-                <a:cs typeface="Courier New" pitchFamily="34" charset="-120"/>
-              </a:rPr>
-              <a:t>WHERE p.year=(SELECT MAX(year) FROM population)</a:t>
-            </a:r>
-            <a:endParaRPr lang="en-US" sz="1100" dirty="0">
-              <a:solidFill>
-                <a:srgbClr val="A8DADC"/>
-              </a:solidFill>
-              <a:latin typeface="Aptos Display" panose="020B0004020202020204" pitchFamily="34" charset="0"/>
-            </a:endParaRPr>
-          </a:p>
-          <a:p>
-            <a:pPr marL="0" indent="0">
-              <a:lnSpc>
-                <a:spcPct val="125000"/>
-              </a:lnSpc>
-              <a:buNone/>
-            </a:pPr>
-            <a:r>
-              <a:rPr lang="en-US" sz="1100" dirty="0">
-                <a:solidFill>
-                  <a:srgbClr val="A8DADC"/>
-                </a:solidFill>
-                <a:latin typeface="Aptos Display" panose="020B0004020202020204" pitchFamily="34" charset="0"/>
-                <a:ea typeface="Courier New" pitchFamily="34" charset="-122"/>
-                <a:cs typeface="Courier New" pitchFamily="34" charset="-120"/>
-              </a:rPr>
-              <a:t>GROUP BY p.countries, p.Value</a:t>
-            </a:r>
-            <a:endParaRPr lang="en-US" sz="1100" dirty="0">
-              <a:solidFill>
-                <a:srgbClr val="A8DADC"/>
-              </a:solidFill>
-              <a:latin typeface="Aptos Display" panose="020B0004020202020204" pitchFamily="34" charset="0"/>
-            </a:endParaRPr>
-          </a:p>
-          <a:p>
-            <a:pPr marL="0" indent="0">
-              <a:lnSpc>
-                <a:spcPct val="125000"/>
-              </a:lnSpc>
-              <a:buNone/>
-            </a:pPr>
-            <a:r>
-              <a:rPr lang="en-US" sz="1100" dirty="0">
-                <a:solidFill>
-                  <a:srgbClr val="A8DADC"/>
-                </a:solidFill>
-                <a:latin typeface="Aptos Display" panose="020B0004020202020204" pitchFamily="34" charset="0"/>
-                <a:ea typeface="Courier New" pitchFamily="34" charset="-122"/>
-                <a:cs typeface="Courier New" pitchFamily="34" charset="-120"/>
-              </a:rPr>
-              <a:t>ORDER BY pop DESC LIMIT 10;</a:t>
-            </a:r>
-            <a:endParaRPr lang="en-US" sz="1100" dirty="0">
-              <a:solidFill>
-                <a:srgbClr val="A8DADC"/>
-              </a:solidFill>
-              <a:latin typeface="Aptos Display" panose="020B0004020202020204" pitchFamily="34" charset="0"/>
-            </a:endParaRPr>
-          </a:p>
-        </p:txBody>
-      </p:sp>
-      <p:sp>
-        <p:nvSpPr>
-          <p:cNvPr id="14" name="Shape 8">
-            <a:extLst>
-              <a:ext uri="{FF2B5EF4-FFF2-40B4-BE49-F238E27FC236}">
-                <a16:creationId xmlns:a16="http://schemas.microsoft.com/office/drawing/2014/main" id="{656E3C18-721E-5149-19F0-40EB57798A35}"/>
-              </a:ext>
-            </a:extLst>
-          </p:cNvPr>
-          <p:cNvSpPr/>
-          <p:nvPr/>
-        </p:nvSpPr>
-        <p:spPr>
-          <a:xfrm>
-            <a:off x="6469890" y="1503680"/>
-            <a:ext cx="4299710" cy="2302256"/>
-          </a:xfrm>
-          <a:prstGeom prst="rect">
-            <a:avLst/>
-          </a:prstGeom>
-          <a:solidFill>
-            <a:srgbClr val="223045"/>
-          </a:solidFill>
-          <a:ln w="15240">
-            <a:solidFill>
-              <a:srgbClr val="2D8B8B"/>
-            </a:solidFill>
-            <a:prstDash val="solid"/>
-          </a:ln>
-          <a:effectLst>
-            <a:outerShdw blurRad="101600" dist="38100" dir="8100000" algn="bl" rotWithShape="0">
-              <a:srgbClr val="000000">
-                <a:alpha val="22000"/>
-              </a:srgbClr>
-            </a:outerShdw>
-          </a:effectLst>
-        </p:spPr>
-      </p:sp>
-      <p:sp>
-        <p:nvSpPr>
-          <p:cNvPr id="15" name="Text 9">
-            <a:extLst>
-              <a:ext uri="{FF2B5EF4-FFF2-40B4-BE49-F238E27FC236}">
-                <a16:creationId xmlns:a16="http://schemas.microsoft.com/office/drawing/2014/main" id="{B6DA13B9-E827-B6C7-C077-5D08483680D6}"/>
-              </a:ext>
-            </a:extLst>
-          </p:cNvPr>
-          <p:cNvSpPr/>
-          <p:nvPr/>
-        </p:nvSpPr>
-        <p:spPr>
-          <a:xfrm>
-            <a:off x="6570196" y="1503680"/>
-            <a:ext cx="4087036" cy="433138"/>
-          </a:xfrm>
-          <a:prstGeom prst="rect">
-            <a:avLst/>
-          </a:prstGeom>
-          <a:noFill/>
-          <a:ln/>
-        </p:spPr>
-        <p:txBody>
-          <a:bodyPr wrap="square" rtlCol="0" anchor="ctr"/>
-          <a:lstStyle/>
-          <a:p>
-            <a:pPr marL="0" indent="0">
-              <a:lnSpc>
-                <a:spcPct val="110000"/>
-              </a:lnSpc>
-              <a:buNone/>
-            </a:pPr>
-            <a:r>
-              <a:rPr lang="en-US" sz="1200" b="1" dirty="0">
-                <a:solidFill>
-                  <a:srgbClr val="A8DADC"/>
-                </a:solidFill>
-                <a:latin typeface="Aptos Display" panose="020B0004020202020204" pitchFamily="34" charset="0"/>
-                <a:ea typeface="DejaVu Sans" pitchFamily="34" charset="-122"/>
-                <a:cs typeface="DejaVu Sans" pitchFamily="34" charset="-120"/>
-              </a:rPr>
-              <a:t>Countries That Reduced Per-Capita Emissions Most</a:t>
-            </a:r>
-            <a:endParaRPr lang="en-US" sz="1200" dirty="0">
-              <a:latin typeface="Aptos Display" panose="020B0004020202020204" pitchFamily="34" charset="0"/>
-            </a:endParaRPr>
-          </a:p>
-        </p:txBody>
-      </p:sp>
-      <p:sp>
-        <p:nvSpPr>
-          <p:cNvPr id="16" name="Shape 10">
-            <a:extLst>
-              <a:ext uri="{FF2B5EF4-FFF2-40B4-BE49-F238E27FC236}">
-                <a16:creationId xmlns:a16="http://schemas.microsoft.com/office/drawing/2014/main" id="{CDE4F3F0-C6A4-451D-3A72-24364CC8CAC5}"/>
-              </a:ext>
-            </a:extLst>
-          </p:cNvPr>
-          <p:cNvSpPr/>
-          <p:nvPr/>
-        </p:nvSpPr>
-        <p:spPr>
-          <a:xfrm>
-            <a:off x="6581980" y="1936819"/>
-            <a:ext cx="4087036" cy="1783220"/>
-          </a:xfrm>
-          <a:prstGeom prst="rect">
-            <a:avLst/>
-          </a:prstGeom>
-          <a:solidFill>
-            <a:srgbClr val="172030"/>
-          </a:solidFill>
-          <a:ln w="6350">
-            <a:solidFill>
-              <a:srgbClr val="7AA5B0"/>
-            </a:solidFill>
-            <a:prstDash val="solid"/>
-          </a:ln>
-        </p:spPr>
-      </p:sp>
-      <p:sp>
-        <p:nvSpPr>
-          <p:cNvPr id="17" name="Text 11">
-            <a:extLst>
-              <a:ext uri="{FF2B5EF4-FFF2-40B4-BE49-F238E27FC236}">
-                <a16:creationId xmlns:a16="http://schemas.microsoft.com/office/drawing/2014/main" id="{A0FFF0A8-E0A8-9EE3-E113-7460837EDDC7}"/>
-              </a:ext>
-            </a:extLst>
-          </p:cNvPr>
-          <p:cNvSpPr/>
-          <p:nvPr/>
-        </p:nvSpPr>
-        <p:spPr>
-          <a:xfrm>
-            <a:off x="6579618" y="1936820"/>
-            <a:ext cx="4077614" cy="1783217"/>
-          </a:xfrm>
-          <a:prstGeom prst="rect">
-            <a:avLst/>
-          </a:prstGeom>
-          <a:noFill/>
-          <a:ln/>
-        </p:spPr>
-        <p:txBody>
-          <a:bodyPr wrap="square" rtlCol="0" anchor="ctr"/>
-          <a:lstStyle/>
-          <a:p>
-            <a:pPr marL="0" indent="0">
-              <a:lnSpc>
-                <a:spcPct val="125000"/>
-              </a:lnSpc>
-              <a:buNone/>
-            </a:pPr>
-            <a:r>
-              <a:rPr lang="en-US" sz="1050" dirty="0">
-                <a:solidFill>
-                  <a:srgbClr val="A8DADC"/>
-                </a:solidFill>
-                <a:latin typeface="Aptos Display" panose="020B0004020202020204" pitchFamily="34" charset="0"/>
-                <a:ea typeface="Courier New" pitchFamily="34" charset="-122"/>
-                <a:cs typeface="Courier New" pitchFamily="34" charset="-120"/>
-              </a:rPr>
-              <a:t>SELECT country,</a:t>
-            </a:r>
-            <a:endParaRPr lang="en-US" sz="1050" dirty="0">
-              <a:latin typeface="Aptos Display" panose="020B0004020202020204" pitchFamily="34" charset="0"/>
-            </a:endParaRPr>
-          </a:p>
-          <a:p>
-            <a:pPr marL="0" indent="0">
-              <a:lnSpc>
-                <a:spcPct val="125000"/>
-              </a:lnSpc>
-              <a:buNone/>
-            </a:pPr>
-            <a:r>
-              <a:rPr lang="en-US" sz="1050" dirty="0">
-                <a:solidFill>
-                  <a:srgbClr val="A8DADC"/>
-                </a:solidFill>
-                <a:latin typeface="Aptos Display" panose="020B0004020202020204" pitchFamily="34" charset="0"/>
-                <a:ea typeface="Courier New" pitchFamily="34" charset="-122"/>
-                <a:cs typeface="Courier New" pitchFamily="34" charset="-120"/>
-              </a:rPr>
-              <a:t>  MIN(per_capita_emission) AS earliest,</a:t>
-            </a:r>
-            <a:endParaRPr lang="en-US" sz="1050" dirty="0">
-              <a:latin typeface="Aptos Display" panose="020B0004020202020204" pitchFamily="34" charset="0"/>
-            </a:endParaRPr>
-          </a:p>
-          <a:p>
-            <a:pPr marL="0" indent="0">
-              <a:lnSpc>
-                <a:spcPct val="125000"/>
-              </a:lnSpc>
-              <a:buNone/>
-            </a:pPr>
-            <a:r>
-              <a:rPr lang="en-US" sz="1050" dirty="0">
-                <a:solidFill>
-                  <a:srgbClr val="A8DADC"/>
-                </a:solidFill>
-                <a:latin typeface="Aptos Display" panose="020B0004020202020204" pitchFamily="34" charset="0"/>
-                <a:ea typeface="Courier New" pitchFamily="34" charset="-122"/>
-                <a:cs typeface="Courier New" pitchFamily="34" charset="-120"/>
-              </a:rPr>
-              <a:t>  MAX(per_capita_emission) AS latest,</a:t>
-            </a:r>
-            <a:endParaRPr lang="en-US" sz="1050" dirty="0">
-              <a:latin typeface="Aptos Display" panose="020B0004020202020204" pitchFamily="34" charset="0"/>
-            </a:endParaRPr>
-          </a:p>
-          <a:p>
-            <a:pPr marL="0" indent="0">
-              <a:lnSpc>
-                <a:spcPct val="125000"/>
-              </a:lnSpc>
-              <a:buNone/>
-            </a:pPr>
-            <a:r>
-              <a:rPr lang="en-US" sz="1050" dirty="0">
-                <a:solidFill>
-                  <a:srgbClr val="A8DADC"/>
-                </a:solidFill>
-                <a:latin typeface="Aptos Display" panose="020B0004020202020204" pitchFamily="34" charset="0"/>
-                <a:ea typeface="Courier New" pitchFamily="34" charset="-122"/>
-                <a:cs typeface="Courier New" pitchFamily="34" charset="-120"/>
-              </a:rPr>
-              <a:t>  MIN - MAX AS reduction</a:t>
-            </a:r>
-            <a:endParaRPr lang="en-US" sz="1050" dirty="0">
-              <a:latin typeface="Aptos Display" panose="020B0004020202020204" pitchFamily="34" charset="0"/>
-            </a:endParaRPr>
-          </a:p>
-          <a:p>
-            <a:pPr marL="0" indent="0">
-              <a:lnSpc>
-                <a:spcPct val="125000"/>
-              </a:lnSpc>
-              <a:buNone/>
-            </a:pPr>
-            <a:r>
-              <a:rPr lang="en-US" sz="1050" dirty="0">
-                <a:solidFill>
-                  <a:srgbClr val="A8DADC"/>
-                </a:solidFill>
-                <a:latin typeface="Aptos Display" panose="020B0004020202020204" pitchFamily="34" charset="0"/>
-                <a:ea typeface="Courier New" pitchFamily="34" charset="-122"/>
-                <a:cs typeface="Courier New" pitchFamily="34" charset="-120"/>
-              </a:rPr>
-              <a:t>FROM emission_3</a:t>
-            </a:r>
-            <a:endParaRPr lang="en-US" sz="1050" dirty="0">
-              <a:latin typeface="Aptos Display" panose="020B0004020202020204" pitchFamily="34" charset="0"/>
-            </a:endParaRPr>
-          </a:p>
-          <a:p>
-            <a:pPr marL="0" indent="0">
-              <a:lnSpc>
-                <a:spcPct val="125000"/>
-              </a:lnSpc>
-              <a:buNone/>
-            </a:pPr>
-            <a:r>
-              <a:rPr lang="en-US" sz="1050" dirty="0">
-                <a:solidFill>
-                  <a:srgbClr val="A8DADC"/>
-                </a:solidFill>
-                <a:latin typeface="Aptos Display" panose="020B0004020202020204" pitchFamily="34" charset="0"/>
-                <a:ea typeface="Courier New" pitchFamily="34" charset="-122"/>
-                <a:cs typeface="Courier New" pitchFamily="34" charset="-120"/>
-              </a:rPr>
-              <a:t>WHERE year &gt;= (SELECT MAX(year)...) - 10</a:t>
-            </a:r>
-            <a:endParaRPr lang="en-US" sz="1050" dirty="0">
-              <a:latin typeface="Aptos Display" panose="020B0004020202020204" pitchFamily="34" charset="0"/>
-            </a:endParaRPr>
-          </a:p>
-          <a:p>
-            <a:pPr marL="0" indent="0">
-              <a:lnSpc>
-                <a:spcPct val="125000"/>
-              </a:lnSpc>
-              <a:buNone/>
-            </a:pPr>
-            <a:r>
-              <a:rPr lang="en-US" sz="1050" dirty="0">
-                <a:solidFill>
-                  <a:srgbClr val="A8DADC"/>
-                </a:solidFill>
-                <a:latin typeface="Aptos Display" panose="020B0004020202020204" pitchFamily="34" charset="0"/>
-                <a:ea typeface="Courier New" pitchFamily="34" charset="-122"/>
-                <a:cs typeface="Courier New" pitchFamily="34" charset="-120"/>
-              </a:rPr>
-              <a:t>GROUP BY country</a:t>
-            </a:r>
-            <a:endParaRPr lang="en-US" sz="1050" dirty="0">
-              <a:latin typeface="Aptos Display" panose="020B0004020202020204" pitchFamily="34" charset="0"/>
-            </a:endParaRPr>
-          </a:p>
-          <a:p>
-            <a:pPr marL="0" indent="0">
-              <a:lnSpc>
-                <a:spcPct val="125000"/>
-              </a:lnSpc>
-              <a:buNone/>
-            </a:pPr>
-            <a:r>
-              <a:rPr lang="en-US" sz="1050" dirty="0">
-                <a:solidFill>
-                  <a:srgbClr val="A8DADC"/>
-                </a:solidFill>
-                <a:latin typeface="Aptos Display" panose="020B0004020202020204" pitchFamily="34" charset="0"/>
-                <a:ea typeface="Courier New" pitchFamily="34" charset="-122"/>
-                <a:cs typeface="Courier New" pitchFamily="34" charset="-120"/>
-              </a:rPr>
-              <a:t>HAVING reduction &gt; 0</a:t>
-            </a:r>
-            <a:endParaRPr lang="en-US" sz="1050" dirty="0">
-              <a:latin typeface="Aptos Display" panose="020B0004020202020204" pitchFamily="34" charset="0"/>
-            </a:endParaRPr>
-          </a:p>
-          <a:p>
-            <a:pPr marL="0" indent="0">
-              <a:lnSpc>
-                <a:spcPct val="125000"/>
-              </a:lnSpc>
-              <a:buNone/>
-            </a:pPr>
-            <a:r>
-              <a:rPr lang="en-US" sz="1050" dirty="0">
-                <a:solidFill>
-                  <a:srgbClr val="A8DADC"/>
-                </a:solidFill>
-                <a:latin typeface="Aptos Display" panose="020B0004020202020204" pitchFamily="34" charset="0"/>
-                <a:ea typeface="Courier New" pitchFamily="34" charset="-122"/>
-                <a:cs typeface="Courier New" pitchFamily="34" charset="-120"/>
-              </a:rPr>
-              <a:t>ORDER BY reduction DESC LIMIT 10;</a:t>
-            </a:r>
-            <a:endParaRPr lang="en-US" sz="1050" dirty="0">
-              <a:latin typeface="Aptos Display" panose="020B0004020202020204" pitchFamily="34" charset="0"/>
-            </a:endParaRPr>
-          </a:p>
-        </p:txBody>
-      </p:sp>
-      <p:sp>
-        <p:nvSpPr>
-          <p:cNvPr id="18" name="Shape 12">
-            <a:extLst>
-              <a:ext uri="{FF2B5EF4-FFF2-40B4-BE49-F238E27FC236}">
-                <a16:creationId xmlns:a16="http://schemas.microsoft.com/office/drawing/2014/main" id="{21D762AE-5EB7-913A-ABF6-B62002AF41A3}"/>
-              </a:ext>
-            </a:extLst>
-          </p:cNvPr>
-          <p:cNvSpPr/>
-          <p:nvPr/>
-        </p:nvSpPr>
-        <p:spPr>
-          <a:xfrm>
-            <a:off x="1450848" y="3927084"/>
-            <a:ext cx="4328160" cy="2302254"/>
-          </a:xfrm>
-          <a:prstGeom prst="rect">
-            <a:avLst/>
-          </a:prstGeom>
-          <a:solidFill>
-            <a:srgbClr val="223045"/>
-          </a:solidFill>
-          <a:ln w="15240">
-            <a:solidFill>
-              <a:srgbClr val="2D8B8B"/>
-            </a:solidFill>
-            <a:prstDash val="solid"/>
-          </a:ln>
-          <a:effectLst>
-            <a:outerShdw blurRad="101600" dist="38100" dir="8100000" algn="bl" rotWithShape="0">
-              <a:srgbClr val="000000">
-                <a:alpha val="22000"/>
-              </a:srgbClr>
-            </a:outerShdw>
-          </a:effectLst>
-        </p:spPr>
-      </p:sp>
-      <p:sp>
-        <p:nvSpPr>
-          <p:cNvPr id="19" name="Text 13">
-            <a:extLst>
-              <a:ext uri="{FF2B5EF4-FFF2-40B4-BE49-F238E27FC236}">
-                <a16:creationId xmlns:a16="http://schemas.microsoft.com/office/drawing/2014/main" id="{CB7EB52E-7F5A-359A-7BF9-5304EF6DC028}"/>
-              </a:ext>
-            </a:extLst>
-          </p:cNvPr>
-          <p:cNvSpPr/>
-          <p:nvPr/>
-        </p:nvSpPr>
-        <p:spPr>
-          <a:xfrm>
-            <a:off x="1554923" y="3948999"/>
-            <a:ext cx="4114079" cy="375087"/>
-          </a:xfrm>
-          <a:prstGeom prst="rect">
-            <a:avLst/>
-          </a:prstGeom>
-          <a:noFill/>
-          <a:ln/>
-        </p:spPr>
-        <p:txBody>
-          <a:bodyPr wrap="square" rtlCol="0" anchor="ctr"/>
-          <a:lstStyle/>
-          <a:p>
-            <a:pPr marL="0" indent="0">
-              <a:lnSpc>
-                <a:spcPct val="110000"/>
-              </a:lnSpc>
-              <a:buNone/>
-            </a:pPr>
-            <a:r>
-              <a:rPr lang="en-US" sz="1200" b="1" dirty="0">
-                <a:solidFill>
-                  <a:srgbClr val="A8DADC"/>
-                </a:solidFill>
-                <a:latin typeface="Aptos Display" panose="020B0004020202020204" pitchFamily="34" charset="0"/>
-                <a:ea typeface="DejaVu Sans" pitchFamily="34" charset="-122"/>
-                <a:cs typeface="DejaVu Sans" pitchFamily="34" charset="-120"/>
-              </a:rPr>
-              <a:t>Global Emission Share (%) by Country</a:t>
-            </a:r>
-            <a:endParaRPr lang="en-US" sz="1200" dirty="0">
-              <a:latin typeface="Aptos Display" panose="020B0004020202020204" pitchFamily="34" charset="0"/>
-            </a:endParaRPr>
-          </a:p>
-        </p:txBody>
-      </p:sp>
-      <p:sp>
-        <p:nvSpPr>
-          <p:cNvPr id="20" name="Shape 14">
-            <a:extLst>
-              <a:ext uri="{FF2B5EF4-FFF2-40B4-BE49-F238E27FC236}">
-                <a16:creationId xmlns:a16="http://schemas.microsoft.com/office/drawing/2014/main" id="{E7BC85C0-E135-E91A-50EF-EE57F1D0CCC8}"/>
-              </a:ext>
-            </a:extLst>
-          </p:cNvPr>
-          <p:cNvSpPr/>
-          <p:nvPr/>
-        </p:nvSpPr>
-        <p:spPr>
-          <a:xfrm>
-            <a:off x="1564345" y="4324086"/>
-            <a:ext cx="4114079" cy="1793493"/>
-          </a:xfrm>
-          <a:prstGeom prst="rect">
-            <a:avLst/>
-          </a:prstGeom>
-          <a:solidFill>
-            <a:srgbClr val="172030"/>
-          </a:solidFill>
-          <a:ln w="6350">
-            <a:solidFill>
-              <a:srgbClr val="7AA5B0"/>
-            </a:solidFill>
-            <a:prstDash val="solid"/>
-          </a:ln>
-        </p:spPr>
-      </p:sp>
-      <p:sp>
-        <p:nvSpPr>
-          <p:cNvPr id="21" name="Text 15">
-            <a:extLst>
-              <a:ext uri="{FF2B5EF4-FFF2-40B4-BE49-F238E27FC236}">
-                <a16:creationId xmlns:a16="http://schemas.microsoft.com/office/drawing/2014/main" id="{D62693C2-D329-AB14-866A-ED745776A2BF}"/>
-              </a:ext>
-            </a:extLst>
-          </p:cNvPr>
-          <p:cNvSpPr/>
-          <p:nvPr/>
-        </p:nvSpPr>
-        <p:spPr>
-          <a:xfrm>
-            <a:off x="1554923" y="4324086"/>
-            <a:ext cx="4123501" cy="1793493"/>
-          </a:xfrm>
-          <a:prstGeom prst="rect">
-            <a:avLst/>
-          </a:prstGeom>
-          <a:noFill/>
-          <a:ln/>
-        </p:spPr>
-        <p:txBody>
-          <a:bodyPr wrap="square" rtlCol="0" anchor="ctr"/>
-          <a:lstStyle/>
-          <a:p>
-            <a:pPr marL="0" indent="0">
-              <a:lnSpc>
-                <a:spcPct val="125000"/>
-              </a:lnSpc>
-              <a:buNone/>
-            </a:pPr>
-            <a:r>
-              <a:rPr lang="en-US" sz="1050" dirty="0">
-                <a:solidFill>
-                  <a:srgbClr val="A8DADC"/>
-                </a:solidFill>
-                <a:latin typeface="Aptos Display" panose="020B0004020202020204" pitchFamily="34" charset="0"/>
-                <a:ea typeface="Courier New" pitchFamily="34" charset="-122"/>
-                <a:cs typeface="Courier New" pitchFamily="34" charset="-120"/>
-              </a:rPr>
-              <a:t>SELECT country,</a:t>
-            </a:r>
-            <a:endParaRPr lang="en-US" sz="1050" dirty="0">
-              <a:latin typeface="Aptos Display" panose="020B0004020202020204" pitchFamily="34" charset="0"/>
-            </a:endParaRPr>
-          </a:p>
-          <a:p>
-            <a:pPr marL="0" indent="0">
-              <a:lnSpc>
-                <a:spcPct val="125000"/>
-              </a:lnSpc>
-              <a:buNone/>
-            </a:pPr>
-            <a:r>
-              <a:rPr lang="en-US" sz="1050" dirty="0">
-                <a:solidFill>
-                  <a:srgbClr val="A8DADC"/>
-                </a:solidFill>
-                <a:latin typeface="Aptos Display" panose="020B0004020202020204" pitchFamily="34" charset="0"/>
-                <a:ea typeface="Courier New" pitchFamily="34" charset="-122"/>
-                <a:cs typeface="Courier New" pitchFamily="34" charset="-120"/>
-              </a:rPr>
-              <a:t>  SUM(emission),</a:t>
-            </a:r>
-            <a:endParaRPr lang="en-US" sz="1050" dirty="0">
-              <a:latin typeface="Aptos Display" panose="020B0004020202020204" pitchFamily="34" charset="0"/>
-            </a:endParaRPr>
-          </a:p>
-          <a:p>
-            <a:pPr marL="0" indent="0">
-              <a:lnSpc>
-                <a:spcPct val="125000"/>
-              </a:lnSpc>
-              <a:buNone/>
-            </a:pPr>
-            <a:r>
-              <a:rPr lang="en-US" sz="1050" dirty="0">
-                <a:solidFill>
-                  <a:srgbClr val="A8DADC"/>
-                </a:solidFill>
-                <a:latin typeface="Aptos Display" panose="020B0004020202020204" pitchFamily="34" charset="0"/>
-                <a:ea typeface="Courier New" pitchFamily="34" charset="-122"/>
-                <a:cs typeface="Courier New" pitchFamily="34" charset="-120"/>
-              </a:rPr>
-              <a:t>  ROUND(</a:t>
-            </a:r>
-            <a:endParaRPr lang="en-US" sz="1050" dirty="0">
-              <a:latin typeface="Aptos Display" panose="020B0004020202020204" pitchFamily="34" charset="0"/>
-            </a:endParaRPr>
-          </a:p>
-          <a:p>
-            <a:pPr marL="0" indent="0">
-              <a:lnSpc>
-                <a:spcPct val="125000"/>
-              </a:lnSpc>
-              <a:buNone/>
-            </a:pPr>
-            <a:r>
-              <a:rPr lang="en-US" sz="1050" dirty="0">
-                <a:solidFill>
-                  <a:srgbClr val="A8DADC"/>
-                </a:solidFill>
-                <a:latin typeface="Aptos Display" panose="020B0004020202020204" pitchFamily="34" charset="0"/>
-                <a:ea typeface="Courier New" pitchFamily="34" charset="-122"/>
-                <a:cs typeface="Courier New" pitchFamily="34" charset="-120"/>
-              </a:rPr>
-              <a:t>    SUM(emission)*100.0 /</a:t>
-            </a:r>
-            <a:endParaRPr lang="en-US" sz="1050" dirty="0">
-              <a:latin typeface="Aptos Display" panose="020B0004020202020204" pitchFamily="34" charset="0"/>
-            </a:endParaRPr>
-          </a:p>
-          <a:p>
-            <a:pPr marL="0" indent="0">
-              <a:lnSpc>
-                <a:spcPct val="125000"/>
-              </a:lnSpc>
-              <a:buNone/>
-            </a:pPr>
-            <a:r>
-              <a:rPr lang="en-US" sz="1050" dirty="0">
-                <a:solidFill>
-                  <a:srgbClr val="A8DADC"/>
-                </a:solidFill>
-                <a:latin typeface="Aptos Display" panose="020B0004020202020204" pitchFamily="34" charset="0"/>
-                <a:ea typeface="Courier New" pitchFamily="34" charset="-122"/>
-                <a:cs typeface="Courier New" pitchFamily="34" charset="-120"/>
-              </a:rPr>
-              <a:t>    SUM(SUM(emission)) OVER (),</a:t>
-            </a:r>
-            <a:endParaRPr lang="en-US" sz="1050" dirty="0">
-              <a:latin typeface="Aptos Display" panose="020B0004020202020204" pitchFamily="34" charset="0"/>
-            </a:endParaRPr>
-          </a:p>
-          <a:p>
-            <a:pPr marL="0" indent="0">
-              <a:lnSpc>
-                <a:spcPct val="125000"/>
-              </a:lnSpc>
-              <a:buNone/>
-            </a:pPr>
-            <a:r>
-              <a:rPr lang="en-US" sz="1050" dirty="0">
-                <a:solidFill>
-                  <a:srgbClr val="A8DADC"/>
-                </a:solidFill>
-                <a:latin typeface="Aptos Display" panose="020B0004020202020204" pitchFamily="34" charset="0"/>
-                <a:ea typeface="Courier New" pitchFamily="34" charset="-122"/>
-                <a:cs typeface="Courier New" pitchFamily="34" charset="-120"/>
-              </a:rPr>
-              <a:t>  2) AS emission_share_pct</a:t>
-            </a:r>
-            <a:endParaRPr lang="en-US" sz="1050" dirty="0">
-              <a:latin typeface="Aptos Display" panose="020B0004020202020204" pitchFamily="34" charset="0"/>
-            </a:endParaRPr>
-          </a:p>
-          <a:p>
-            <a:pPr marL="0" indent="0">
-              <a:lnSpc>
-                <a:spcPct val="125000"/>
-              </a:lnSpc>
-              <a:buNone/>
-            </a:pPr>
-            <a:r>
-              <a:rPr lang="en-US" sz="1050" dirty="0">
-                <a:solidFill>
-                  <a:srgbClr val="A8DADC"/>
-                </a:solidFill>
-                <a:latin typeface="Aptos Display" panose="020B0004020202020204" pitchFamily="34" charset="0"/>
-                <a:ea typeface="Courier New" pitchFamily="34" charset="-122"/>
-                <a:cs typeface="Courier New" pitchFamily="34" charset="-120"/>
-              </a:rPr>
-              <a:t>FROM emission_3</a:t>
-            </a:r>
-            <a:endParaRPr lang="en-US" sz="1050" dirty="0">
-              <a:latin typeface="Aptos Display" panose="020B0004020202020204" pitchFamily="34" charset="0"/>
-            </a:endParaRPr>
-          </a:p>
-          <a:p>
-            <a:pPr marL="0" indent="0">
-              <a:lnSpc>
-                <a:spcPct val="125000"/>
-              </a:lnSpc>
-              <a:buNone/>
-            </a:pPr>
-            <a:r>
-              <a:rPr lang="en-US" sz="1050" dirty="0">
-                <a:solidFill>
-                  <a:srgbClr val="A8DADC"/>
-                </a:solidFill>
-                <a:latin typeface="Aptos Display" panose="020B0004020202020204" pitchFamily="34" charset="0"/>
-                <a:ea typeface="Courier New" pitchFamily="34" charset="-122"/>
-                <a:cs typeface="Courier New" pitchFamily="34" charset="-120"/>
-              </a:rPr>
-              <a:t>GROUP BY country</a:t>
-            </a:r>
-            <a:endParaRPr lang="en-US" sz="1050" dirty="0">
-              <a:latin typeface="Aptos Display" panose="020B0004020202020204" pitchFamily="34" charset="0"/>
-            </a:endParaRPr>
-          </a:p>
-          <a:p>
-            <a:pPr marL="0" indent="0">
-              <a:lnSpc>
-                <a:spcPct val="125000"/>
-              </a:lnSpc>
-              <a:buNone/>
-            </a:pPr>
-            <a:r>
-              <a:rPr lang="en-US" sz="1050" dirty="0">
-                <a:solidFill>
-                  <a:srgbClr val="A8DADC"/>
-                </a:solidFill>
-                <a:latin typeface="Aptos Display" panose="020B0004020202020204" pitchFamily="34" charset="0"/>
-                <a:ea typeface="Courier New" pitchFamily="34" charset="-122"/>
-                <a:cs typeface="Courier New" pitchFamily="34" charset="-120"/>
-              </a:rPr>
-              <a:t>ORDER BY emission_share_pct DESC;</a:t>
-            </a:r>
-            <a:endParaRPr lang="en-US" sz="1050" dirty="0">
-              <a:latin typeface="Aptos Display" panose="020B0004020202020204" pitchFamily="34" charset="0"/>
-            </a:endParaRPr>
-          </a:p>
-        </p:txBody>
-      </p:sp>
-      <p:sp>
-        <p:nvSpPr>
-          <p:cNvPr id="22" name="Shape 16">
-            <a:extLst>
-              <a:ext uri="{FF2B5EF4-FFF2-40B4-BE49-F238E27FC236}">
-                <a16:creationId xmlns:a16="http://schemas.microsoft.com/office/drawing/2014/main" id="{5BD0094F-8433-7DD2-4A73-465076DED1AC}"/>
-              </a:ext>
-            </a:extLst>
-          </p:cNvPr>
-          <p:cNvSpPr/>
-          <p:nvPr/>
-        </p:nvSpPr>
-        <p:spPr>
-          <a:xfrm>
-            <a:off x="6469890" y="3927083"/>
-            <a:ext cx="4299710" cy="2302255"/>
-          </a:xfrm>
-          <a:prstGeom prst="rect">
-            <a:avLst/>
-          </a:prstGeom>
-          <a:solidFill>
-            <a:srgbClr val="223045"/>
-          </a:solidFill>
-          <a:ln w="15240">
-            <a:solidFill>
-              <a:srgbClr val="2D8B8B"/>
-            </a:solidFill>
-            <a:prstDash val="solid"/>
-          </a:ln>
-          <a:effectLst>
-            <a:outerShdw blurRad="101600" dist="38100" dir="8100000" algn="bl" rotWithShape="0">
-              <a:srgbClr val="000000">
-                <a:alpha val="22000"/>
-              </a:srgbClr>
-            </a:outerShdw>
-          </a:effectLst>
-        </p:spPr>
-      </p:sp>
-      <p:sp>
-        <p:nvSpPr>
-          <p:cNvPr id="23" name="Text 17">
-            <a:extLst>
-              <a:ext uri="{FF2B5EF4-FFF2-40B4-BE49-F238E27FC236}">
-                <a16:creationId xmlns:a16="http://schemas.microsoft.com/office/drawing/2014/main" id="{C64A014F-695B-D0C9-8A58-9CBFE4F8562E}"/>
-              </a:ext>
-            </a:extLst>
-          </p:cNvPr>
-          <p:cNvSpPr/>
-          <p:nvPr/>
-        </p:nvSpPr>
-        <p:spPr>
-          <a:xfrm>
-            <a:off x="6570196" y="3948999"/>
-            <a:ext cx="4087036" cy="375087"/>
-          </a:xfrm>
-          <a:prstGeom prst="rect">
-            <a:avLst/>
-          </a:prstGeom>
-          <a:noFill/>
-          <a:ln/>
-        </p:spPr>
-        <p:txBody>
-          <a:bodyPr wrap="square" rtlCol="0" anchor="ctr"/>
-          <a:lstStyle/>
-          <a:p>
-            <a:pPr marL="0" indent="0">
-              <a:lnSpc>
-                <a:spcPct val="110000"/>
-              </a:lnSpc>
-              <a:buNone/>
-            </a:pPr>
-            <a:r>
-              <a:rPr lang="en-US" sz="1200" b="1" dirty="0">
-                <a:solidFill>
-                  <a:srgbClr val="A8DADC"/>
-                </a:solidFill>
-                <a:latin typeface="Aptos Display" panose="020B0004020202020204" pitchFamily="34" charset="0"/>
-                <a:ea typeface="DejaVu Sans" pitchFamily="34" charset="-122"/>
-                <a:cs typeface="DejaVu Sans" pitchFamily="34" charset="-120"/>
-              </a:rPr>
-              <a:t>Global Average GDP, Emission &amp; Population / Year</a:t>
-            </a:r>
-            <a:endParaRPr lang="en-US" sz="1200" dirty="0">
-              <a:latin typeface="Aptos Display" panose="020B0004020202020204" pitchFamily="34" charset="0"/>
-            </a:endParaRPr>
-          </a:p>
-        </p:txBody>
-      </p:sp>
-      <p:sp>
-        <p:nvSpPr>
-          <p:cNvPr id="24" name="Shape 18">
-            <a:extLst>
-              <a:ext uri="{FF2B5EF4-FFF2-40B4-BE49-F238E27FC236}">
-                <a16:creationId xmlns:a16="http://schemas.microsoft.com/office/drawing/2014/main" id="{794895C5-5571-5044-B00A-085A60C78278}"/>
-              </a:ext>
-            </a:extLst>
-          </p:cNvPr>
-          <p:cNvSpPr/>
-          <p:nvPr/>
-        </p:nvSpPr>
-        <p:spPr>
-          <a:xfrm>
-            <a:off x="6579618" y="4324087"/>
-            <a:ext cx="4087036" cy="1793492"/>
-          </a:xfrm>
-          <a:prstGeom prst="rect">
-            <a:avLst/>
-          </a:prstGeom>
-          <a:solidFill>
-            <a:srgbClr val="172030"/>
-          </a:solidFill>
-          <a:ln w="6350">
-            <a:solidFill>
-              <a:srgbClr val="7AA5B0"/>
-            </a:solidFill>
-            <a:prstDash val="solid"/>
-          </a:ln>
-        </p:spPr>
-      </p:sp>
-      <p:sp>
-        <p:nvSpPr>
-          <p:cNvPr id="25" name="Text 19">
-            <a:extLst>
-              <a:ext uri="{FF2B5EF4-FFF2-40B4-BE49-F238E27FC236}">
-                <a16:creationId xmlns:a16="http://schemas.microsoft.com/office/drawing/2014/main" id="{522D41E6-72FC-D20D-69F6-458DAE0DD4A6}"/>
-              </a:ext>
-            </a:extLst>
-          </p:cNvPr>
-          <p:cNvSpPr/>
-          <p:nvPr/>
-        </p:nvSpPr>
-        <p:spPr>
-          <a:xfrm>
-            <a:off x="6579618" y="4324087"/>
-            <a:ext cx="4087035" cy="1793492"/>
-          </a:xfrm>
-          <a:prstGeom prst="rect">
-            <a:avLst/>
-          </a:prstGeom>
-          <a:noFill/>
-          <a:ln/>
-        </p:spPr>
-        <p:txBody>
-          <a:bodyPr wrap="square" rtlCol="0" anchor="ctr"/>
-          <a:lstStyle/>
-          <a:p>
-            <a:pPr marL="0" indent="0">
-              <a:lnSpc>
-                <a:spcPct val="125000"/>
-              </a:lnSpc>
-              <a:buNone/>
-            </a:pPr>
-            <a:r>
-              <a:rPr lang="en-US" sz="1100" dirty="0">
-                <a:solidFill>
-                  <a:srgbClr val="A8DADC"/>
-                </a:solidFill>
-                <a:latin typeface="Aptos Display" panose="020B0004020202020204" pitchFamily="34" charset="0"/>
-                <a:ea typeface="Courier New" pitchFamily="34" charset="-122"/>
-                <a:cs typeface="Courier New" pitchFamily="34" charset="-120"/>
-              </a:rPr>
-              <a:t>SELECT g.year,</a:t>
-            </a:r>
-            <a:endParaRPr lang="en-US" sz="1100" dirty="0">
-              <a:latin typeface="Aptos Display" panose="020B0004020202020204" pitchFamily="34" charset="0"/>
-            </a:endParaRPr>
-          </a:p>
-          <a:p>
-            <a:pPr marL="0" indent="0">
-              <a:lnSpc>
-                <a:spcPct val="125000"/>
-              </a:lnSpc>
-              <a:buNone/>
-            </a:pPr>
-            <a:r>
-              <a:rPr lang="en-US" sz="1100" dirty="0">
-                <a:solidFill>
-                  <a:srgbClr val="A8DADC"/>
-                </a:solidFill>
-                <a:latin typeface="Aptos Display" panose="020B0004020202020204" pitchFamily="34" charset="0"/>
-                <a:ea typeface="Courier New" pitchFamily="34" charset="-122"/>
-                <a:cs typeface="Courier New" pitchFamily="34" charset="-120"/>
-              </a:rPr>
-              <a:t>  AVG(g.Value)           AS avg_gdp,</a:t>
-            </a:r>
-            <a:endParaRPr lang="en-US" sz="1100" dirty="0">
-              <a:latin typeface="Aptos Display" panose="020B0004020202020204" pitchFamily="34" charset="0"/>
-            </a:endParaRPr>
-          </a:p>
-          <a:p>
-            <a:pPr marL="0" indent="0">
-              <a:lnSpc>
-                <a:spcPct val="125000"/>
-              </a:lnSpc>
-              <a:buNone/>
-            </a:pPr>
-            <a:r>
-              <a:rPr lang="en-US" sz="1100" dirty="0">
-                <a:solidFill>
-                  <a:srgbClr val="A8DADC"/>
-                </a:solidFill>
-                <a:latin typeface="Aptos Display" panose="020B0004020202020204" pitchFamily="34" charset="0"/>
-                <a:ea typeface="Courier New" pitchFamily="34" charset="-122"/>
-                <a:cs typeface="Courier New" pitchFamily="34" charset="-120"/>
-              </a:rPr>
-              <a:t>  AVG(e.total_emission)  AS avg_emission,</a:t>
-            </a:r>
-            <a:endParaRPr lang="en-US" sz="1100" dirty="0">
-              <a:latin typeface="Aptos Display" panose="020B0004020202020204" pitchFamily="34" charset="0"/>
-            </a:endParaRPr>
-          </a:p>
-          <a:p>
-            <a:pPr marL="0" indent="0">
-              <a:lnSpc>
-                <a:spcPct val="125000"/>
-              </a:lnSpc>
-              <a:buNone/>
-            </a:pPr>
-            <a:r>
-              <a:rPr lang="en-US" sz="1100" dirty="0">
-                <a:solidFill>
-                  <a:srgbClr val="A8DADC"/>
-                </a:solidFill>
-                <a:latin typeface="Aptos Display" panose="020B0004020202020204" pitchFamily="34" charset="0"/>
-                <a:ea typeface="Courier New" pitchFamily="34" charset="-122"/>
-                <a:cs typeface="Courier New" pitchFamily="34" charset="-120"/>
-              </a:rPr>
-              <a:t>  AVG(p.Value)           AS avg_population</a:t>
-            </a:r>
-            <a:endParaRPr lang="en-US" sz="1100" dirty="0">
-              <a:latin typeface="Aptos Display" panose="020B0004020202020204" pitchFamily="34" charset="0"/>
-            </a:endParaRPr>
-          </a:p>
-          <a:p>
-            <a:pPr marL="0" indent="0">
-              <a:lnSpc>
-                <a:spcPct val="125000"/>
-              </a:lnSpc>
-              <a:buNone/>
-            </a:pPr>
-            <a:r>
-              <a:rPr lang="en-US" sz="1100" dirty="0">
-                <a:solidFill>
-                  <a:srgbClr val="A8DADC"/>
-                </a:solidFill>
-                <a:latin typeface="Aptos Display" panose="020B0004020202020204" pitchFamily="34" charset="0"/>
-                <a:ea typeface="Courier New" pitchFamily="34" charset="-122"/>
-                <a:cs typeface="Courier New" pitchFamily="34" charset="-120"/>
-              </a:rPr>
-              <a:t>FROM gdp_3 g</a:t>
-            </a:r>
-            <a:endParaRPr lang="en-US" sz="1100" dirty="0">
-              <a:latin typeface="Aptos Display" panose="020B0004020202020204" pitchFamily="34" charset="0"/>
-            </a:endParaRPr>
-          </a:p>
-          <a:p>
-            <a:pPr marL="0" indent="0">
-              <a:lnSpc>
-                <a:spcPct val="125000"/>
-              </a:lnSpc>
-              <a:buNone/>
-            </a:pPr>
-            <a:r>
-              <a:rPr lang="en-US" sz="1100" dirty="0">
-                <a:solidFill>
-                  <a:srgbClr val="A8DADC"/>
-                </a:solidFill>
-                <a:latin typeface="Aptos Display" panose="020B0004020202020204" pitchFamily="34" charset="0"/>
-                <a:ea typeface="Courier New" pitchFamily="34" charset="-122"/>
-                <a:cs typeface="Courier New" pitchFamily="34" charset="-120"/>
-              </a:rPr>
-              <a:t>JOIN (...sum subquery...) e ...</a:t>
-            </a:r>
-            <a:endParaRPr lang="en-US" sz="1100" dirty="0">
-              <a:latin typeface="Aptos Display" panose="020B0004020202020204" pitchFamily="34" charset="0"/>
-            </a:endParaRPr>
-          </a:p>
-          <a:p>
-            <a:pPr marL="0" indent="0">
-              <a:lnSpc>
-                <a:spcPct val="125000"/>
-              </a:lnSpc>
-              <a:buNone/>
-            </a:pPr>
-            <a:r>
-              <a:rPr lang="en-US" sz="1100" dirty="0">
-                <a:solidFill>
-                  <a:srgbClr val="A8DADC"/>
-                </a:solidFill>
-                <a:latin typeface="Aptos Display" panose="020B0004020202020204" pitchFamily="34" charset="0"/>
-                <a:ea typeface="Courier New" pitchFamily="34" charset="-122"/>
-                <a:cs typeface="Courier New" pitchFamily="34" charset="-120"/>
-              </a:rPr>
-              <a:t>JOIN population p ...</a:t>
-            </a:r>
-            <a:endParaRPr lang="en-US" sz="1100" dirty="0">
-              <a:latin typeface="Aptos Display" panose="020B0004020202020204" pitchFamily="34" charset="0"/>
-            </a:endParaRPr>
-          </a:p>
-          <a:p>
-            <a:pPr marL="0" indent="0">
-              <a:lnSpc>
-                <a:spcPct val="125000"/>
-              </a:lnSpc>
-              <a:buNone/>
-            </a:pPr>
-            <a:r>
-              <a:rPr lang="en-US" sz="1100" dirty="0">
-                <a:solidFill>
-                  <a:srgbClr val="A8DADC"/>
-                </a:solidFill>
-                <a:latin typeface="Aptos Display" panose="020B0004020202020204" pitchFamily="34" charset="0"/>
-                <a:ea typeface="Courier New" pitchFamily="34" charset="-122"/>
-                <a:cs typeface="Courier New" pitchFamily="34" charset="-120"/>
-              </a:rPr>
-              <a:t>GROUP BY g.year ORDER BY g.year;</a:t>
-            </a:r>
-            <a:endParaRPr lang="en-US" sz="1100" dirty="0">
-              <a:latin typeface="Aptos Display" panose="020B0004020202020204" pitchFamily="34" charset="0"/>
-            </a:endParaRPr>
-          </a:p>
-        </p:txBody>
-      </p:sp>
-      <p:sp>
-        <p:nvSpPr>
-          <p:cNvPr id="26" name="Shape 0">
-            <a:extLst>
-              <a:ext uri="{FF2B5EF4-FFF2-40B4-BE49-F238E27FC236}">
-                <a16:creationId xmlns:a16="http://schemas.microsoft.com/office/drawing/2014/main" id="{3206DFEC-DB4E-FEA3-8E75-BBB863B2BE59}"/>
-              </a:ext>
-            </a:extLst>
-          </p:cNvPr>
-          <p:cNvSpPr/>
-          <p:nvPr/>
-        </p:nvSpPr>
-        <p:spPr>
-          <a:xfrm>
-            <a:off x="0" y="0"/>
-            <a:ext cx="12192000" cy="502920"/>
-          </a:xfrm>
-          <a:prstGeom prst="rect">
-            <a:avLst/>
-          </a:prstGeom>
-          <a:solidFill>
-            <a:srgbClr val="FF0000"/>
-          </a:solidFill>
-          <a:ln w="12700">
-            <a:noFill/>
-            <a:prstDash val="solid"/>
-          </a:ln>
-        </p:spPr>
-      </p:sp>
-    </p:spTree>
-    <p:extLst>
-      <p:ext uri="{BB962C8B-B14F-4D97-AF65-F5344CB8AC3E}">
-        <p14:creationId xmlns:p14="http://schemas.microsoft.com/office/powerpoint/2010/main" val="3099176851"/>
-      </p:ext>
-    </p:extLst>
-  </p:cSld>
-  <p:clrMapOvr>
-    <a:masterClrMapping/>
-  </p:clrMapOvr>
-  <mc:AlternateContent xmlns:mc="http://schemas.openxmlformats.org/markup-compatibility/2006">
-    <mc:Choice xmlns:p159="http://schemas.microsoft.com/office/powerpoint/2015/09/main" Requires="p159">
-      <p:transition>
-        <p159:morph option="byObject"/>
-      </p:transition>
-    </mc:Choice>
-    <mc:Fallback>
-      <p:transition>
-        <p:fade/>
-      </p:transition>
-    </mc:Fallback>
-  </mc:AlternateContent>
-</p:sld>
-</file>
-
-<file path=ppt/slides/slide11.xml><?xml version="1.0" encoding="utf-8"?>
 <p:sld xmlns:a="http://schemas.openxmlformats.org/drawingml/2006/main" xmlns:r="http://schemas.openxmlformats.org/officeDocument/2006/relationships" xmlns:p="http://schemas.openxmlformats.org/presentationml/2006/main">
   <p:cSld>
     <p:spTree>
@@ -22498,13 +20877,13 @@
   <p:clrMapOvr>
     <a:masterClrMapping/>
   </p:clrMapOvr>
-  <mc:AlternateContent xmlns:mc="http://schemas.openxmlformats.org/markup-compatibility/2006">
-    <mc:Choice xmlns:p159="http://schemas.microsoft.com/office/powerpoint/2015/09/main" Requires="p159">
+  <mc:AlternateContent xmlns:mc="http://schemas.openxmlformats.org/markup-compatibility/2006" xmlns:p159="http://schemas.microsoft.com/office/powerpoint/2015/09/main">
+    <mc:Choice Requires="p159">
       <p:transition>
         <p159:morph option="byObject"/>
       </p:transition>
     </mc:Choice>
-    <mc:Fallback>
+    <mc:Fallback xmlns="">
       <p:transition>
         <p:fade/>
       </p:transition>
@@ -22513,7 +20892,7 @@
 </p:sld>
 </file>
 
-<file path=ppt/slides/slide12.xml><?xml version="1.0" encoding="utf-8"?>
+<file path=ppt/slides/slide11.xml><?xml version="1.0" encoding="utf-8"?>
 <p:sld xmlns:a="http://schemas.openxmlformats.org/drawingml/2006/main" xmlns:r="http://schemas.openxmlformats.org/officeDocument/2006/relationships" xmlns:p="http://schemas.openxmlformats.org/presentationml/2006/main">
   <p:cSld>
     <p:spTree>
@@ -23840,13 +22219,13 @@
   <p:clrMapOvr>
     <a:masterClrMapping/>
   </p:clrMapOvr>
-  <mc:AlternateContent xmlns:mc="http://schemas.openxmlformats.org/markup-compatibility/2006">
-    <mc:Choice xmlns:p159="http://schemas.microsoft.com/office/powerpoint/2015/09/main" Requires="p159">
+  <mc:AlternateContent xmlns:mc="http://schemas.openxmlformats.org/markup-compatibility/2006" xmlns:p159="http://schemas.microsoft.com/office/powerpoint/2015/09/main">
+    <mc:Choice Requires="p159">
       <p:transition>
         <p159:morph option="byObject"/>
       </p:transition>
     </mc:Choice>
-    <mc:Fallback>
+    <mc:Fallback xmlns="">
       <p:transition>
         <p:fade/>
       </p:transition>
@@ -23855,7 +22234,7 @@
 </p:sld>
 </file>
 
-<file path=ppt/slides/slide13.xml><?xml version="1.0" encoding="utf-8"?>
+<file path=ppt/slides/slide12.xml><?xml version="1.0" encoding="utf-8"?>
 <p:sld xmlns:a="http://schemas.openxmlformats.org/drawingml/2006/main" xmlns:r="http://schemas.openxmlformats.org/officeDocument/2006/relationships" xmlns:p="http://schemas.openxmlformats.org/presentationml/2006/main">
   <p:cSld>
     <p:spTree>
@@ -25371,13 +23750,13 @@
   <p:clrMapOvr>
     <a:masterClrMapping/>
   </p:clrMapOvr>
-  <mc:AlternateContent xmlns:mc="http://schemas.openxmlformats.org/markup-compatibility/2006">
-    <mc:Choice xmlns:p159="http://schemas.microsoft.com/office/powerpoint/2015/09/main" Requires="p159">
+  <mc:AlternateContent xmlns:mc="http://schemas.openxmlformats.org/markup-compatibility/2006" xmlns:p159="http://schemas.microsoft.com/office/powerpoint/2015/09/main">
+    <mc:Choice Requires="p159">
       <p:transition>
         <p159:morph option="byObject"/>
       </p:transition>
     </mc:Choice>
-    <mc:Fallback>
+    <mc:Fallback xmlns="">
       <p:transition>
         <p:fade/>
       </p:transition>
@@ -25386,7 +23765,7 @@
 </p:sld>
 </file>
 
-<file path=ppt/slides/slide14.xml><?xml version="1.0" encoding="utf-8"?>
+<file path=ppt/slides/slide13.xml><?xml version="1.0" encoding="utf-8"?>
 <p:sld xmlns:a="http://schemas.openxmlformats.org/drawingml/2006/main" xmlns:r="http://schemas.openxmlformats.org/officeDocument/2006/relationships" xmlns:p="http://schemas.openxmlformats.org/presentationml/2006/main">
   <p:cSld>
     <p:spTree>
@@ -25501,13 +23880,13 @@
   <p:clrMapOvr>
     <a:masterClrMapping/>
   </p:clrMapOvr>
-  <mc:AlternateContent xmlns:mc="http://schemas.openxmlformats.org/markup-compatibility/2006">
-    <mc:Choice xmlns:p159="http://schemas.microsoft.com/office/powerpoint/2015/09/main" Requires="p159">
+  <mc:AlternateContent xmlns:mc="http://schemas.openxmlformats.org/markup-compatibility/2006" xmlns:p159="http://schemas.microsoft.com/office/powerpoint/2015/09/main">
+    <mc:Choice Requires="p159">
       <p:transition>
         <p159:morph option="byObject"/>
       </p:transition>
     </mc:Choice>
-    <mc:Fallback>
+    <mc:Fallback xmlns="">
       <p:transition>
         <p:fade/>
       </p:transition>
@@ -25517,465 +23896,6 @@
 </file>
 
 <file path=ppt/slides/slide2.xml><?xml version="1.0" encoding="utf-8"?>
-<p:sld xmlns:a="http://schemas.openxmlformats.org/drawingml/2006/main" xmlns:r="http://schemas.openxmlformats.org/officeDocument/2006/relationships" xmlns:p="http://schemas.openxmlformats.org/presentationml/2006/main">
-  <p:cSld>
-    <p:spTree>
-      <p:nvGrpSpPr>
-        <p:cNvPr id="1" name="Shape 103"/>
-        <p:cNvGrpSpPr/>
-        <p:nvPr/>
-      </p:nvGrpSpPr>
-      <p:grpSpPr>
-        <a:xfrm>
-          <a:off x="0" y="0"/>
-          <a:ext cx="0" cy="0"/>
-          <a:chOff x="0" y="0"/>
-          <a:chExt cx="0" cy="0"/>
-        </a:xfrm>
-      </p:grpSpPr>
-      <p:sp>
-        <p:nvSpPr>
-          <p:cNvPr id="104" name="Google Shape;104;p3"/>
-          <p:cNvSpPr txBox="1"/>
-          <p:nvPr/>
-        </p:nvSpPr>
-        <p:spPr>
-          <a:xfrm>
-            <a:off x="737812" y="1299172"/>
-            <a:ext cx="7007400" cy="1569900"/>
-          </a:xfrm>
-          <a:prstGeom prst="rect">
-            <a:avLst/>
-          </a:prstGeom>
-          <a:noFill/>
-          <a:ln>
-            <a:noFill/>
-          </a:ln>
-        </p:spPr>
-        <p:txBody>
-          <a:bodyPr spcFirstLastPara="1" wrap="square" lIns="91425" tIns="45700" rIns="91425" bIns="45700" anchor="t" anchorCtr="0">
-            <a:spAutoFit/>
-          </a:bodyPr>
-          <a:lstStyle/>
-          <a:p>
-            <a:pPr marL="285750" marR="0" lvl="0" indent="-323850" algn="l" rtl="0">
-              <a:lnSpc>
-                <a:spcPct val="100000"/>
-              </a:lnSpc>
-              <a:spcBef>
-                <a:spcPts val="0"/>
-              </a:spcBef>
-              <a:spcAft>
-                <a:spcPts val="0"/>
-              </a:spcAft>
-              <a:buClr>
-                <a:schemeClr val="dk1"/>
-              </a:buClr>
-              <a:buSzPts val="2400"/>
-              <a:buFont typeface="Arial"/>
-              <a:buChar char="•"/>
-            </a:pPr>
-            <a:r>
-              <a:rPr lang="en-IN" sz="2400" b="1" i="0" u="none" strike="noStrike" cap="none" dirty="0">
-                <a:solidFill>
-                  <a:schemeClr val="dk1"/>
-                </a:solidFill>
-                <a:latin typeface="Aptos Display" panose="020B0004020202020204" pitchFamily="34" charset="0"/>
-                <a:ea typeface="Calibri"/>
-                <a:cs typeface="Calibri"/>
-                <a:sym typeface="Calibri"/>
-              </a:rPr>
-              <a:t>Background? (B-tech or M-tech)</a:t>
-            </a:r>
-            <a:endParaRPr sz="2400" b="1" i="0" u="none" strike="noStrike" cap="none" dirty="0">
-              <a:solidFill>
-                <a:schemeClr val="dk1"/>
-              </a:solidFill>
-              <a:latin typeface="Aptos Display" panose="020B0004020202020204" pitchFamily="34" charset="0"/>
-              <a:ea typeface="Calibri"/>
-              <a:cs typeface="Calibri"/>
-              <a:sym typeface="Calibri"/>
-            </a:endParaRPr>
-          </a:p>
-          <a:p>
-            <a:pPr marL="285750" marR="0" lvl="0" indent="-323850" algn="l" rtl="0">
-              <a:lnSpc>
-                <a:spcPct val="100000"/>
-              </a:lnSpc>
-              <a:spcBef>
-                <a:spcPts val="0"/>
-              </a:spcBef>
-              <a:spcAft>
-                <a:spcPts val="0"/>
-              </a:spcAft>
-              <a:buClr>
-                <a:schemeClr val="dk1"/>
-              </a:buClr>
-              <a:buSzPts val="2400"/>
-              <a:buFont typeface="Arial"/>
-              <a:buChar char="•"/>
-            </a:pPr>
-            <a:r>
-              <a:rPr lang="en-IN" sz="2400" b="1" i="0" u="none" strike="noStrike" cap="none" dirty="0">
-                <a:solidFill>
-                  <a:schemeClr val="dk1"/>
-                </a:solidFill>
-                <a:latin typeface="Aptos Display" panose="020B0004020202020204" pitchFamily="34" charset="0"/>
-                <a:ea typeface="Calibri"/>
-                <a:cs typeface="Calibri"/>
-                <a:sym typeface="Calibri"/>
-              </a:rPr>
-              <a:t>Why you want to learn Data Science</a:t>
-            </a:r>
-            <a:endParaRPr sz="2400" b="1" i="0" u="none" strike="noStrike" cap="none" dirty="0">
-              <a:solidFill>
-                <a:schemeClr val="dk1"/>
-              </a:solidFill>
-              <a:latin typeface="Aptos Display" panose="020B0004020202020204" pitchFamily="34" charset="0"/>
-              <a:ea typeface="Calibri"/>
-              <a:cs typeface="Calibri"/>
-              <a:sym typeface="Calibri"/>
-            </a:endParaRPr>
-          </a:p>
-          <a:p>
-            <a:pPr marL="285750" marR="0" lvl="0" indent="-323850" algn="l" rtl="0">
-              <a:lnSpc>
-                <a:spcPct val="100000"/>
-              </a:lnSpc>
-              <a:spcBef>
-                <a:spcPts val="0"/>
-              </a:spcBef>
-              <a:spcAft>
-                <a:spcPts val="0"/>
-              </a:spcAft>
-              <a:buClr>
-                <a:schemeClr val="dk1"/>
-              </a:buClr>
-              <a:buSzPts val="2400"/>
-              <a:buFont typeface="Arial"/>
-              <a:buChar char="•"/>
-            </a:pPr>
-            <a:r>
-              <a:rPr lang="en-IN" sz="2400" b="1" i="0" u="none" strike="noStrike" cap="none" dirty="0">
-                <a:solidFill>
-                  <a:schemeClr val="dk1"/>
-                </a:solidFill>
-                <a:latin typeface="Aptos Display" panose="020B0004020202020204" pitchFamily="34" charset="0"/>
-                <a:ea typeface="Calibri"/>
-                <a:cs typeface="Calibri"/>
-                <a:sym typeface="Calibri"/>
-              </a:rPr>
-              <a:t>Any work experience</a:t>
-            </a:r>
-            <a:endParaRPr sz="2400" b="1" i="0" u="none" strike="noStrike" cap="none" dirty="0">
-              <a:solidFill>
-                <a:schemeClr val="dk1"/>
-              </a:solidFill>
-              <a:latin typeface="Aptos Display" panose="020B0004020202020204" pitchFamily="34" charset="0"/>
-              <a:ea typeface="Calibri"/>
-              <a:cs typeface="Calibri"/>
-              <a:sym typeface="Calibri"/>
-            </a:endParaRPr>
-          </a:p>
-          <a:p>
-            <a:pPr marL="285750" marR="0" lvl="0" indent="-323850" algn="l" rtl="0">
-              <a:lnSpc>
-                <a:spcPct val="100000"/>
-              </a:lnSpc>
-              <a:spcBef>
-                <a:spcPts val="0"/>
-              </a:spcBef>
-              <a:spcAft>
-                <a:spcPts val="0"/>
-              </a:spcAft>
-              <a:buClr>
-                <a:schemeClr val="dk1"/>
-              </a:buClr>
-              <a:buSzPts val="2400"/>
-              <a:buFont typeface="Calibri"/>
-              <a:buChar char="•"/>
-            </a:pPr>
-            <a:r>
-              <a:rPr lang="en-IN" sz="2400" b="1" i="0" u="none" strike="noStrike" cap="none" dirty="0">
-                <a:solidFill>
-                  <a:schemeClr val="dk1"/>
-                </a:solidFill>
-                <a:latin typeface="Aptos Display" panose="020B0004020202020204" pitchFamily="34" charset="0"/>
-                <a:ea typeface="Calibri"/>
-                <a:cs typeface="Calibri"/>
-                <a:sym typeface="Calibri"/>
-              </a:rPr>
-              <a:t>Share your </a:t>
-            </a:r>
-            <a:r>
-              <a:rPr lang="en-IN" sz="2400" b="1" dirty="0">
-                <a:solidFill>
-                  <a:schemeClr val="dk1"/>
-                </a:solidFill>
-                <a:latin typeface="Aptos Display" panose="020B0004020202020204" pitchFamily="34" charset="0"/>
-                <a:ea typeface="Calibri"/>
-                <a:cs typeface="Calibri"/>
-                <a:sym typeface="Calibri"/>
-              </a:rPr>
-              <a:t>LinkedIn</a:t>
-            </a:r>
-            <a:r>
-              <a:rPr lang="en-IN" sz="2400" b="1" i="0" u="none" strike="noStrike" cap="none" dirty="0">
-                <a:solidFill>
-                  <a:schemeClr val="dk1"/>
-                </a:solidFill>
-                <a:latin typeface="Aptos Display" panose="020B0004020202020204" pitchFamily="34" charset="0"/>
-                <a:ea typeface="Calibri"/>
-                <a:cs typeface="Calibri"/>
-                <a:sym typeface="Calibri"/>
-              </a:rPr>
-              <a:t> and </a:t>
-            </a:r>
-            <a:r>
-              <a:rPr lang="en-IN" sz="2400" b="1" dirty="0">
-                <a:solidFill>
-                  <a:schemeClr val="dk1"/>
-                </a:solidFill>
-                <a:latin typeface="Aptos Display" panose="020B0004020202020204" pitchFamily="34" charset="0"/>
-                <a:ea typeface="Calibri"/>
-                <a:cs typeface="Calibri"/>
-                <a:sym typeface="Calibri"/>
-              </a:rPr>
-              <a:t>GitHub</a:t>
-            </a:r>
-            <a:r>
-              <a:rPr lang="en-IN" sz="2400" b="1" i="0" u="none" strike="noStrike" cap="none" dirty="0">
-                <a:solidFill>
-                  <a:schemeClr val="dk1"/>
-                </a:solidFill>
-                <a:latin typeface="Aptos Display" panose="020B0004020202020204" pitchFamily="34" charset="0"/>
-                <a:ea typeface="Calibri"/>
-                <a:cs typeface="Calibri"/>
-                <a:sym typeface="Calibri"/>
-              </a:rPr>
-              <a:t> profile </a:t>
-            </a:r>
-            <a:r>
-              <a:rPr lang="en-IN" sz="2400" b="1" dirty="0">
-                <a:solidFill>
-                  <a:schemeClr val="dk1"/>
-                </a:solidFill>
-                <a:latin typeface="Aptos Display" panose="020B0004020202020204" pitchFamily="34" charset="0"/>
-                <a:ea typeface="Calibri"/>
-                <a:cs typeface="Calibri"/>
-                <a:sym typeface="Calibri"/>
-              </a:rPr>
-              <a:t>URLs</a:t>
-            </a:r>
-            <a:endParaRPr sz="2400" b="1" i="0" u="none" strike="noStrike" cap="none" dirty="0">
-              <a:solidFill>
-                <a:schemeClr val="dk1"/>
-              </a:solidFill>
-              <a:latin typeface="Aptos Display" panose="020B0004020202020204" pitchFamily="34" charset="0"/>
-              <a:ea typeface="Calibri"/>
-              <a:cs typeface="Calibri"/>
-              <a:sym typeface="Calibri"/>
-            </a:endParaRPr>
-          </a:p>
-        </p:txBody>
-      </p:sp>
-      <p:sp>
-        <p:nvSpPr>
-          <p:cNvPr id="105" name="Google Shape;105;p3"/>
-          <p:cNvSpPr txBox="1"/>
-          <p:nvPr/>
-        </p:nvSpPr>
-        <p:spPr>
-          <a:xfrm>
-            <a:off x="427656" y="416554"/>
-            <a:ext cx="6099600" cy="880500"/>
-          </a:xfrm>
-          <a:prstGeom prst="rect">
-            <a:avLst/>
-          </a:prstGeom>
-          <a:noFill/>
-          <a:ln>
-            <a:noFill/>
-          </a:ln>
-        </p:spPr>
-        <p:txBody>
-          <a:bodyPr spcFirstLastPara="1" wrap="square" lIns="91425" tIns="45700" rIns="91425" bIns="45700" anchor="t" anchorCtr="0">
-            <a:spAutoFit/>
-          </a:bodyPr>
-          <a:lstStyle/>
-          <a:p>
-            <a:pPr marL="0" marR="0" lvl="0" indent="0" algn="l" rtl="0">
-              <a:lnSpc>
-                <a:spcPct val="80000"/>
-              </a:lnSpc>
-              <a:spcBef>
-                <a:spcPts val="0"/>
-              </a:spcBef>
-              <a:spcAft>
-                <a:spcPts val="0"/>
-              </a:spcAft>
-              <a:buClr>
-                <a:srgbClr val="FF0000"/>
-              </a:buClr>
-              <a:buSzPts val="3200"/>
-              <a:buFont typeface="Lato Black"/>
-              <a:buNone/>
-            </a:pPr>
-            <a:r>
-              <a:rPr lang="en-IN" sz="3200" b="0" i="0" u="none" strike="noStrike" cap="none">
-                <a:solidFill>
-                  <a:srgbClr val="FF0000"/>
-                </a:solidFill>
-                <a:latin typeface="Aptos Display" panose="020B0004020202020204" pitchFamily="34" charset="0"/>
-                <a:ea typeface="Lato Black"/>
-                <a:cs typeface="Lato Black"/>
-                <a:sym typeface="Lato Black"/>
-              </a:rPr>
-              <a:t>About me (Both T</a:t>
-            </a:r>
-            <a:r>
-              <a:rPr lang="en-IN" sz="3200">
-                <a:solidFill>
-                  <a:srgbClr val="FF0000"/>
-                </a:solidFill>
-                <a:latin typeface="Aptos Display" panose="020B0004020202020204" pitchFamily="34" charset="0"/>
-                <a:ea typeface="Lato Black"/>
-                <a:cs typeface="Lato Black"/>
-                <a:sym typeface="Lato Black"/>
-              </a:rPr>
-              <a:t>eam  Leader and Team Member</a:t>
-            </a:r>
-            <a:r>
-              <a:rPr lang="en-IN" sz="3200" b="0" i="0" u="none" strike="noStrike" cap="none">
-                <a:solidFill>
-                  <a:srgbClr val="FF0000"/>
-                </a:solidFill>
-                <a:latin typeface="Aptos Display" panose="020B0004020202020204" pitchFamily="34" charset="0"/>
-                <a:ea typeface="Lato Black"/>
-                <a:cs typeface="Lato Black"/>
-                <a:sym typeface="Lato Black"/>
-              </a:rPr>
-              <a:t>)</a:t>
-            </a:r>
-            <a:endParaRPr sz="1800" b="0" i="0" u="none" strike="noStrike" cap="none">
-              <a:solidFill>
-                <a:srgbClr val="FF0000"/>
-              </a:solidFill>
-              <a:latin typeface="Aptos Display" panose="020B0004020202020204" pitchFamily="34" charset="0"/>
-              <a:ea typeface="Calibri"/>
-              <a:cs typeface="Calibri"/>
-              <a:sym typeface="Calibri"/>
-            </a:endParaRPr>
-          </a:p>
-        </p:txBody>
-      </p:sp>
-    </p:spTree>
-  </p:cSld>
-  <p:clrMapOvr>
-    <a:masterClrMapping/>
-  </p:clrMapOvr>
-  <mc:AlternateContent xmlns:mc="http://schemas.openxmlformats.org/markup-compatibility/2006">
-    <mc:Choice xmlns:p159="http://schemas.microsoft.com/office/powerpoint/2015/09/main" Requires="p159">
-      <p:transition>
-        <p159:morph option="byObject"/>
-      </p:transition>
-    </mc:Choice>
-    <mc:Fallback>
-      <p:transition>
-        <p:fade/>
-      </p:transition>
-    </mc:Fallback>
-  </mc:AlternateContent>
-  <p:timing>
-    <p:tnLst>
-      <p:par>
-        <p:cTn id="1" dur="indefinite" restart="never" nodeType="tmRoot">
-          <p:childTnLst>
-            <p:seq concurrent="1" nextAc="seek">
-              <p:cTn id="2" dur="indefinite" nodeType="mainSeq">
-                <p:childTnLst>
-                  <p:par>
-                    <p:cTn id="3" fill="hold">
-                      <p:stCondLst>
-                        <p:cond delay="indefinite"/>
-                        <p:cond evt="onBegin" delay="0">
-                          <p:tn val="2"/>
-                        </p:cond>
-                      </p:stCondLst>
-                      <p:childTnLst>
-                        <p:par>
-                          <p:cTn id="4" fill="hold">
-                            <p:stCondLst>
-                              <p:cond delay="0"/>
-                            </p:stCondLst>
-                            <p:childTnLst>
-                              <p:par>
-                                <p:cTn id="5" presetID="10" presetClass="entr" presetSubtype="0" fill="hold" nodeType="withEffect">
-                                  <p:stCondLst>
-                                    <p:cond delay="0"/>
-                                  </p:stCondLst>
-                                  <p:childTnLst>
-                                    <p:set>
-                                      <p:cBhvr>
-                                        <p:cTn id="6" dur="1" fill="hold">
-                                          <p:stCondLst>
-                                            <p:cond delay="0"/>
-                                          </p:stCondLst>
-                                        </p:cTn>
-                                        <p:tgtEl>
-                                          <p:spTgt spid="105"/>
-                                        </p:tgtEl>
-                                        <p:attrNameLst>
-                                          <p:attrName>style.visibility</p:attrName>
-                                        </p:attrNameLst>
-                                      </p:cBhvr>
-                                      <p:to>
-                                        <p:strVal val="visible"/>
-                                      </p:to>
-                                    </p:set>
-                                    <p:animEffect transition="in" filter="fade">
-                                      <p:cBhvr>
-                                        <p:cTn id="7" dur="500"/>
-                                        <p:tgtEl>
-                                          <p:spTgt spid="105"/>
-                                        </p:tgtEl>
-                                      </p:cBhvr>
-                                    </p:animEffect>
-                                  </p:childTnLst>
-                                </p:cTn>
-                              </p:par>
-                            </p:childTnLst>
-                          </p:cTn>
-                        </p:par>
-                      </p:childTnLst>
-                    </p:cTn>
-                  </p:par>
-                </p:childTnLst>
-              </p:cTn>
-              <p:prevCondLst>
-                <p:cond evt="onPrev" delay="0">
-                  <p:tgtEl>
-                    <p:sldTgt/>
-                  </p:tgtEl>
-                </p:cond>
-              </p:prevCondLst>
-              <p:nextCondLst>
-                <p:cond evt="onNext" delay="0">
-                  <p:tgtEl>
-                    <p:sldTgt/>
-                  </p:tgtEl>
-                </p:cond>
-              </p:nextCondLst>
-            </p:seq>
-          </p:childTnLst>
-        </p:cTn>
-      </p:par>
-    </p:tnLst>
-  </p:timing>
-</p:sld>
-</file>
-
-<file path=ppt/slides/slide3.xml><?xml version="1.0" encoding="utf-8"?>
 <p:sld xmlns:a="http://schemas.openxmlformats.org/drawingml/2006/main" xmlns:r="http://schemas.openxmlformats.org/officeDocument/2006/relationships" xmlns:p="http://schemas.openxmlformats.org/presentationml/2006/main">
   <p:cSld>
     <p:spTree>
@@ -27104,13 +25024,13 @@
   <p:clrMapOvr>
     <a:masterClrMapping/>
   </p:clrMapOvr>
-  <mc:AlternateContent xmlns:mc="http://schemas.openxmlformats.org/markup-compatibility/2006">
-    <mc:Choice xmlns:p159="http://schemas.microsoft.com/office/powerpoint/2015/09/main" Requires="p159">
+  <mc:AlternateContent xmlns:mc="http://schemas.openxmlformats.org/markup-compatibility/2006" xmlns:p159="http://schemas.microsoft.com/office/powerpoint/2015/09/main">
+    <mc:Choice Requires="p159">
       <p:transition>
         <p159:morph option="byObject"/>
       </p:transition>
     </mc:Choice>
-    <mc:Fallback>
+    <mc:Fallback xmlns="">
       <p:transition>
         <p:fade/>
       </p:transition>
@@ -27119,7 +25039,7 @@
 </p:sld>
 </file>
 
-<file path=ppt/slides/slide4.xml><?xml version="1.0" encoding="utf-8"?>
+<file path=ppt/slides/slide3.xml><?xml version="1.0" encoding="utf-8"?>
 <p:sld xmlns:a="http://schemas.openxmlformats.org/drawingml/2006/main" xmlns:r="http://schemas.openxmlformats.org/officeDocument/2006/relationships" xmlns:p="http://schemas.openxmlformats.org/presentationml/2006/main">
   <p:cSld>
     <p:spTree>
@@ -28790,13 +26710,13 @@
   <p:clrMapOvr>
     <a:masterClrMapping/>
   </p:clrMapOvr>
-  <mc:AlternateContent xmlns:mc="http://schemas.openxmlformats.org/markup-compatibility/2006">
-    <mc:Choice xmlns:p159="http://schemas.microsoft.com/office/powerpoint/2015/09/main" Requires="p159">
+  <mc:AlternateContent xmlns:mc="http://schemas.openxmlformats.org/markup-compatibility/2006" xmlns:p159="http://schemas.microsoft.com/office/powerpoint/2015/09/main">
+    <mc:Choice Requires="p159">
       <p:transition>
         <p159:morph option="byObject"/>
       </p:transition>
     </mc:Choice>
-    <mc:Fallback>
+    <mc:Fallback xmlns="">
       <p:transition>
         <p:fade/>
       </p:transition>
@@ -28805,7 +26725,7 @@
 </p:sld>
 </file>
 
-<file path=ppt/slides/slide5.xml><?xml version="1.0" encoding="utf-8"?>
+<file path=ppt/slides/slide4.xml><?xml version="1.0" encoding="utf-8"?>
 <p:sld xmlns:a="http://schemas.openxmlformats.org/drawingml/2006/main" xmlns:r="http://schemas.openxmlformats.org/officeDocument/2006/relationships" xmlns:p="http://schemas.openxmlformats.org/presentationml/2006/main">
   <p:cSld>
     <p:spTree>
@@ -28951,13 +26871,13 @@
   <p:clrMapOvr>
     <a:masterClrMapping/>
   </p:clrMapOvr>
-  <mc:AlternateContent xmlns:mc="http://schemas.openxmlformats.org/markup-compatibility/2006">
-    <mc:Choice xmlns:p159="http://schemas.microsoft.com/office/powerpoint/2015/09/main" Requires="p159">
+  <mc:AlternateContent xmlns:mc="http://schemas.openxmlformats.org/markup-compatibility/2006" xmlns:p159="http://schemas.microsoft.com/office/powerpoint/2015/09/main">
+    <mc:Choice Requires="p159">
       <p:transition>
         <p159:morph option="byObject"/>
       </p:transition>
     </mc:Choice>
-    <mc:Fallback>
+    <mc:Fallback xmlns="">
       <p:transition>
         <p:fade/>
       </p:transition>
@@ -28966,7 +26886,7 @@
 </p:sld>
 </file>
 
-<file path=ppt/slides/slide6.xml><?xml version="1.0" encoding="utf-8"?>
+<file path=ppt/slides/slide5.xml><?xml version="1.0" encoding="utf-8"?>
 <p:sld xmlns:a="http://schemas.openxmlformats.org/drawingml/2006/main" xmlns:r="http://schemas.openxmlformats.org/officeDocument/2006/relationships" xmlns:p="http://schemas.openxmlformats.org/presentationml/2006/main">
   <p:cSld>
     <p:spTree>
@@ -30016,13 +27936,13 @@
   <p:clrMapOvr>
     <a:masterClrMapping/>
   </p:clrMapOvr>
-  <mc:AlternateContent xmlns:mc="http://schemas.openxmlformats.org/markup-compatibility/2006">
-    <mc:Choice xmlns:p159="http://schemas.microsoft.com/office/powerpoint/2015/09/main" Requires="p159">
+  <mc:AlternateContent xmlns:mc="http://schemas.openxmlformats.org/markup-compatibility/2006" xmlns:p159="http://schemas.microsoft.com/office/powerpoint/2015/09/main">
+    <mc:Choice Requires="p159">
       <p:transition>
         <p159:morph option="byObject"/>
       </p:transition>
     </mc:Choice>
-    <mc:Fallback>
+    <mc:Fallback xmlns="">
       <p:transition>
         <p:fade/>
       </p:transition>
@@ -30031,7 +27951,7 @@
 </p:sld>
 </file>
 
-<file path=ppt/slides/slide7.xml><?xml version="1.0" encoding="utf-8"?>
+<file path=ppt/slides/slide6.xml><?xml version="1.0" encoding="utf-8"?>
 <p:sld xmlns:a="http://schemas.openxmlformats.org/drawingml/2006/main" xmlns:r="http://schemas.openxmlformats.org/officeDocument/2006/relationships" xmlns:p="http://schemas.openxmlformats.org/presentationml/2006/main">
   <p:cSld>
     <p:spTree>
@@ -31089,13 +29009,13 @@
   <p:clrMapOvr>
     <a:masterClrMapping/>
   </p:clrMapOvr>
-  <mc:AlternateContent xmlns:mc="http://schemas.openxmlformats.org/markup-compatibility/2006">
-    <mc:Choice xmlns:p159="http://schemas.microsoft.com/office/powerpoint/2015/09/main" Requires="p159">
+  <mc:AlternateContent xmlns:mc="http://schemas.openxmlformats.org/markup-compatibility/2006" xmlns:p159="http://schemas.microsoft.com/office/powerpoint/2015/09/main">
+    <mc:Choice Requires="p159">
       <p:transition>
         <p159:morph option="byObject"/>
       </p:transition>
     </mc:Choice>
-    <mc:Fallback>
+    <mc:Fallback xmlns="">
       <p:transition>
         <p:fade/>
       </p:transition>
@@ -31104,7 +29024,7 @@
 </p:sld>
 </file>
 
-<file path=ppt/slides/slide8.xml><?xml version="1.0" encoding="utf-8"?>
+<file path=ppt/slides/slide7.xml><?xml version="1.0" encoding="utf-8"?>
 <p:sld xmlns:a="http://schemas.openxmlformats.org/drawingml/2006/main" xmlns:r="http://schemas.openxmlformats.org/officeDocument/2006/relationships" xmlns:p="http://schemas.openxmlformats.org/presentationml/2006/main">
   <p:cSld>
     <p:spTree>
@@ -32233,13 +30153,13 @@
   <p:clrMapOvr>
     <a:masterClrMapping/>
   </p:clrMapOvr>
-  <mc:AlternateContent xmlns:mc="http://schemas.openxmlformats.org/markup-compatibility/2006">
-    <mc:Choice xmlns:p159="http://schemas.microsoft.com/office/powerpoint/2015/09/main" Requires="p159">
+  <mc:AlternateContent xmlns:mc="http://schemas.openxmlformats.org/markup-compatibility/2006" xmlns:p159="http://schemas.microsoft.com/office/powerpoint/2015/09/main">
+    <mc:Choice Requires="p159">
       <p:transition>
         <p159:morph option="byObject"/>
       </p:transition>
     </mc:Choice>
-    <mc:Fallback>
+    <mc:Fallback xmlns="">
       <p:transition>
         <p:fade/>
       </p:transition>
@@ -32248,7 +30168,7 @@
 </p:sld>
 </file>
 
-<file path=ppt/slides/slide9.xml><?xml version="1.0" encoding="utf-8"?>
+<file path=ppt/slides/slide8.xml><?xml version="1.0" encoding="utf-8"?>
 <p:sld xmlns:a="http://schemas.openxmlformats.org/drawingml/2006/main" xmlns:r="http://schemas.openxmlformats.org/officeDocument/2006/relationships" xmlns:p="http://schemas.openxmlformats.org/presentationml/2006/main">
   <p:cSld>
     <p:spTree>
@@ -33614,13 +31534,1506 @@
   <p:clrMapOvr>
     <a:masterClrMapping/>
   </p:clrMapOvr>
-  <mc:AlternateContent xmlns:mc="http://schemas.openxmlformats.org/markup-compatibility/2006">
-    <mc:Choice xmlns:p159="http://schemas.microsoft.com/office/powerpoint/2015/09/main" Requires="p159">
+  <mc:AlternateContent xmlns:mc="http://schemas.openxmlformats.org/markup-compatibility/2006" xmlns:p159="http://schemas.microsoft.com/office/powerpoint/2015/09/main">
+    <mc:Choice Requires="p159">
       <p:transition>
         <p159:morph option="byObject"/>
       </p:transition>
     </mc:Choice>
-    <mc:Fallback>
+    <mc:Fallback xmlns="">
+      <p:transition>
+        <p:fade/>
+      </p:transition>
+    </mc:Fallback>
+  </mc:AlternateContent>
+</p:sld>
+</file>
+
+<file path=ppt/slides/slide9.xml><?xml version="1.0" encoding="utf-8"?>
+<p:sld xmlns:a="http://schemas.openxmlformats.org/drawingml/2006/main" xmlns:r="http://schemas.openxmlformats.org/officeDocument/2006/relationships" xmlns:p="http://schemas.openxmlformats.org/presentationml/2006/main">
+  <p:cSld>
+    <p:spTree>
+      <p:nvGrpSpPr>
+        <p:cNvPr id="1" name="Shape 109">
+          <a:extLst>
+            <a:ext uri="{FF2B5EF4-FFF2-40B4-BE49-F238E27FC236}">
+              <a16:creationId xmlns:a16="http://schemas.microsoft.com/office/drawing/2014/main" id="{EF99A866-5246-68D6-ED81-EF856D114F73}"/>
+            </a:ext>
+          </a:extLst>
+        </p:cNvPr>
+        <p:cNvGrpSpPr/>
+        <p:nvPr/>
+      </p:nvGrpSpPr>
+      <p:grpSpPr>
+        <a:xfrm>
+          <a:off x="0" y="0"/>
+          <a:ext cx="0" cy="0"/>
+          <a:chOff x="0" y="0"/>
+          <a:chExt cx="0" cy="0"/>
+        </a:xfrm>
+      </p:grpSpPr>
+      <p:sp>
+        <p:nvSpPr>
+          <p:cNvPr id="9" name="Text 3">
+            <a:extLst>
+              <a:ext uri="{FF2B5EF4-FFF2-40B4-BE49-F238E27FC236}">
+                <a16:creationId xmlns:a16="http://schemas.microsoft.com/office/drawing/2014/main" id="{7965ECD2-1EC4-BAFF-AFB2-346F6C2B5FA5}"/>
+              </a:ext>
+            </a:extLst>
+          </p:cNvPr>
+          <p:cNvSpPr/>
+          <p:nvPr/>
+        </p:nvSpPr>
+        <p:spPr>
+          <a:xfrm>
+            <a:off x="1422400" y="502920"/>
+            <a:ext cx="9347200" cy="752856"/>
+          </a:xfrm>
+          <a:prstGeom prst="rect">
+            <a:avLst/>
+          </a:prstGeom>
+          <a:noFill/>
+          <a:ln/>
+        </p:spPr>
+        <p:txBody>
+          <a:bodyPr wrap="square" lIns="0" tIns="0" rIns="0" bIns="0" rtlCol="0" anchor="ctr"/>
+          <a:lstStyle/>
+          <a:p>
+            <a:pPr marL="0" indent="0">
+              <a:buNone/>
+            </a:pPr>
+            <a:r>
+              <a:rPr lang="en-US" sz="4400" b="1" dirty="0">
+                <a:solidFill>
+                  <a:schemeClr val="tx1"/>
+                </a:solidFill>
+                <a:latin typeface="Aptos Display" panose="020B0004020202020204" pitchFamily="34" charset="0"/>
+                <a:ea typeface="DejaVu Sans" pitchFamily="34" charset="-122"/>
+                <a:cs typeface="DejaVu Sans" pitchFamily="34" charset="-120"/>
+              </a:rPr>
+              <a:t>Global Comparisons</a:t>
+            </a:r>
+            <a:endParaRPr lang="en-US" sz="4400" dirty="0">
+              <a:solidFill>
+                <a:schemeClr val="tx1"/>
+              </a:solidFill>
+              <a:latin typeface="Aptos Display" panose="020B0004020202020204" pitchFamily="34" charset="0"/>
+            </a:endParaRPr>
+          </a:p>
+        </p:txBody>
+      </p:sp>
+      <p:sp>
+        <p:nvSpPr>
+          <p:cNvPr id="10" name="Shape 4">
+            <a:extLst>
+              <a:ext uri="{FF2B5EF4-FFF2-40B4-BE49-F238E27FC236}">
+                <a16:creationId xmlns:a16="http://schemas.microsoft.com/office/drawing/2014/main" id="{6CF6F44F-6252-800D-DD7C-8286EA79995C}"/>
+              </a:ext>
+            </a:extLst>
+          </p:cNvPr>
+          <p:cNvSpPr/>
+          <p:nvPr/>
+        </p:nvSpPr>
+        <p:spPr>
+          <a:xfrm>
+            <a:off x="1450848" y="1503680"/>
+            <a:ext cx="4328160" cy="2302256"/>
+          </a:xfrm>
+          <a:prstGeom prst="rect">
+            <a:avLst/>
+          </a:prstGeom>
+          <a:solidFill>
+            <a:srgbClr val="223045"/>
+          </a:solidFill>
+          <a:ln w="15240">
+            <a:solidFill>
+              <a:srgbClr val="2D8B8B"/>
+            </a:solidFill>
+            <a:prstDash val="solid"/>
+          </a:ln>
+          <a:effectLst>
+            <a:outerShdw blurRad="101600" dist="38100" dir="8100000" algn="bl" rotWithShape="0">
+              <a:srgbClr val="000000">
+                <a:alpha val="22000"/>
+              </a:srgbClr>
+            </a:outerShdw>
+          </a:effectLst>
+        </p:spPr>
+      </p:sp>
+      <p:sp>
+        <p:nvSpPr>
+          <p:cNvPr id="11" name="Text 5">
+            <a:extLst>
+              <a:ext uri="{FF2B5EF4-FFF2-40B4-BE49-F238E27FC236}">
+                <a16:creationId xmlns:a16="http://schemas.microsoft.com/office/drawing/2014/main" id="{37E2F747-5C58-10C9-B92A-1EDCD198BCEC}"/>
+              </a:ext>
+            </a:extLst>
+          </p:cNvPr>
+          <p:cNvSpPr/>
+          <p:nvPr/>
+        </p:nvSpPr>
+        <p:spPr>
+          <a:xfrm>
+            <a:off x="1563401" y="1503680"/>
+            <a:ext cx="4114079" cy="441842"/>
+          </a:xfrm>
+          <a:prstGeom prst="rect">
+            <a:avLst/>
+          </a:prstGeom>
+          <a:noFill/>
+          <a:ln/>
+        </p:spPr>
+        <p:txBody>
+          <a:bodyPr wrap="square" rtlCol="0" anchor="ctr"/>
+          <a:lstStyle/>
+          <a:p>
+            <a:pPr marL="0" indent="0">
+              <a:lnSpc>
+                <a:spcPct val="110000"/>
+              </a:lnSpc>
+              <a:buNone/>
+            </a:pPr>
+            <a:r>
+              <a:rPr lang="en-US" sz="1200" b="1" dirty="0">
+                <a:solidFill>
+                  <a:srgbClr val="A8DADC"/>
+                </a:solidFill>
+                <a:latin typeface="Aptos Display" panose="020B0004020202020204" pitchFamily="34" charset="0"/>
+                <a:ea typeface="DejaVu Sans" pitchFamily="34" charset="-122"/>
+                <a:cs typeface="DejaVu Sans" pitchFamily="34" charset="-120"/>
+              </a:rPr>
+              <a:t>Top 10 by Population &amp; Emissions</a:t>
+            </a:r>
+            <a:endParaRPr lang="en-US" sz="1200" dirty="0">
+              <a:latin typeface="Aptos Display" panose="020B0004020202020204" pitchFamily="34" charset="0"/>
+            </a:endParaRPr>
+          </a:p>
+        </p:txBody>
+      </p:sp>
+      <p:sp>
+        <p:nvSpPr>
+          <p:cNvPr id="12" name="Shape 6">
+            <a:extLst>
+              <a:ext uri="{FF2B5EF4-FFF2-40B4-BE49-F238E27FC236}">
+                <a16:creationId xmlns:a16="http://schemas.microsoft.com/office/drawing/2014/main" id="{71A95515-1237-2501-F78D-CFA846CED006}"/>
+              </a:ext>
+            </a:extLst>
+          </p:cNvPr>
+          <p:cNvSpPr/>
+          <p:nvPr/>
+        </p:nvSpPr>
+        <p:spPr>
+          <a:xfrm>
+            <a:off x="1560575" y="1936821"/>
+            <a:ext cx="4114079" cy="1783218"/>
+          </a:xfrm>
+          <a:prstGeom prst="rect">
+            <a:avLst/>
+          </a:prstGeom>
+          <a:solidFill>
+            <a:srgbClr val="172030"/>
+          </a:solidFill>
+          <a:ln w="6350">
+            <a:solidFill>
+              <a:srgbClr val="7AA5B0"/>
+            </a:solidFill>
+            <a:prstDash val="solid"/>
+          </a:ln>
+        </p:spPr>
+      </p:sp>
+      <p:sp>
+        <p:nvSpPr>
+          <p:cNvPr id="13" name="Text 7">
+            <a:extLst>
+              <a:ext uri="{FF2B5EF4-FFF2-40B4-BE49-F238E27FC236}">
+                <a16:creationId xmlns:a16="http://schemas.microsoft.com/office/drawing/2014/main" id="{938C6960-17F6-90EC-E3FF-056B64719139}"/>
+              </a:ext>
+            </a:extLst>
+          </p:cNvPr>
+          <p:cNvSpPr/>
+          <p:nvPr/>
+        </p:nvSpPr>
+        <p:spPr>
+          <a:xfrm>
+            <a:off x="1564345" y="1936820"/>
+            <a:ext cx="4104657" cy="1783217"/>
+          </a:xfrm>
+          <a:prstGeom prst="rect">
+            <a:avLst/>
+          </a:prstGeom>
+          <a:solidFill>
+            <a:srgbClr val="172030"/>
+          </a:solidFill>
+          <a:ln>
+            <a:solidFill>
+              <a:srgbClr val="8BB4BA"/>
+            </a:solidFill>
+          </a:ln>
+        </p:spPr>
+        <p:txBody>
+          <a:bodyPr wrap="square" rtlCol="0" anchor="ctr"/>
+          <a:lstStyle/>
+          <a:p>
+            <a:pPr marL="0" indent="0">
+              <a:lnSpc>
+                <a:spcPct val="125000"/>
+              </a:lnSpc>
+              <a:buNone/>
+            </a:pPr>
+            <a:r>
+              <a:rPr lang="en-US" sz="1100" dirty="0">
+                <a:solidFill>
+                  <a:srgbClr val="A8DADC"/>
+                </a:solidFill>
+                <a:latin typeface="Aptos Display" panose="020B0004020202020204" pitchFamily="34" charset="0"/>
+                <a:ea typeface="Courier New" pitchFamily="34" charset="-122"/>
+                <a:cs typeface="Courier New" pitchFamily="34" charset="-120"/>
+              </a:rPr>
+              <a:t>SELECT p.countries, p.Value AS pop,</a:t>
+            </a:r>
+            <a:endParaRPr lang="en-US" sz="1100" dirty="0">
+              <a:solidFill>
+                <a:srgbClr val="A8DADC"/>
+              </a:solidFill>
+              <a:latin typeface="Aptos Display" panose="020B0004020202020204" pitchFamily="34" charset="0"/>
+            </a:endParaRPr>
+          </a:p>
+          <a:p>
+            <a:pPr marL="0" indent="0">
+              <a:lnSpc>
+                <a:spcPct val="125000"/>
+              </a:lnSpc>
+              <a:buNone/>
+            </a:pPr>
+            <a:r>
+              <a:rPr lang="en-US" sz="1100" dirty="0">
+                <a:solidFill>
+                  <a:srgbClr val="A8DADC"/>
+                </a:solidFill>
+                <a:latin typeface="Aptos Display" panose="020B0004020202020204" pitchFamily="34" charset="0"/>
+                <a:ea typeface="Courier New" pitchFamily="34" charset="-122"/>
+                <a:cs typeface="Courier New" pitchFamily="34" charset="-120"/>
+              </a:rPr>
+              <a:t>  SUM(e.emission) AS total_emission</a:t>
+            </a:r>
+            <a:endParaRPr lang="en-US" sz="1100" dirty="0">
+              <a:solidFill>
+                <a:srgbClr val="A8DADC"/>
+              </a:solidFill>
+              <a:latin typeface="Aptos Display" panose="020B0004020202020204" pitchFamily="34" charset="0"/>
+            </a:endParaRPr>
+          </a:p>
+          <a:p>
+            <a:pPr marL="0" indent="0">
+              <a:lnSpc>
+                <a:spcPct val="125000"/>
+              </a:lnSpc>
+              <a:buNone/>
+            </a:pPr>
+            <a:r>
+              <a:rPr lang="en-US" sz="1100" dirty="0">
+                <a:solidFill>
+                  <a:srgbClr val="A8DADC"/>
+                </a:solidFill>
+                <a:latin typeface="Aptos Display" panose="020B0004020202020204" pitchFamily="34" charset="0"/>
+                <a:ea typeface="Courier New" pitchFamily="34" charset="-122"/>
+                <a:cs typeface="Courier New" pitchFamily="34" charset="-120"/>
+              </a:rPr>
+              <a:t>FROM population p</a:t>
+            </a:r>
+            <a:endParaRPr lang="en-US" sz="1100" dirty="0">
+              <a:solidFill>
+                <a:srgbClr val="A8DADC"/>
+              </a:solidFill>
+              <a:latin typeface="Aptos Display" panose="020B0004020202020204" pitchFamily="34" charset="0"/>
+            </a:endParaRPr>
+          </a:p>
+          <a:p>
+            <a:pPr marL="0" indent="0">
+              <a:lnSpc>
+                <a:spcPct val="125000"/>
+              </a:lnSpc>
+              <a:buNone/>
+            </a:pPr>
+            <a:r>
+              <a:rPr lang="en-US" sz="1100" dirty="0">
+                <a:solidFill>
+                  <a:srgbClr val="A8DADC"/>
+                </a:solidFill>
+                <a:latin typeface="Aptos Display" panose="020B0004020202020204" pitchFamily="34" charset="0"/>
+                <a:ea typeface="Courier New" pitchFamily="34" charset="-122"/>
+                <a:cs typeface="Courier New" pitchFamily="34" charset="-120"/>
+              </a:rPr>
+              <a:t>JOIN emission_3 e ON p.countries=e.country</a:t>
+            </a:r>
+            <a:endParaRPr lang="en-US" sz="1100" dirty="0">
+              <a:solidFill>
+                <a:srgbClr val="A8DADC"/>
+              </a:solidFill>
+              <a:latin typeface="Aptos Display" panose="020B0004020202020204" pitchFamily="34" charset="0"/>
+            </a:endParaRPr>
+          </a:p>
+          <a:p>
+            <a:pPr marL="0" indent="0">
+              <a:lnSpc>
+                <a:spcPct val="125000"/>
+              </a:lnSpc>
+              <a:buNone/>
+            </a:pPr>
+            <a:r>
+              <a:rPr lang="en-US" sz="1100" dirty="0">
+                <a:solidFill>
+                  <a:srgbClr val="A8DADC"/>
+                </a:solidFill>
+                <a:latin typeface="Aptos Display" panose="020B0004020202020204" pitchFamily="34" charset="0"/>
+                <a:ea typeface="Courier New" pitchFamily="34" charset="-122"/>
+                <a:cs typeface="Courier New" pitchFamily="34" charset="-120"/>
+              </a:rPr>
+              <a:t>  AND p.year=e.year</a:t>
+            </a:r>
+            <a:endParaRPr lang="en-US" sz="1100" dirty="0">
+              <a:solidFill>
+                <a:srgbClr val="A8DADC"/>
+              </a:solidFill>
+              <a:latin typeface="Aptos Display" panose="020B0004020202020204" pitchFamily="34" charset="0"/>
+            </a:endParaRPr>
+          </a:p>
+          <a:p>
+            <a:pPr marL="0" indent="0">
+              <a:lnSpc>
+                <a:spcPct val="125000"/>
+              </a:lnSpc>
+              <a:buNone/>
+            </a:pPr>
+            <a:r>
+              <a:rPr lang="en-US" sz="1100" dirty="0">
+                <a:solidFill>
+                  <a:srgbClr val="A8DADC"/>
+                </a:solidFill>
+                <a:latin typeface="Aptos Display" panose="020B0004020202020204" pitchFamily="34" charset="0"/>
+                <a:ea typeface="Courier New" pitchFamily="34" charset="-122"/>
+                <a:cs typeface="Courier New" pitchFamily="34" charset="-120"/>
+              </a:rPr>
+              <a:t>WHERE p.year=(SELECT MAX(year) FROM population)</a:t>
+            </a:r>
+            <a:endParaRPr lang="en-US" sz="1100" dirty="0">
+              <a:solidFill>
+                <a:srgbClr val="A8DADC"/>
+              </a:solidFill>
+              <a:latin typeface="Aptos Display" panose="020B0004020202020204" pitchFamily="34" charset="0"/>
+            </a:endParaRPr>
+          </a:p>
+          <a:p>
+            <a:pPr marL="0" indent="0">
+              <a:lnSpc>
+                <a:spcPct val="125000"/>
+              </a:lnSpc>
+              <a:buNone/>
+            </a:pPr>
+            <a:r>
+              <a:rPr lang="en-US" sz="1100" dirty="0">
+                <a:solidFill>
+                  <a:srgbClr val="A8DADC"/>
+                </a:solidFill>
+                <a:latin typeface="Aptos Display" panose="020B0004020202020204" pitchFamily="34" charset="0"/>
+                <a:ea typeface="Courier New" pitchFamily="34" charset="-122"/>
+                <a:cs typeface="Courier New" pitchFamily="34" charset="-120"/>
+              </a:rPr>
+              <a:t>GROUP BY p.countries, p.Value</a:t>
+            </a:r>
+            <a:endParaRPr lang="en-US" sz="1100" dirty="0">
+              <a:solidFill>
+                <a:srgbClr val="A8DADC"/>
+              </a:solidFill>
+              <a:latin typeface="Aptos Display" panose="020B0004020202020204" pitchFamily="34" charset="0"/>
+            </a:endParaRPr>
+          </a:p>
+          <a:p>
+            <a:pPr marL="0" indent="0">
+              <a:lnSpc>
+                <a:spcPct val="125000"/>
+              </a:lnSpc>
+              <a:buNone/>
+            </a:pPr>
+            <a:r>
+              <a:rPr lang="en-US" sz="1100" dirty="0">
+                <a:solidFill>
+                  <a:srgbClr val="A8DADC"/>
+                </a:solidFill>
+                <a:latin typeface="Aptos Display" panose="020B0004020202020204" pitchFamily="34" charset="0"/>
+                <a:ea typeface="Courier New" pitchFamily="34" charset="-122"/>
+                <a:cs typeface="Courier New" pitchFamily="34" charset="-120"/>
+              </a:rPr>
+              <a:t>ORDER BY pop DESC LIMIT 10;</a:t>
+            </a:r>
+            <a:endParaRPr lang="en-US" sz="1100" dirty="0">
+              <a:solidFill>
+                <a:srgbClr val="A8DADC"/>
+              </a:solidFill>
+              <a:latin typeface="Aptos Display" panose="020B0004020202020204" pitchFamily="34" charset="0"/>
+            </a:endParaRPr>
+          </a:p>
+        </p:txBody>
+      </p:sp>
+      <p:sp>
+        <p:nvSpPr>
+          <p:cNvPr id="14" name="Shape 8">
+            <a:extLst>
+              <a:ext uri="{FF2B5EF4-FFF2-40B4-BE49-F238E27FC236}">
+                <a16:creationId xmlns:a16="http://schemas.microsoft.com/office/drawing/2014/main" id="{656E3C18-721E-5149-19F0-40EB57798A35}"/>
+              </a:ext>
+            </a:extLst>
+          </p:cNvPr>
+          <p:cNvSpPr/>
+          <p:nvPr/>
+        </p:nvSpPr>
+        <p:spPr>
+          <a:xfrm>
+            <a:off x="6469890" y="1503680"/>
+            <a:ext cx="4299710" cy="2302256"/>
+          </a:xfrm>
+          <a:prstGeom prst="rect">
+            <a:avLst/>
+          </a:prstGeom>
+          <a:solidFill>
+            <a:srgbClr val="223045"/>
+          </a:solidFill>
+          <a:ln w="15240">
+            <a:solidFill>
+              <a:srgbClr val="2D8B8B"/>
+            </a:solidFill>
+            <a:prstDash val="solid"/>
+          </a:ln>
+          <a:effectLst>
+            <a:outerShdw blurRad="101600" dist="38100" dir="8100000" algn="bl" rotWithShape="0">
+              <a:srgbClr val="000000">
+                <a:alpha val="22000"/>
+              </a:srgbClr>
+            </a:outerShdw>
+          </a:effectLst>
+        </p:spPr>
+      </p:sp>
+      <p:sp>
+        <p:nvSpPr>
+          <p:cNvPr id="15" name="Text 9">
+            <a:extLst>
+              <a:ext uri="{FF2B5EF4-FFF2-40B4-BE49-F238E27FC236}">
+                <a16:creationId xmlns:a16="http://schemas.microsoft.com/office/drawing/2014/main" id="{B6DA13B9-E827-B6C7-C077-5D08483680D6}"/>
+              </a:ext>
+            </a:extLst>
+          </p:cNvPr>
+          <p:cNvSpPr/>
+          <p:nvPr/>
+        </p:nvSpPr>
+        <p:spPr>
+          <a:xfrm>
+            <a:off x="6570196" y="1503680"/>
+            <a:ext cx="4087036" cy="433138"/>
+          </a:xfrm>
+          <a:prstGeom prst="rect">
+            <a:avLst/>
+          </a:prstGeom>
+          <a:noFill/>
+          <a:ln/>
+        </p:spPr>
+        <p:txBody>
+          <a:bodyPr wrap="square" rtlCol="0" anchor="ctr"/>
+          <a:lstStyle/>
+          <a:p>
+            <a:pPr marL="0" indent="0">
+              <a:lnSpc>
+                <a:spcPct val="110000"/>
+              </a:lnSpc>
+              <a:buNone/>
+            </a:pPr>
+            <a:r>
+              <a:rPr lang="en-US" sz="1200" b="1" dirty="0">
+                <a:solidFill>
+                  <a:srgbClr val="A8DADC"/>
+                </a:solidFill>
+                <a:latin typeface="Aptos Display" panose="020B0004020202020204" pitchFamily="34" charset="0"/>
+                <a:ea typeface="DejaVu Sans" pitchFamily="34" charset="-122"/>
+                <a:cs typeface="DejaVu Sans" pitchFamily="34" charset="-120"/>
+              </a:rPr>
+              <a:t>Countries That Reduced Per-Capita Emissions Most</a:t>
+            </a:r>
+            <a:endParaRPr lang="en-US" sz="1200" dirty="0">
+              <a:latin typeface="Aptos Display" panose="020B0004020202020204" pitchFamily="34" charset="0"/>
+            </a:endParaRPr>
+          </a:p>
+        </p:txBody>
+      </p:sp>
+      <p:sp>
+        <p:nvSpPr>
+          <p:cNvPr id="16" name="Shape 10">
+            <a:extLst>
+              <a:ext uri="{FF2B5EF4-FFF2-40B4-BE49-F238E27FC236}">
+                <a16:creationId xmlns:a16="http://schemas.microsoft.com/office/drawing/2014/main" id="{CDE4F3F0-C6A4-451D-3A72-24364CC8CAC5}"/>
+              </a:ext>
+            </a:extLst>
+          </p:cNvPr>
+          <p:cNvSpPr/>
+          <p:nvPr/>
+        </p:nvSpPr>
+        <p:spPr>
+          <a:xfrm>
+            <a:off x="6581980" y="1936819"/>
+            <a:ext cx="4087036" cy="1783220"/>
+          </a:xfrm>
+          <a:prstGeom prst="rect">
+            <a:avLst/>
+          </a:prstGeom>
+          <a:solidFill>
+            <a:srgbClr val="172030"/>
+          </a:solidFill>
+          <a:ln w="6350">
+            <a:solidFill>
+              <a:srgbClr val="7AA5B0"/>
+            </a:solidFill>
+            <a:prstDash val="solid"/>
+          </a:ln>
+        </p:spPr>
+      </p:sp>
+      <p:sp>
+        <p:nvSpPr>
+          <p:cNvPr id="17" name="Text 11">
+            <a:extLst>
+              <a:ext uri="{FF2B5EF4-FFF2-40B4-BE49-F238E27FC236}">
+                <a16:creationId xmlns:a16="http://schemas.microsoft.com/office/drawing/2014/main" id="{A0FFF0A8-E0A8-9EE3-E113-7460837EDDC7}"/>
+              </a:ext>
+            </a:extLst>
+          </p:cNvPr>
+          <p:cNvSpPr/>
+          <p:nvPr/>
+        </p:nvSpPr>
+        <p:spPr>
+          <a:xfrm>
+            <a:off x="6579618" y="1936820"/>
+            <a:ext cx="4077614" cy="1783217"/>
+          </a:xfrm>
+          <a:prstGeom prst="rect">
+            <a:avLst/>
+          </a:prstGeom>
+          <a:noFill/>
+          <a:ln/>
+        </p:spPr>
+        <p:txBody>
+          <a:bodyPr wrap="square" rtlCol="0" anchor="ctr"/>
+          <a:lstStyle/>
+          <a:p>
+            <a:pPr marL="0" indent="0">
+              <a:lnSpc>
+                <a:spcPct val="125000"/>
+              </a:lnSpc>
+              <a:buNone/>
+            </a:pPr>
+            <a:r>
+              <a:rPr lang="en-US" sz="1050" dirty="0">
+                <a:solidFill>
+                  <a:srgbClr val="A8DADC"/>
+                </a:solidFill>
+                <a:latin typeface="Aptos Display" panose="020B0004020202020204" pitchFamily="34" charset="0"/>
+                <a:ea typeface="Courier New" pitchFamily="34" charset="-122"/>
+                <a:cs typeface="Courier New" pitchFamily="34" charset="-120"/>
+              </a:rPr>
+              <a:t>SELECT country,</a:t>
+            </a:r>
+            <a:endParaRPr lang="en-US" sz="1050" dirty="0">
+              <a:latin typeface="Aptos Display" panose="020B0004020202020204" pitchFamily="34" charset="0"/>
+            </a:endParaRPr>
+          </a:p>
+          <a:p>
+            <a:pPr marL="0" indent="0">
+              <a:lnSpc>
+                <a:spcPct val="125000"/>
+              </a:lnSpc>
+              <a:buNone/>
+            </a:pPr>
+            <a:r>
+              <a:rPr lang="en-US" sz="1050" dirty="0">
+                <a:solidFill>
+                  <a:srgbClr val="A8DADC"/>
+                </a:solidFill>
+                <a:latin typeface="Aptos Display" panose="020B0004020202020204" pitchFamily="34" charset="0"/>
+                <a:ea typeface="Courier New" pitchFamily="34" charset="-122"/>
+                <a:cs typeface="Courier New" pitchFamily="34" charset="-120"/>
+              </a:rPr>
+              <a:t>  MIN(per_capita_emission) AS earliest,</a:t>
+            </a:r>
+            <a:endParaRPr lang="en-US" sz="1050" dirty="0">
+              <a:latin typeface="Aptos Display" panose="020B0004020202020204" pitchFamily="34" charset="0"/>
+            </a:endParaRPr>
+          </a:p>
+          <a:p>
+            <a:pPr marL="0" indent="0">
+              <a:lnSpc>
+                <a:spcPct val="125000"/>
+              </a:lnSpc>
+              <a:buNone/>
+            </a:pPr>
+            <a:r>
+              <a:rPr lang="en-US" sz="1050" dirty="0">
+                <a:solidFill>
+                  <a:srgbClr val="A8DADC"/>
+                </a:solidFill>
+                <a:latin typeface="Aptos Display" panose="020B0004020202020204" pitchFamily="34" charset="0"/>
+                <a:ea typeface="Courier New" pitchFamily="34" charset="-122"/>
+                <a:cs typeface="Courier New" pitchFamily="34" charset="-120"/>
+              </a:rPr>
+              <a:t>  MAX(per_capita_emission) AS latest,</a:t>
+            </a:r>
+            <a:endParaRPr lang="en-US" sz="1050" dirty="0">
+              <a:latin typeface="Aptos Display" panose="020B0004020202020204" pitchFamily="34" charset="0"/>
+            </a:endParaRPr>
+          </a:p>
+          <a:p>
+            <a:pPr marL="0" indent="0">
+              <a:lnSpc>
+                <a:spcPct val="125000"/>
+              </a:lnSpc>
+              <a:buNone/>
+            </a:pPr>
+            <a:r>
+              <a:rPr lang="en-US" sz="1050" dirty="0">
+                <a:solidFill>
+                  <a:srgbClr val="A8DADC"/>
+                </a:solidFill>
+                <a:latin typeface="Aptos Display" panose="020B0004020202020204" pitchFamily="34" charset="0"/>
+                <a:ea typeface="Courier New" pitchFamily="34" charset="-122"/>
+                <a:cs typeface="Courier New" pitchFamily="34" charset="-120"/>
+              </a:rPr>
+              <a:t>  MIN - MAX AS reduction</a:t>
+            </a:r>
+            <a:endParaRPr lang="en-US" sz="1050" dirty="0">
+              <a:latin typeface="Aptos Display" panose="020B0004020202020204" pitchFamily="34" charset="0"/>
+            </a:endParaRPr>
+          </a:p>
+          <a:p>
+            <a:pPr marL="0" indent="0">
+              <a:lnSpc>
+                <a:spcPct val="125000"/>
+              </a:lnSpc>
+              <a:buNone/>
+            </a:pPr>
+            <a:r>
+              <a:rPr lang="en-US" sz="1050" dirty="0">
+                <a:solidFill>
+                  <a:srgbClr val="A8DADC"/>
+                </a:solidFill>
+                <a:latin typeface="Aptos Display" panose="020B0004020202020204" pitchFamily="34" charset="0"/>
+                <a:ea typeface="Courier New" pitchFamily="34" charset="-122"/>
+                <a:cs typeface="Courier New" pitchFamily="34" charset="-120"/>
+              </a:rPr>
+              <a:t>FROM emission_3</a:t>
+            </a:r>
+            <a:endParaRPr lang="en-US" sz="1050" dirty="0">
+              <a:latin typeface="Aptos Display" panose="020B0004020202020204" pitchFamily="34" charset="0"/>
+            </a:endParaRPr>
+          </a:p>
+          <a:p>
+            <a:pPr marL="0" indent="0">
+              <a:lnSpc>
+                <a:spcPct val="125000"/>
+              </a:lnSpc>
+              <a:buNone/>
+            </a:pPr>
+            <a:r>
+              <a:rPr lang="en-US" sz="1050" dirty="0">
+                <a:solidFill>
+                  <a:srgbClr val="A8DADC"/>
+                </a:solidFill>
+                <a:latin typeface="Aptos Display" panose="020B0004020202020204" pitchFamily="34" charset="0"/>
+                <a:ea typeface="Courier New" pitchFamily="34" charset="-122"/>
+                <a:cs typeface="Courier New" pitchFamily="34" charset="-120"/>
+              </a:rPr>
+              <a:t>WHERE year &gt;= (SELECT MAX(year)...) - 10</a:t>
+            </a:r>
+            <a:endParaRPr lang="en-US" sz="1050" dirty="0">
+              <a:latin typeface="Aptos Display" panose="020B0004020202020204" pitchFamily="34" charset="0"/>
+            </a:endParaRPr>
+          </a:p>
+          <a:p>
+            <a:pPr marL="0" indent="0">
+              <a:lnSpc>
+                <a:spcPct val="125000"/>
+              </a:lnSpc>
+              <a:buNone/>
+            </a:pPr>
+            <a:r>
+              <a:rPr lang="en-US" sz="1050" dirty="0">
+                <a:solidFill>
+                  <a:srgbClr val="A8DADC"/>
+                </a:solidFill>
+                <a:latin typeface="Aptos Display" panose="020B0004020202020204" pitchFamily="34" charset="0"/>
+                <a:ea typeface="Courier New" pitchFamily="34" charset="-122"/>
+                <a:cs typeface="Courier New" pitchFamily="34" charset="-120"/>
+              </a:rPr>
+              <a:t>GROUP BY country</a:t>
+            </a:r>
+            <a:endParaRPr lang="en-US" sz="1050" dirty="0">
+              <a:latin typeface="Aptos Display" panose="020B0004020202020204" pitchFamily="34" charset="0"/>
+            </a:endParaRPr>
+          </a:p>
+          <a:p>
+            <a:pPr marL="0" indent="0">
+              <a:lnSpc>
+                <a:spcPct val="125000"/>
+              </a:lnSpc>
+              <a:buNone/>
+            </a:pPr>
+            <a:r>
+              <a:rPr lang="en-US" sz="1050" dirty="0">
+                <a:solidFill>
+                  <a:srgbClr val="A8DADC"/>
+                </a:solidFill>
+                <a:latin typeface="Aptos Display" panose="020B0004020202020204" pitchFamily="34" charset="0"/>
+                <a:ea typeface="Courier New" pitchFamily="34" charset="-122"/>
+                <a:cs typeface="Courier New" pitchFamily="34" charset="-120"/>
+              </a:rPr>
+              <a:t>HAVING reduction &gt; 0</a:t>
+            </a:r>
+            <a:endParaRPr lang="en-US" sz="1050" dirty="0">
+              <a:latin typeface="Aptos Display" panose="020B0004020202020204" pitchFamily="34" charset="0"/>
+            </a:endParaRPr>
+          </a:p>
+          <a:p>
+            <a:pPr marL="0" indent="0">
+              <a:lnSpc>
+                <a:spcPct val="125000"/>
+              </a:lnSpc>
+              <a:buNone/>
+            </a:pPr>
+            <a:r>
+              <a:rPr lang="en-US" sz="1050" dirty="0">
+                <a:solidFill>
+                  <a:srgbClr val="A8DADC"/>
+                </a:solidFill>
+                <a:latin typeface="Aptos Display" panose="020B0004020202020204" pitchFamily="34" charset="0"/>
+                <a:ea typeface="Courier New" pitchFamily="34" charset="-122"/>
+                <a:cs typeface="Courier New" pitchFamily="34" charset="-120"/>
+              </a:rPr>
+              <a:t>ORDER BY reduction DESC LIMIT 10;</a:t>
+            </a:r>
+            <a:endParaRPr lang="en-US" sz="1050" dirty="0">
+              <a:latin typeface="Aptos Display" panose="020B0004020202020204" pitchFamily="34" charset="0"/>
+            </a:endParaRPr>
+          </a:p>
+        </p:txBody>
+      </p:sp>
+      <p:sp>
+        <p:nvSpPr>
+          <p:cNvPr id="18" name="Shape 12">
+            <a:extLst>
+              <a:ext uri="{FF2B5EF4-FFF2-40B4-BE49-F238E27FC236}">
+                <a16:creationId xmlns:a16="http://schemas.microsoft.com/office/drawing/2014/main" id="{21D762AE-5EB7-913A-ABF6-B62002AF41A3}"/>
+              </a:ext>
+            </a:extLst>
+          </p:cNvPr>
+          <p:cNvSpPr/>
+          <p:nvPr/>
+        </p:nvSpPr>
+        <p:spPr>
+          <a:xfrm>
+            <a:off x="1450848" y="3927084"/>
+            <a:ext cx="4328160" cy="2302254"/>
+          </a:xfrm>
+          <a:prstGeom prst="rect">
+            <a:avLst/>
+          </a:prstGeom>
+          <a:solidFill>
+            <a:srgbClr val="223045"/>
+          </a:solidFill>
+          <a:ln w="15240">
+            <a:solidFill>
+              <a:srgbClr val="2D8B8B"/>
+            </a:solidFill>
+            <a:prstDash val="solid"/>
+          </a:ln>
+          <a:effectLst>
+            <a:outerShdw blurRad="101600" dist="38100" dir="8100000" algn="bl" rotWithShape="0">
+              <a:srgbClr val="000000">
+                <a:alpha val="22000"/>
+              </a:srgbClr>
+            </a:outerShdw>
+          </a:effectLst>
+        </p:spPr>
+      </p:sp>
+      <p:sp>
+        <p:nvSpPr>
+          <p:cNvPr id="19" name="Text 13">
+            <a:extLst>
+              <a:ext uri="{FF2B5EF4-FFF2-40B4-BE49-F238E27FC236}">
+                <a16:creationId xmlns:a16="http://schemas.microsoft.com/office/drawing/2014/main" id="{CB7EB52E-7F5A-359A-7BF9-5304EF6DC028}"/>
+              </a:ext>
+            </a:extLst>
+          </p:cNvPr>
+          <p:cNvSpPr/>
+          <p:nvPr/>
+        </p:nvSpPr>
+        <p:spPr>
+          <a:xfrm>
+            <a:off x="1554923" y="3948999"/>
+            <a:ext cx="4114079" cy="375087"/>
+          </a:xfrm>
+          <a:prstGeom prst="rect">
+            <a:avLst/>
+          </a:prstGeom>
+          <a:noFill/>
+          <a:ln/>
+        </p:spPr>
+        <p:txBody>
+          <a:bodyPr wrap="square" rtlCol="0" anchor="ctr"/>
+          <a:lstStyle/>
+          <a:p>
+            <a:pPr marL="0" indent="0">
+              <a:lnSpc>
+                <a:spcPct val="110000"/>
+              </a:lnSpc>
+              <a:buNone/>
+            </a:pPr>
+            <a:r>
+              <a:rPr lang="en-US" sz="1200" b="1" dirty="0">
+                <a:solidFill>
+                  <a:srgbClr val="A8DADC"/>
+                </a:solidFill>
+                <a:latin typeface="Aptos Display" panose="020B0004020202020204" pitchFamily="34" charset="0"/>
+                <a:ea typeface="DejaVu Sans" pitchFamily="34" charset="-122"/>
+                <a:cs typeface="DejaVu Sans" pitchFamily="34" charset="-120"/>
+              </a:rPr>
+              <a:t>Global Emission Share (%) by Country</a:t>
+            </a:r>
+            <a:endParaRPr lang="en-US" sz="1200" dirty="0">
+              <a:latin typeface="Aptos Display" panose="020B0004020202020204" pitchFamily="34" charset="0"/>
+            </a:endParaRPr>
+          </a:p>
+        </p:txBody>
+      </p:sp>
+      <p:sp>
+        <p:nvSpPr>
+          <p:cNvPr id="20" name="Shape 14">
+            <a:extLst>
+              <a:ext uri="{FF2B5EF4-FFF2-40B4-BE49-F238E27FC236}">
+                <a16:creationId xmlns:a16="http://schemas.microsoft.com/office/drawing/2014/main" id="{E7BC85C0-E135-E91A-50EF-EE57F1D0CCC8}"/>
+              </a:ext>
+            </a:extLst>
+          </p:cNvPr>
+          <p:cNvSpPr/>
+          <p:nvPr/>
+        </p:nvSpPr>
+        <p:spPr>
+          <a:xfrm>
+            <a:off x="1564345" y="4324086"/>
+            <a:ext cx="4114079" cy="1793493"/>
+          </a:xfrm>
+          <a:prstGeom prst="rect">
+            <a:avLst/>
+          </a:prstGeom>
+          <a:solidFill>
+            <a:srgbClr val="172030"/>
+          </a:solidFill>
+          <a:ln w="6350">
+            <a:solidFill>
+              <a:srgbClr val="7AA5B0"/>
+            </a:solidFill>
+            <a:prstDash val="solid"/>
+          </a:ln>
+        </p:spPr>
+      </p:sp>
+      <p:sp>
+        <p:nvSpPr>
+          <p:cNvPr id="21" name="Text 15">
+            <a:extLst>
+              <a:ext uri="{FF2B5EF4-FFF2-40B4-BE49-F238E27FC236}">
+                <a16:creationId xmlns:a16="http://schemas.microsoft.com/office/drawing/2014/main" id="{D62693C2-D329-AB14-866A-ED745776A2BF}"/>
+              </a:ext>
+            </a:extLst>
+          </p:cNvPr>
+          <p:cNvSpPr/>
+          <p:nvPr/>
+        </p:nvSpPr>
+        <p:spPr>
+          <a:xfrm>
+            <a:off x="1554923" y="4324086"/>
+            <a:ext cx="4123501" cy="1793493"/>
+          </a:xfrm>
+          <a:prstGeom prst="rect">
+            <a:avLst/>
+          </a:prstGeom>
+          <a:noFill/>
+          <a:ln/>
+        </p:spPr>
+        <p:txBody>
+          <a:bodyPr wrap="square" rtlCol="0" anchor="ctr"/>
+          <a:lstStyle/>
+          <a:p>
+            <a:pPr marL="0" indent="0">
+              <a:lnSpc>
+                <a:spcPct val="125000"/>
+              </a:lnSpc>
+              <a:buNone/>
+            </a:pPr>
+            <a:r>
+              <a:rPr lang="en-US" sz="1050" dirty="0">
+                <a:solidFill>
+                  <a:srgbClr val="A8DADC"/>
+                </a:solidFill>
+                <a:latin typeface="Aptos Display" panose="020B0004020202020204" pitchFamily="34" charset="0"/>
+                <a:ea typeface="Courier New" pitchFamily="34" charset="-122"/>
+                <a:cs typeface="Courier New" pitchFamily="34" charset="-120"/>
+              </a:rPr>
+              <a:t>SELECT country,</a:t>
+            </a:r>
+            <a:endParaRPr lang="en-US" sz="1050" dirty="0">
+              <a:latin typeface="Aptos Display" panose="020B0004020202020204" pitchFamily="34" charset="0"/>
+            </a:endParaRPr>
+          </a:p>
+          <a:p>
+            <a:pPr marL="0" indent="0">
+              <a:lnSpc>
+                <a:spcPct val="125000"/>
+              </a:lnSpc>
+              <a:buNone/>
+            </a:pPr>
+            <a:r>
+              <a:rPr lang="en-US" sz="1050" dirty="0">
+                <a:solidFill>
+                  <a:srgbClr val="A8DADC"/>
+                </a:solidFill>
+                <a:latin typeface="Aptos Display" panose="020B0004020202020204" pitchFamily="34" charset="0"/>
+                <a:ea typeface="Courier New" pitchFamily="34" charset="-122"/>
+                <a:cs typeface="Courier New" pitchFamily="34" charset="-120"/>
+              </a:rPr>
+              <a:t>  SUM(emission),</a:t>
+            </a:r>
+            <a:endParaRPr lang="en-US" sz="1050" dirty="0">
+              <a:latin typeface="Aptos Display" panose="020B0004020202020204" pitchFamily="34" charset="0"/>
+            </a:endParaRPr>
+          </a:p>
+          <a:p>
+            <a:pPr marL="0" indent="0">
+              <a:lnSpc>
+                <a:spcPct val="125000"/>
+              </a:lnSpc>
+              <a:buNone/>
+            </a:pPr>
+            <a:r>
+              <a:rPr lang="en-US" sz="1050" dirty="0">
+                <a:solidFill>
+                  <a:srgbClr val="A8DADC"/>
+                </a:solidFill>
+                <a:latin typeface="Aptos Display" panose="020B0004020202020204" pitchFamily="34" charset="0"/>
+                <a:ea typeface="Courier New" pitchFamily="34" charset="-122"/>
+                <a:cs typeface="Courier New" pitchFamily="34" charset="-120"/>
+              </a:rPr>
+              <a:t>  ROUND(</a:t>
+            </a:r>
+            <a:endParaRPr lang="en-US" sz="1050" dirty="0">
+              <a:latin typeface="Aptos Display" panose="020B0004020202020204" pitchFamily="34" charset="0"/>
+            </a:endParaRPr>
+          </a:p>
+          <a:p>
+            <a:pPr marL="0" indent="0">
+              <a:lnSpc>
+                <a:spcPct val="125000"/>
+              </a:lnSpc>
+              <a:buNone/>
+            </a:pPr>
+            <a:r>
+              <a:rPr lang="en-US" sz="1050" dirty="0">
+                <a:solidFill>
+                  <a:srgbClr val="A8DADC"/>
+                </a:solidFill>
+                <a:latin typeface="Aptos Display" panose="020B0004020202020204" pitchFamily="34" charset="0"/>
+                <a:ea typeface="Courier New" pitchFamily="34" charset="-122"/>
+                <a:cs typeface="Courier New" pitchFamily="34" charset="-120"/>
+              </a:rPr>
+              <a:t>    SUM(emission)*100.0 /</a:t>
+            </a:r>
+            <a:endParaRPr lang="en-US" sz="1050" dirty="0">
+              <a:latin typeface="Aptos Display" panose="020B0004020202020204" pitchFamily="34" charset="0"/>
+            </a:endParaRPr>
+          </a:p>
+          <a:p>
+            <a:pPr marL="0" indent="0">
+              <a:lnSpc>
+                <a:spcPct val="125000"/>
+              </a:lnSpc>
+              <a:buNone/>
+            </a:pPr>
+            <a:r>
+              <a:rPr lang="en-US" sz="1050" dirty="0">
+                <a:solidFill>
+                  <a:srgbClr val="A8DADC"/>
+                </a:solidFill>
+                <a:latin typeface="Aptos Display" panose="020B0004020202020204" pitchFamily="34" charset="0"/>
+                <a:ea typeface="Courier New" pitchFamily="34" charset="-122"/>
+                <a:cs typeface="Courier New" pitchFamily="34" charset="-120"/>
+              </a:rPr>
+              <a:t>    SUM(SUM(emission)) OVER (),</a:t>
+            </a:r>
+            <a:endParaRPr lang="en-US" sz="1050" dirty="0">
+              <a:latin typeface="Aptos Display" panose="020B0004020202020204" pitchFamily="34" charset="0"/>
+            </a:endParaRPr>
+          </a:p>
+          <a:p>
+            <a:pPr marL="0" indent="0">
+              <a:lnSpc>
+                <a:spcPct val="125000"/>
+              </a:lnSpc>
+              <a:buNone/>
+            </a:pPr>
+            <a:r>
+              <a:rPr lang="en-US" sz="1050" dirty="0">
+                <a:solidFill>
+                  <a:srgbClr val="A8DADC"/>
+                </a:solidFill>
+                <a:latin typeface="Aptos Display" panose="020B0004020202020204" pitchFamily="34" charset="0"/>
+                <a:ea typeface="Courier New" pitchFamily="34" charset="-122"/>
+                <a:cs typeface="Courier New" pitchFamily="34" charset="-120"/>
+              </a:rPr>
+              <a:t>  2) AS emission_share_pct</a:t>
+            </a:r>
+            <a:endParaRPr lang="en-US" sz="1050" dirty="0">
+              <a:latin typeface="Aptos Display" panose="020B0004020202020204" pitchFamily="34" charset="0"/>
+            </a:endParaRPr>
+          </a:p>
+          <a:p>
+            <a:pPr marL="0" indent="0">
+              <a:lnSpc>
+                <a:spcPct val="125000"/>
+              </a:lnSpc>
+              <a:buNone/>
+            </a:pPr>
+            <a:r>
+              <a:rPr lang="en-US" sz="1050" dirty="0">
+                <a:solidFill>
+                  <a:srgbClr val="A8DADC"/>
+                </a:solidFill>
+                <a:latin typeface="Aptos Display" panose="020B0004020202020204" pitchFamily="34" charset="0"/>
+                <a:ea typeface="Courier New" pitchFamily="34" charset="-122"/>
+                <a:cs typeface="Courier New" pitchFamily="34" charset="-120"/>
+              </a:rPr>
+              <a:t>FROM emission_3</a:t>
+            </a:r>
+            <a:endParaRPr lang="en-US" sz="1050" dirty="0">
+              <a:latin typeface="Aptos Display" panose="020B0004020202020204" pitchFamily="34" charset="0"/>
+            </a:endParaRPr>
+          </a:p>
+          <a:p>
+            <a:pPr marL="0" indent="0">
+              <a:lnSpc>
+                <a:spcPct val="125000"/>
+              </a:lnSpc>
+              <a:buNone/>
+            </a:pPr>
+            <a:r>
+              <a:rPr lang="en-US" sz="1050" dirty="0">
+                <a:solidFill>
+                  <a:srgbClr val="A8DADC"/>
+                </a:solidFill>
+                <a:latin typeface="Aptos Display" panose="020B0004020202020204" pitchFamily="34" charset="0"/>
+                <a:ea typeface="Courier New" pitchFamily="34" charset="-122"/>
+                <a:cs typeface="Courier New" pitchFamily="34" charset="-120"/>
+              </a:rPr>
+              <a:t>GROUP BY country</a:t>
+            </a:r>
+            <a:endParaRPr lang="en-US" sz="1050" dirty="0">
+              <a:latin typeface="Aptos Display" panose="020B0004020202020204" pitchFamily="34" charset="0"/>
+            </a:endParaRPr>
+          </a:p>
+          <a:p>
+            <a:pPr marL="0" indent="0">
+              <a:lnSpc>
+                <a:spcPct val="125000"/>
+              </a:lnSpc>
+              <a:buNone/>
+            </a:pPr>
+            <a:r>
+              <a:rPr lang="en-US" sz="1050" dirty="0">
+                <a:solidFill>
+                  <a:srgbClr val="A8DADC"/>
+                </a:solidFill>
+                <a:latin typeface="Aptos Display" panose="020B0004020202020204" pitchFamily="34" charset="0"/>
+                <a:ea typeface="Courier New" pitchFamily="34" charset="-122"/>
+                <a:cs typeface="Courier New" pitchFamily="34" charset="-120"/>
+              </a:rPr>
+              <a:t>ORDER BY emission_share_pct DESC;</a:t>
+            </a:r>
+            <a:endParaRPr lang="en-US" sz="1050" dirty="0">
+              <a:latin typeface="Aptos Display" panose="020B0004020202020204" pitchFamily="34" charset="0"/>
+            </a:endParaRPr>
+          </a:p>
+        </p:txBody>
+      </p:sp>
+      <p:sp>
+        <p:nvSpPr>
+          <p:cNvPr id="22" name="Shape 16">
+            <a:extLst>
+              <a:ext uri="{FF2B5EF4-FFF2-40B4-BE49-F238E27FC236}">
+                <a16:creationId xmlns:a16="http://schemas.microsoft.com/office/drawing/2014/main" id="{5BD0094F-8433-7DD2-4A73-465076DED1AC}"/>
+              </a:ext>
+            </a:extLst>
+          </p:cNvPr>
+          <p:cNvSpPr/>
+          <p:nvPr/>
+        </p:nvSpPr>
+        <p:spPr>
+          <a:xfrm>
+            <a:off x="6469890" y="3927083"/>
+            <a:ext cx="4299710" cy="2302255"/>
+          </a:xfrm>
+          <a:prstGeom prst="rect">
+            <a:avLst/>
+          </a:prstGeom>
+          <a:solidFill>
+            <a:srgbClr val="223045"/>
+          </a:solidFill>
+          <a:ln w="15240">
+            <a:solidFill>
+              <a:srgbClr val="2D8B8B"/>
+            </a:solidFill>
+            <a:prstDash val="solid"/>
+          </a:ln>
+          <a:effectLst>
+            <a:outerShdw blurRad="101600" dist="38100" dir="8100000" algn="bl" rotWithShape="0">
+              <a:srgbClr val="000000">
+                <a:alpha val="22000"/>
+              </a:srgbClr>
+            </a:outerShdw>
+          </a:effectLst>
+        </p:spPr>
+      </p:sp>
+      <p:sp>
+        <p:nvSpPr>
+          <p:cNvPr id="23" name="Text 17">
+            <a:extLst>
+              <a:ext uri="{FF2B5EF4-FFF2-40B4-BE49-F238E27FC236}">
+                <a16:creationId xmlns:a16="http://schemas.microsoft.com/office/drawing/2014/main" id="{C64A014F-695B-D0C9-8A58-9CBFE4F8562E}"/>
+              </a:ext>
+            </a:extLst>
+          </p:cNvPr>
+          <p:cNvSpPr/>
+          <p:nvPr/>
+        </p:nvSpPr>
+        <p:spPr>
+          <a:xfrm>
+            <a:off x="6570196" y="3948999"/>
+            <a:ext cx="4087036" cy="375087"/>
+          </a:xfrm>
+          <a:prstGeom prst="rect">
+            <a:avLst/>
+          </a:prstGeom>
+          <a:noFill/>
+          <a:ln/>
+        </p:spPr>
+        <p:txBody>
+          <a:bodyPr wrap="square" rtlCol="0" anchor="ctr"/>
+          <a:lstStyle/>
+          <a:p>
+            <a:pPr marL="0" indent="0">
+              <a:lnSpc>
+                <a:spcPct val="110000"/>
+              </a:lnSpc>
+              <a:buNone/>
+            </a:pPr>
+            <a:r>
+              <a:rPr lang="en-US" sz="1200" b="1" dirty="0">
+                <a:solidFill>
+                  <a:srgbClr val="A8DADC"/>
+                </a:solidFill>
+                <a:latin typeface="Aptos Display" panose="020B0004020202020204" pitchFamily="34" charset="0"/>
+                <a:ea typeface="DejaVu Sans" pitchFamily="34" charset="-122"/>
+                <a:cs typeface="DejaVu Sans" pitchFamily="34" charset="-120"/>
+              </a:rPr>
+              <a:t>Global Average GDP, Emission &amp; Population / Year</a:t>
+            </a:r>
+            <a:endParaRPr lang="en-US" sz="1200" dirty="0">
+              <a:latin typeface="Aptos Display" panose="020B0004020202020204" pitchFamily="34" charset="0"/>
+            </a:endParaRPr>
+          </a:p>
+        </p:txBody>
+      </p:sp>
+      <p:sp>
+        <p:nvSpPr>
+          <p:cNvPr id="24" name="Shape 18">
+            <a:extLst>
+              <a:ext uri="{FF2B5EF4-FFF2-40B4-BE49-F238E27FC236}">
+                <a16:creationId xmlns:a16="http://schemas.microsoft.com/office/drawing/2014/main" id="{794895C5-5571-5044-B00A-085A60C78278}"/>
+              </a:ext>
+            </a:extLst>
+          </p:cNvPr>
+          <p:cNvSpPr/>
+          <p:nvPr/>
+        </p:nvSpPr>
+        <p:spPr>
+          <a:xfrm>
+            <a:off x="6579618" y="4324087"/>
+            <a:ext cx="4087036" cy="1793492"/>
+          </a:xfrm>
+          <a:prstGeom prst="rect">
+            <a:avLst/>
+          </a:prstGeom>
+          <a:solidFill>
+            <a:srgbClr val="172030"/>
+          </a:solidFill>
+          <a:ln w="6350">
+            <a:solidFill>
+              <a:srgbClr val="7AA5B0"/>
+            </a:solidFill>
+            <a:prstDash val="solid"/>
+          </a:ln>
+        </p:spPr>
+      </p:sp>
+      <p:sp>
+        <p:nvSpPr>
+          <p:cNvPr id="25" name="Text 19">
+            <a:extLst>
+              <a:ext uri="{FF2B5EF4-FFF2-40B4-BE49-F238E27FC236}">
+                <a16:creationId xmlns:a16="http://schemas.microsoft.com/office/drawing/2014/main" id="{522D41E6-72FC-D20D-69F6-458DAE0DD4A6}"/>
+              </a:ext>
+            </a:extLst>
+          </p:cNvPr>
+          <p:cNvSpPr/>
+          <p:nvPr/>
+        </p:nvSpPr>
+        <p:spPr>
+          <a:xfrm>
+            <a:off x="6579618" y="4324087"/>
+            <a:ext cx="4087035" cy="1793492"/>
+          </a:xfrm>
+          <a:prstGeom prst="rect">
+            <a:avLst/>
+          </a:prstGeom>
+          <a:noFill/>
+          <a:ln/>
+        </p:spPr>
+        <p:txBody>
+          <a:bodyPr wrap="square" rtlCol="0" anchor="ctr"/>
+          <a:lstStyle/>
+          <a:p>
+            <a:pPr marL="0" indent="0">
+              <a:lnSpc>
+                <a:spcPct val="125000"/>
+              </a:lnSpc>
+              <a:buNone/>
+            </a:pPr>
+            <a:r>
+              <a:rPr lang="en-US" sz="1100" dirty="0">
+                <a:solidFill>
+                  <a:srgbClr val="A8DADC"/>
+                </a:solidFill>
+                <a:latin typeface="Aptos Display" panose="020B0004020202020204" pitchFamily="34" charset="0"/>
+                <a:ea typeface="Courier New" pitchFamily="34" charset="-122"/>
+                <a:cs typeface="Courier New" pitchFamily="34" charset="-120"/>
+              </a:rPr>
+              <a:t>SELECT g.year,</a:t>
+            </a:r>
+            <a:endParaRPr lang="en-US" sz="1100" dirty="0">
+              <a:latin typeface="Aptos Display" panose="020B0004020202020204" pitchFamily="34" charset="0"/>
+            </a:endParaRPr>
+          </a:p>
+          <a:p>
+            <a:pPr marL="0" indent="0">
+              <a:lnSpc>
+                <a:spcPct val="125000"/>
+              </a:lnSpc>
+              <a:buNone/>
+            </a:pPr>
+            <a:r>
+              <a:rPr lang="en-US" sz="1100" dirty="0">
+                <a:solidFill>
+                  <a:srgbClr val="A8DADC"/>
+                </a:solidFill>
+                <a:latin typeface="Aptos Display" panose="020B0004020202020204" pitchFamily="34" charset="0"/>
+                <a:ea typeface="Courier New" pitchFamily="34" charset="-122"/>
+                <a:cs typeface="Courier New" pitchFamily="34" charset="-120"/>
+              </a:rPr>
+              <a:t>  AVG(g.Value)           AS avg_gdp,</a:t>
+            </a:r>
+            <a:endParaRPr lang="en-US" sz="1100" dirty="0">
+              <a:latin typeface="Aptos Display" panose="020B0004020202020204" pitchFamily="34" charset="0"/>
+            </a:endParaRPr>
+          </a:p>
+          <a:p>
+            <a:pPr marL="0" indent="0">
+              <a:lnSpc>
+                <a:spcPct val="125000"/>
+              </a:lnSpc>
+              <a:buNone/>
+            </a:pPr>
+            <a:r>
+              <a:rPr lang="en-US" sz="1100" dirty="0">
+                <a:solidFill>
+                  <a:srgbClr val="A8DADC"/>
+                </a:solidFill>
+                <a:latin typeface="Aptos Display" panose="020B0004020202020204" pitchFamily="34" charset="0"/>
+                <a:ea typeface="Courier New" pitchFamily="34" charset="-122"/>
+                <a:cs typeface="Courier New" pitchFamily="34" charset="-120"/>
+              </a:rPr>
+              <a:t>  AVG(e.total_emission)  AS avg_emission,</a:t>
+            </a:r>
+            <a:endParaRPr lang="en-US" sz="1100" dirty="0">
+              <a:latin typeface="Aptos Display" panose="020B0004020202020204" pitchFamily="34" charset="0"/>
+            </a:endParaRPr>
+          </a:p>
+          <a:p>
+            <a:pPr marL="0" indent="0">
+              <a:lnSpc>
+                <a:spcPct val="125000"/>
+              </a:lnSpc>
+              <a:buNone/>
+            </a:pPr>
+            <a:r>
+              <a:rPr lang="en-US" sz="1100" dirty="0">
+                <a:solidFill>
+                  <a:srgbClr val="A8DADC"/>
+                </a:solidFill>
+                <a:latin typeface="Aptos Display" panose="020B0004020202020204" pitchFamily="34" charset="0"/>
+                <a:ea typeface="Courier New" pitchFamily="34" charset="-122"/>
+                <a:cs typeface="Courier New" pitchFamily="34" charset="-120"/>
+              </a:rPr>
+              <a:t>  AVG(p.Value)           AS avg_population</a:t>
+            </a:r>
+            <a:endParaRPr lang="en-US" sz="1100" dirty="0">
+              <a:latin typeface="Aptos Display" panose="020B0004020202020204" pitchFamily="34" charset="0"/>
+            </a:endParaRPr>
+          </a:p>
+          <a:p>
+            <a:pPr marL="0" indent="0">
+              <a:lnSpc>
+                <a:spcPct val="125000"/>
+              </a:lnSpc>
+              <a:buNone/>
+            </a:pPr>
+            <a:r>
+              <a:rPr lang="en-US" sz="1100" dirty="0">
+                <a:solidFill>
+                  <a:srgbClr val="A8DADC"/>
+                </a:solidFill>
+                <a:latin typeface="Aptos Display" panose="020B0004020202020204" pitchFamily="34" charset="0"/>
+                <a:ea typeface="Courier New" pitchFamily="34" charset="-122"/>
+                <a:cs typeface="Courier New" pitchFamily="34" charset="-120"/>
+              </a:rPr>
+              <a:t>FROM gdp_3 g</a:t>
+            </a:r>
+            <a:endParaRPr lang="en-US" sz="1100" dirty="0">
+              <a:latin typeface="Aptos Display" panose="020B0004020202020204" pitchFamily="34" charset="0"/>
+            </a:endParaRPr>
+          </a:p>
+          <a:p>
+            <a:pPr marL="0" indent="0">
+              <a:lnSpc>
+                <a:spcPct val="125000"/>
+              </a:lnSpc>
+              <a:buNone/>
+            </a:pPr>
+            <a:r>
+              <a:rPr lang="en-US" sz="1100" dirty="0">
+                <a:solidFill>
+                  <a:srgbClr val="A8DADC"/>
+                </a:solidFill>
+                <a:latin typeface="Aptos Display" panose="020B0004020202020204" pitchFamily="34" charset="0"/>
+                <a:ea typeface="Courier New" pitchFamily="34" charset="-122"/>
+                <a:cs typeface="Courier New" pitchFamily="34" charset="-120"/>
+              </a:rPr>
+              <a:t>JOIN (...sum subquery...) e ...</a:t>
+            </a:r>
+            <a:endParaRPr lang="en-US" sz="1100" dirty="0">
+              <a:latin typeface="Aptos Display" panose="020B0004020202020204" pitchFamily="34" charset="0"/>
+            </a:endParaRPr>
+          </a:p>
+          <a:p>
+            <a:pPr marL="0" indent="0">
+              <a:lnSpc>
+                <a:spcPct val="125000"/>
+              </a:lnSpc>
+              <a:buNone/>
+            </a:pPr>
+            <a:r>
+              <a:rPr lang="en-US" sz="1100" dirty="0">
+                <a:solidFill>
+                  <a:srgbClr val="A8DADC"/>
+                </a:solidFill>
+                <a:latin typeface="Aptos Display" panose="020B0004020202020204" pitchFamily="34" charset="0"/>
+                <a:ea typeface="Courier New" pitchFamily="34" charset="-122"/>
+                <a:cs typeface="Courier New" pitchFamily="34" charset="-120"/>
+              </a:rPr>
+              <a:t>JOIN population p ...</a:t>
+            </a:r>
+            <a:endParaRPr lang="en-US" sz="1100" dirty="0">
+              <a:latin typeface="Aptos Display" panose="020B0004020202020204" pitchFamily="34" charset="0"/>
+            </a:endParaRPr>
+          </a:p>
+          <a:p>
+            <a:pPr marL="0" indent="0">
+              <a:lnSpc>
+                <a:spcPct val="125000"/>
+              </a:lnSpc>
+              <a:buNone/>
+            </a:pPr>
+            <a:r>
+              <a:rPr lang="en-US" sz="1100" dirty="0">
+                <a:solidFill>
+                  <a:srgbClr val="A8DADC"/>
+                </a:solidFill>
+                <a:latin typeface="Aptos Display" panose="020B0004020202020204" pitchFamily="34" charset="0"/>
+                <a:ea typeface="Courier New" pitchFamily="34" charset="-122"/>
+                <a:cs typeface="Courier New" pitchFamily="34" charset="-120"/>
+              </a:rPr>
+              <a:t>GROUP BY g.year ORDER BY g.year;</a:t>
+            </a:r>
+            <a:endParaRPr lang="en-US" sz="1100" dirty="0">
+              <a:latin typeface="Aptos Display" panose="020B0004020202020204" pitchFamily="34" charset="0"/>
+            </a:endParaRPr>
+          </a:p>
+        </p:txBody>
+      </p:sp>
+      <p:sp>
+        <p:nvSpPr>
+          <p:cNvPr id="26" name="Shape 0">
+            <a:extLst>
+              <a:ext uri="{FF2B5EF4-FFF2-40B4-BE49-F238E27FC236}">
+                <a16:creationId xmlns:a16="http://schemas.microsoft.com/office/drawing/2014/main" id="{3206DFEC-DB4E-FEA3-8E75-BBB863B2BE59}"/>
+              </a:ext>
+            </a:extLst>
+          </p:cNvPr>
+          <p:cNvSpPr/>
+          <p:nvPr/>
+        </p:nvSpPr>
+        <p:spPr>
+          <a:xfrm>
+            <a:off x="0" y="0"/>
+            <a:ext cx="12192000" cy="502920"/>
+          </a:xfrm>
+          <a:prstGeom prst="rect">
+            <a:avLst/>
+          </a:prstGeom>
+          <a:solidFill>
+            <a:srgbClr val="FF0000"/>
+          </a:solidFill>
+          <a:ln w="12700">
+            <a:noFill/>
+            <a:prstDash val="solid"/>
+          </a:ln>
+        </p:spPr>
+      </p:sp>
+    </p:spTree>
+    <p:extLst>
+      <p:ext uri="{BB962C8B-B14F-4D97-AF65-F5344CB8AC3E}">
+        <p14:creationId xmlns:p14="http://schemas.microsoft.com/office/powerpoint/2010/main" val="3099176851"/>
+      </p:ext>
+    </p:extLst>
+  </p:cSld>
+  <p:clrMapOvr>
+    <a:masterClrMapping/>
+  </p:clrMapOvr>
+  <mc:AlternateContent xmlns:mc="http://schemas.openxmlformats.org/markup-compatibility/2006" xmlns:p159="http://schemas.microsoft.com/office/powerpoint/2015/09/main">
+    <mc:Choice Requires="p159">
+      <p:transition>
+        <p159:morph option="byObject"/>
+      </p:transition>
+    </mc:Choice>
+    <mc:Fallback xmlns="">
       <p:transition>
         <p:fade/>
       </p:transition>
